--- a/jv-5days/deck/5days-kickoff.pptx
+++ b/jv-5days/deck/5days-kickoff.pptx
@@ -1836,7 +1836,7 @@
     <p:bg>
       <p:bgPr>
         <a:solidFill>
-          <a:srgbClr val="7A1524"/>
+          <a:srgbClr val="FDF5F6"/>
         </a:solidFill>
       </p:bgPr>
     </p:bg>
@@ -1862,16 +1862,23 @@
         </p:nvSpPr>
         <p:spPr>
           <a:xfrm>
-            <a:off x="0" y="0"/>
-            <a:ext cx="9144000" cy="54864"/>
-          </a:xfrm>
-          <a:prstGeom prst="rect">
-            <a:avLst/>
+            <a:off x="182880" y="182880"/>
+            <a:ext cx="8778240" cy="4777740"/>
+          </a:xfrm>
+          <a:prstGeom prst="roundRect">
+            <a:avLst>
+              <a:gd name="adj" fmla="val 766"/>
+            </a:avLst>
           </a:prstGeom>
           <a:solidFill>
-            <a:srgbClr val="B08D5B"/>
+            <a:srgbClr val="FDF5F6"/>
           </a:solidFill>
-          <a:ln/>
+          <a:ln w="9525">
+            <a:solidFill>
+              <a:srgbClr val="E8D8BC"/>
+            </a:solidFill>
+            <a:prstDash val="solid"/>
+          </a:ln>
         </p:spPr>
       </p:sp>
       <p:sp>
@@ -1882,8 +1889,8 @@
         </p:nvSpPr>
         <p:spPr>
           <a:xfrm>
-            <a:off x="822960" y="1188720"/>
-            <a:ext cx="7498080" cy="274320"/>
+            <a:off x="640080" y="475488"/>
+            <a:ext cx="7863840" cy="237744"/>
           </a:xfrm>
           <a:prstGeom prst="rect">
             <a:avLst/>
@@ -1899,17 +1906,17 @@
               <a:buNone/>
             </a:pPr>
             <a:r>
-              <a:rPr lang="en-US" sz="1100" b="1" spc="240" kern="0" dirty="0">
-                <a:solidFill>
-                  <a:srgbClr val="E7C9A8"/>
+              <a:rPr lang="en-US" sz="1000" b="1" spc="260" kern="0" dirty="0">
+                <a:solidFill>
+                  <a:srgbClr val="C4A06A"/>
                 </a:solidFill>
                 <a:latin typeface="Yu Gothic" pitchFamily="34" charset="0"/>
                 <a:ea typeface="Yu Gothic" pitchFamily="34" charset="-122"/>
                 <a:cs typeface="Yu Gothic" pitchFamily="34" charset="-120"/>
               </a:rPr>
-              <a:t>KICK OFF</a:t>
-            </a:r>
-            <a:endParaRPr lang="en-US" sz="1100" dirty="0"/>
+              <a:t>5 DAYS　KICK OFF</a:t>
+            </a:r>
+            <a:endParaRPr lang="en-US" sz="1000" dirty="0"/>
           </a:p>
         </p:txBody>
       </p:sp>
@@ -1921,8 +1928,8 @@
         </p:nvSpPr>
         <p:spPr>
           <a:xfrm>
-            <a:off x="822960" y="1572768"/>
-            <a:ext cx="7498080" cy="640080"/>
+            <a:off x="640080" y="768096"/>
+            <a:ext cx="7863840" cy="512064"/>
           </a:xfrm>
           <a:prstGeom prst="rect">
             <a:avLst/>
@@ -1938,9 +1945,9 @@
               <a:buNone/>
             </a:pPr>
             <a:r>
-              <a:rPr lang="en-US" sz="3300" b="1" spc="60" kern="0" dirty="0">
-                <a:solidFill>
-                  <a:srgbClr val="FFFFFF"/>
+              <a:rPr lang="en-US" sz="2700" b="1" spc="80" kern="0" dirty="0">
+                <a:solidFill>
+                  <a:srgbClr val="A42647"/>
                 </a:solidFill>
                 <a:latin typeface="Yu Mincho" pitchFamily="34" charset="0"/>
                 <a:ea typeface="Yu Mincho" pitchFamily="34" charset="-122"/>
@@ -1948,7 +1955,7 @@
               </a:rPr>
               <a:t>私ファーストプログラム</a:t>
             </a:r>
-            <a:endParaRPr lang="en-US" sz="3300" dirty="0"/>
+            <a:endParaRPr lang="en-US" sz="2700" dirty="0"/>
           </a:p>
         </p:txBody>
       </p:sp>
@@ -1960,8 +1967,8 @@
         </p:nvSpPr>
         <p:spPr>
           <a:xfrm>
-            <a:off x="822960" y="2231136"/>
-            <a:ext cx="7498080" cy="658368"/>
+            <a:off x="640080" y="1280160"/>
+            <a:ext cx="7863840" cy="658368"/>
           </a:xfrm>
           <a:prstGeom prst="rect">
             <a:avLst/>
@@ -1977,15 +1984,15 @@
               <a:buNone/>
             </a:pPr>
             <a:r>
-              <a:rPr lang="en-US" sz="4000" b="1" spc="400" kern="0" dirty="0">
-                <a:solidFill>
-                  <a:srgbClr val="F3D9C4"/>
+              <a:rPr lang="en-US" sz="4000" b="1" spc="200" kern="0" dirty="0">
+                <a:solidFill>
+                  <a:srgbClr val="A42647"/>
                 </a:solidFill>
                 <a:latin typeface="Yu Mincho" pitchFamily="34" charset="0"/>
                 <a:ea typeface="Yu Mincho" pitchFamily="34" charset="-122"/>
                 <a:cs typeface="Yu Mincho" pitchFamily="34" charset="-120"/>
               </a:rPr>
-              <a:t>5 DAYS</a:t>
+              <a:t>5DAYS</a:t>
             </a:r>
             <a:endParaRPr lang="en-US" sz="4000" dirty="0"/>
           </a:p>
@@ -1999,16 +2006,23 @@
         </p:nvSpPr>
         <p:spPr>
           <a:xfrm>
-            <a:off x="3977640" y="3035808"/>
-            <a:ext cx="1188720" cy="22860"/>
-          </a:xfrm>
-          <a:prstGeom prst="rect">
-            <a:avLst/>
+            <a:off x="2542032" y="2029968"/>
+            <a:ext cx="4059936" cy="310896"/>
+          </a:xfrm>
+          <a:prstGeom prst="roundRect">
+            <a:avLst>
+              <a:gd name="adj" fmla="val 147059"/>
+            </a:avLst>
           </a:prstGeom>
           <a:solidFill>
-            <a:srgbClr val="E7C9A8"/>
+            <a:srgbClr val="F7DCE3"/>
           </a:solidFill>
-          <a:ln/>
+          <a:ln w="12700">
+            <a:solidFill>
+              <a:srgbClr val="F7DCE3"/>
+            </a:solidFill>
+            <a:prstDash val="solid"/>
+          </a:ln>
         </p:spPr>
       </p:sp>
       <p:sp>
@@ -2019,8 +2033,8 @@
         </p:nvSpPr>
         <p:spPr>
           <a:xfrm>
-            <a:off x="822960" y="3273552"/>
-            <a:ext cx="7498080" cy="274320"/>
+            <a:off x="640080" y="2029968"/>
+            <a:ext cx="7863840" cy="310896"/>
           </a:xfrm>
           <a:prstGeom prst="rect">
             <a:avLst/>
@@ -2036,30 +2050,145 @@
               <a:buNone/>
             </a:pPr>
             <a:r>
-              <a:rPr lang="en-US" sz="1300" spc="40" kern="0" dirty="0">
-                <a:solidFill>
-                  <a:srgbClr val="F0DEDE"/>
+              <a:rPr lang="en-US" sz="1350" b="1" spc="40" kern="0" dirty="0">
+                <a:solidFill>
+                  <a:srgbClr val="A42647"/>
                 </a:solidFill>
                 <a:latin typeface="Yu Gothic" pitchFamily="34" charset="0"/>
                 <a:ea typeface="Yu Gothic" pitchFamily="34" charset="-122"/>
                 <a:cs typeface="Yu Gothic" pitchFamily="34" charset="-120"/>
               </a:rPr>
-              <a:t>2026年10月18日</a:t>
-            </a:r>
-            <a:endParaRPr lang="en-US" sz="1300" dirty="0"/>
-          </a:p>
-        </p:txBody>
-      </p:sp>
-      <p:sp>
-        <p:nvSpPr>
-          <p:cNvPr id="8" name="Text 6"/>
-          <p:cNvSpPr/>
-          <p:nvPr/>
-        </p:nvSpPr>
-        <p:spPr>
-          <a:xfrm>
-            <a:off x="822960" y="3602736"/>
-            <a:ext cx="7498080" cy="292608"/>
+              <a:t>朝15分で、ごきげんな私をつくる5日間</a:t>
+            </a:r>
+            <a:endParaRPr lang="en-US" sz="1350" dirty="0"/>
+          </a:p>
+        </p:txBody>
+      </p:sp>
+      <p:sp>
+        <p:nvSpPr>
+          <p:cNvPr id="8" name="Shape 6"/>
+          <p:cNvSpPr/>
+          <p:nvPr/>
+        </p:nvSpPr>
+        <p:spPr>
+          <a:xfrm>
+            <a:off x="3086100" y="2500884"/>
+            <a:ext cx="1325880" cy="1325880"/>
+          </a:xfrm>
+          <a:prstGeom prst="ellipse">
+            <a:avLst/>
+          </a:prstGeom>
+          <a:solidFill>
+            <a:srgbClr val="E8D8BC"/>
+          </a:solidFill>
+          <a:ln/>
+        </p:spPr>
+      </p:sp>
+      <p:pic>
+        <p:nvPicPr>
+          <p:cNvPr id="9" name="Image 0" descr="images/miyuki.jpg">    </p:cNvPr>
+          <p:cNvPicPr>
+            <a:picLocks noChangeAspect="1"/>
+          </p:cNvPicPr>
+          <p:nvPr/>
+        </p:nvPicPr>
+        <p:blipFill>
+          <a:blip r:embed="rId1"/>
+          <a:stretch>
+            <a:fillRect/>
+          </a:stretch>
+        </p:blipFill>
+        <p:spPr>
+          <a:xfrm>
+            <a:off x="3127248" y="2542032"/>
+            <a:ext cx="1243584" cy="1243584"/>
+          </a:xfrm>
+          <a:prstGeom prst="ellipse">
+            <a:avLst/>
+          </a:prstGeom>
+        </p:spPr>
+      </p:pic>
+      <p:sp>
+        <p:nvSpPr>
+          <p:cNvPr id="10" name="Shape 7"/>
+          <p:cNvSpPr/>
+          <p:nvPr/>
+        </p:nvSpPr>
+        <p:spPr>
+          <a:xfrm>
+            <a:off x="4732020" y="2500884"/>
+            <a:ext cx="1325880" cy="1325880"/>
+          </a:xfrm>
+          <a:prstGeom prst="ellipse">
+            <a:avLst/>
+          </a:prstGeom>
+          <a:solidFill>
+            <a:srgbClr val="E8D8BC"/>
+          </a:solidFill>
+          <a:ln/>
+        </p:spPr>
+      </p:sp>
+      <p:pic>
+        <p:nvPicPr>
+          <p:cNvPr id="11" name="Image 1" descr="images/shiorin.jpg">    </p:cNvPr>
+          <p:cNvPicPr>
+            <a:picLocks noChangeAspect="1"/>
+          </p:cNvPicPr>
+          <p:nvPr/>
+        </p:nvPicPr>
+        <p:blipFill>
+          <a:blip r:embed="rId2"/>
+          <a:stretch>
+            <a:fillRect/>
+          </a:stretch>
+        </p:blipFill>
+        <p:spPr>
+          <a:xfrm>
+            <a:off x="4773168" y="2542032"/>
+            <a:ext cx="1243584" cy="1243584"/>
+          </a:xfrm>
+          <a:prstGeom prst="ellipse">
+            <a:avLst/>
+          </a:prstGeom>
+        </p:spPr>
+      </p:pic>
+      <p:sp>
+        <p:nvSpPr>
+          <p:cNvPr id="12" name="Shape 8"/>
+          <p:cNvSpPr/>
+          <p:nvPr/>
+        </p:nvSpPr>
+        <p:spPr>
+          <a:xfrm>
+            <a:off x="2798064" y="3858768"/>
+            <a:ext cx="1901952" cy="256032"/>
+          </a:xfrm>
+          <a:prstGeom prst="roundRect">
+            <a:avLst>
+              <a:gd name="adj" fmla="val 178571"/>
+            </a:avLst>
+          </a:prstGeom>
+          <a:solidFill>
+            <a:srgbClr val="F7DCE3"/>
+          </a:solidFill>
+          <a:ln w="12700">
+            <a:solidFill>
+              <a:srgbClr val="F7DCE3"/>
+            </a:solidFill>
+            <a:prstDash val="solid"/>
+          </a:ln>
+        </p:spPr>
+      </p:sp>
+      <p:sp>
+        <p:nvSpPr>
+          <p:cNvPr id="13" name="Text 9"/>
+          <p:cNvSpPr/>
+          <p:nvPr/>
+        </p:nvSpPr>
+        <p:spPr>
+          <a:xfrm>
+            <a:off x="2798064" y="3858768"/>
+            <a:ext cx="1901952" cy="256032"/>
           </a:xfrm>
           <a:prstGeom prst="rect">
             <a:avLst/>
@@ -2075,30 +2204,57 @@
               <a:buNone/>
             </a:pPr>
             <a:r>
-              <a:rPr lang="en-US" sz="1400" spc="40" kern="0" dirty="0">
-                <a:solidFill>
-                  <a:srgbClr val="FFFFFF"/>
+              <a:rPr lang="en-US" sz="900" b="1" spc="40" kern="0" dirty="0">
+                <a:solidFill>
+                  <a:srgbClr val="A42647"/>
                 </a:solidFill>
                 <a:latin typeface="Yu Gothic" pitchFamily="34" charset="0"/>
                 <a:ea typeface="Yu Gothic" pitchFamily="34" charset="-122"/>
                 <a:cs typeface="Yu Gothic" pitchFamily="34" charset="-120"/>
               </a:rPr>
-              <a:t>しおりん（佐藤 栞）　×　みゆき</a:t>
-            </a:r>
-            <a:endParaRPr lang="en-US" sz="1400" dirty="0"/>
-          </a:p>
-        </p:txBody>
-      </p:sp>
-      <p:sp>
-        <p:nvSpPr>
-          <p:cNvPr id="9" name="Text 7"/>
-          <p:cNvSpPr/>
-          <p:nvPr/>
-        </p:nvSpPr>
-        <p:spPr>
-          <a:xfrm>
-            <a:off x="822960" y="4078224"/>
-            <a:ext cx="7498080" cy="274320"/>
+              <a:t>マナー講師　三浦みゆき</a:t>
+            </a:r>
+            <a:endParaRPr lang="en-US" sz="900" dirty="0"/>
+          </a:p>
+        </p:txBody>
+      </p:sp>
+      <p:sp>
+        <p:nvSpPr>
+          <p:cNvPr id="14" name="Shape 10"/>
+          <p:cNvSpPr/>
+          <p:nvPr/>
+        </p:nvSpPr>
+        <p:spPr>
+          <a:xfrm>
+            <a:off x="4809744" y="3858768"/>
+            <a:ext cx="1536192" cy="256032"/>
+          </a:xfrm>
+          <a:prstGeom prst="roundRect">
+            <a:avLst>
+              <a:gd name="adj" fmla="val 178571"/>
+            </a:avLst>
+          </a:prstGeom>
+          <a:solidFill>
+            <a:srgbClr val="F7DCE3"/>
+          </a:solidFill>
+          <a:ln w="12700">
+            <a:solidFill>
+              <a:srgbClr val="F7DCE3"/>
+            </a:solidFill>
+            <a:prstDash val="solid"/>
+          </a:ln>
+        </p:spPr>
+      </p:sp>
+      <p:sp>
+        <p:nvSpPr>
+          <p:cNvPr id="15" name="Text 11"/>
+          <p:cNvSpPr/>
+          <p:nvPr/>
+        </p:nvSpPr>
+        <p:spPr>
+          <a:xfrm>
+            <a:off x="4809744" y="3858768"/>
+            <a:ext cx="1536192" cy="256032"/>
           </a:xfrm>
           <a:prstGeom prst="rect">
             <a:avLst/>
@@ -2114,17 +2270,95 @@
               <a:buNone/>
             </a:pPr>
             <a:r>
-              <a:rPr lang="en-US" sz="1150" spc="40" kern="0" dirty="0">
-                <a:solidFill>
-                  <a:srgbClr val="E7C9A8"/>
+              <a:rPr lang="en-US" sz="900" b="1" spc="40" kern="0" dirty="0">
+                <a:solidFill>
+                  <a:srgbClr val="A42647"/>
                 </a:solidFill>
                 <a:latin typeface="Yu Gothic" pitchFamily="34" charset="0"/>
                 <a:ea typeface="Yu Gothic" pitchFamily="34" charset="-122"/>
                 <a:cs typeface="Yu Gothic" pitchFamily="34" charset="-120"/>
               </a:rPr>
-              <a:t>明日から5日間、1日15分だけ「私」を最優先にする</a:t>
-            </a:r>
-            <a:endParaRPr lang="en-US" sz="1150" dirty="0"/>
+              <a:t>トレーナー　しおりん</a:t>
+            </a:r>
+            <a:endParaRPr lang="en-US" sz="900" dirty="0"/>
+          </a:p>
+        </p:txBody>
+      </p:sp>
+      <p:sp>
+        <p:nvSpPr>
+          <p:cNvPr id="16" name="Text 12"/>
+          <p:cNvSpPr/>
+          <p:nvPr/>
+        </p:nvSpPr>
+        <p:spPr>
+          <a:xfrm>
+            <a:off x="640080" y="4261104"/>
+            <a:ext cx="7863840" cy="292608"/>
+          </a:xfrm>
+          <a:prstGeom prst="rect">
+            <a:avLst/>
+          </a:prstGeom>
+          <a:noFill/>
+          <a:ln/>
+        </p:spPr>
+        <p:txBody>
+          <a:bodyPr wrap="square" rtlCol="0" anchor="ctr"/>
+          <a:lstStyle/>
+          <a:p>
+            <a:pPr algn="ctr" indent="0" marL="0">
+              <a:buNone/>
+            </a:pPr>
+            <a:r>
+              <a:rPr lang="en-US" sz="1400" b="1" spc="80" kern="0" dirty="0">
+                <a:solidFill>
+                  <a:srgbClr val="C9325C"/>
+                </a:solidFill>
+                <a:latin typeface="Yu Mincho" pitchFamily="34" charset="0"/>
+                <a:ea typeface="Yu Mincho" pitchFamily="34" charset="-122"/>
+                <a:cs typeface="Yu Mincho" pitchFamily="34" charset="-120"/>
+              </a:rPr>
+              <a:t>2026年10月18日</a:t>
+            </a:r>
+            <a:endParaRPr lang="en-US" sz="1400" dirty="0"/>
+          </a:p>
+        </p:txBody>
+      </p:sp>
+      <p:sp>
+        <p:nvSpPr>
+          <p:cNvPr id="17" name="Text 13"/>
+          <p:cNvSpPr/>
+          <p:nvPr/>
+        </p:nvSpPr>
+        <p:spPr>
+          <a:xfrm>
+            <a:off x="640080" y="4572000"/>
+            <a:ext cx="7863840" cy="256032"/>
+          </a:xfrm>
+          <a:prstGeom prst="rect">
+            <a:avLst/>
+          </a:prstGeom>
+          <a:noFill/>
+          <a:ln/>
+        </p:spPr>
+        <p:txBody>
+          <a:bodyPr wrap="square" rtlCol="0" anchor="ctr"/>
+          <a:lstStyle/>
+          <a:p>
+            <a:pPr algn="ctr" indent="0" marL="0">
+              <a:buNone/>
+            </a:pPr>
+            <a:r>
+              <a:rPr lang="en-US" sz="1050" spc="40" kern="0" dirty="0">
+                <a:solidFill>
+                  <a:srgbClr val="8C757C"/>
+                </a:solidFill>
+                <a:latin typeface="Yu Gothic" pitchFamily="34" charset="0"/>
+                <a:ea typeface="Yu Gothic" pitchFamily="34" charset="-122"/>
+                <a:cs typeface="Yu Gothic" pitchFamily="34" charset="-120"/>
+              </a:rPr>
+              <a:t>明日から5日間、1日15分だけ「私」を最優先に　♡</a:t>
+            </a:r>
+            <a:endParaRPr lang="en-US" sz="1050" dirty="0"/>
           </a:p>
         </p:txBody>
       </p:sp>
@@ -2142,7 +2376,7 @@
     <p:bg>
       <p:bgPr>
         <a:solidFill>
-          <a:srgbClr val="FDF7F7"/>
+          <a:srgbClr val="FDF5F6"/>
         </a:solidFill>
       </p:bgPr>
     </p:bg>
@@ -2168,34 +2402,34 @@
         </p:nvSpPr>
         <p:spPr>
           <a:xfrm>
-            <a:off x="566928" y="384048"/>
-            <a:ext cx="8046720" cy="237744"/>
-          </a:xfrm>
-          <a:prstGeom prst="rect">
-            <a:avLst/>
-          </a:prstGeom>
-          <a:noFill/>
-          <a:ln/>
-        </p:spPr>
-        <p:txBody>
-          <a:bodyPr wrap="square" rtlCol="0" anchor="ctr"/>
-          <a:lstStyle/>
-          <a:p>
-            <a:pPr indent="0" marL="0">
-              <a:buNone/>
-            </a:pPr>
-            <a:r>
-              <a:rPr lang="en-US" sz="1000" b="1" spc="160" kern="0" dirty="0">
-                <a:solidFill>
-                  <a:srgbClr val="7A1524"/>
+            <a:off x="640080" y="420624"/>
+            <a:ext cx="7863840" cy="237744"/>
+          </a:xfrm>
+          <a:prstGeom prst="rect">
+            <a:avLst/>
+          </a:prstGeom>
+          <a:noFill/>
+          <a:ln/>
+        </p:spPr>
+        <p:txBody>
+          <a:bodyPr wrap="square" rtlCol="0" anchor="ctr"/>
+          <a:lstStyle/>
+          <a:p>
+            <a:pPr indent="0" marL="0">
+              <a:buNone/>
+            </a:pPr>
+            <a:r>
+              <a:rPr lang="en-US" sz="950" b="1" spc="200" kern="0" dirty="0">
+                <a:solidFill>
+                  <a:srgbClr val="C4A06A"/>
                 </a:solidFill>
                 <a:latin typeface="Yu Gothic" pitchFamily="34" charset="0"/>
                 <a:ea typeface="Yu Gothic" pitchFamily="34" charset="-122"/>
                 <a:cs typeface="Yu Gothic" pitchFamily="34" charset="-120"/>
               </a:rPr>
-              <a:t>5 DAYS</a:t>
-            </a:r>
-            <a:endParaRPr lang="en-US" sz="1000" dirty="0"/>
+              <a:t>5  DAYS</a:t>
+            </a:r>
+            <a:endParaRPr lang="en-US" sz="950" dirty="0"/>
           </a:p>
         </p:txBody>
       </p:sp>
@@ -2207,16 +2441,23 @@
         </p:nvSpPr>
         <p:spPr>
           <a:xfrm>
-            <a:off x="566928" y="667512"/>
-            <a:ext cx="457200" cy="32004"/>
-          </a:xfrm>
-          <a:prstGeom prst="rect">
-            <a:avLst/>
+            <a:off x="640080" y="822960"/>
+            <a:ext cx="4754880" cy="274320"/>
+          </a:xfrm>
+          <a:prstGeom prst="roundRect">
+            <a:avLst>
+              <a:gd name="adj" fmla="val 166667"/>
+            </a:avLst>
           </a:prstGeom>
           <a:solidFill>
-            <a:srgbClr val="7A1524"/>
+            <a:srgbClr val="F7DCE3"/>
           </a:solidFill>
-          <a:ln/>
+          <a:ln w="12700">
+            <a:solidFill>
+              <a:srgbClr val="F7DCE3"/>
+            </a:solidFill>
+            <a:prstDash val="solid"/>
+          </a:ln>
         </p:spPr>
       </p:sp>
       <p:sp>
@@ -2227,8 +2468,8 @@
         </p:nvSpPr>
         <p:spPr>
           <a:xfrm>
-            <a:off x="566928" y="822960"/>
-            <a:ext cx="8046720" cy="914400"/>
+            <a:off x="640080" y="676656"/>
+            <a:ext cx="7863840" cy="566928"/>
           </a:xfrm>
           <a:prstGeom prst="rect">
             <a:avLst/>
@@ -2242,43 +2483,23 @@
           <a:p>
             <a:pPr indent="0" marL="0">
               <a:lnSpc>
-                <a:spcPts val="3800"/>
+                <a:spcPts val="3600"/>
               </a:lnSpc>
               <a:buNone/>
             </a:pPr>
             <a:r>
-              <a:rPr lang="en-US" sz="2500" b="1" spc="60" kern="0" dirty="0">
-                <a:solidFill>
-                  <a:srgbClr val="2B2224"/>
+              <a:rPr lang="en-US" sz="2500" b="1" spc="80" kern="0" dirty="0">
+                <a:solidFill>
+                  <a:srgbClr val="A42647"/>
                 </a:solidFill>
                 <a:latin typeface="Yu Mincho" pitchFamily="34" charset="0"/>
                 <a:ea typeface="Yu Mincho" pitchFamily="34" charset="-122"/>
                 <a:cs typeface="Yu Mincho" pitchFamily="34" charset="-120"/>
               </a:rPr>
-              <a:t>明日からの朝15分で、</a:t>
+              <a:t>明日からの朝15分で、やること</a:t>
             </a:r>
             <a:endParaRPr lang="en-US" sz="2500" dirty="0"/>
           </a:p>
-          <a:p>
-            <a:pPr indent="0" marL="0">
-              <a:lnSpc>
-                <a:spcPts val="3800"/>
-              </a:lnSpc>
-              <a:buNone/>
-            </a:pPr>
-            <a:r>
-              <a:rPr lang="en-US" sz="2500" b="1" spc="60" kern="0" dirty="0">
-                <a:solidFill>
-                  <a:srgbClr val="2B2224"/>
-                </a:solidFill>
-                <a:latin typeface="Yu Mincho" pitchFamily="34" charset="0"/>
-                <a:ea typeface="Yu Mincho" pitchFamily="34" charset="-122"/>
-                <a:cs typeface="Yu Mincho" pitchFamily="34" charset="-120"/>
-              </a:rPr>
-              <a:t>やること</a:t>
-            </a:r>
-            <a:endParaRPr lang="en-US" sz="2500" dirty="0"/>
-          </a:p>
         </p:txBody>
       </p:sp>
       <p:sp>
@@ -2289,12 +2510,12 @@
         </p:nvSpPr>
         <p:spPr>
           <a:xfrm>
-            <a:off x="566928" y="2066544"/>
-            <a:ext cx="2523744" cy="1847088"/>
+            <a:off x="640080" y="1792224"/>
+            <a:ext cx="2487168" cy="2103120"/>
           </a:xfrm>
           <a:prstGeom prst="roundRect">
             <a:avLst>
-              <a:gd name="adj" fmla="val 2970"/>
+              <a:gd name="adj" fmla="val 3913"/>
             </a:avLst>
           </a:prstGeom>
           <a:solidFill>
@@ -2302,7 +2523,7 @@
           </a:solidFill>
           <a:ln w="10160">
             <a:solidFill>
-              <a:srgbClr val="E8DCDB"/>
+              <a:srgbClr val="E8D8BC"/>
             </a:solidFill>
             <a:prstDash val="solid"/>
           </a:ln>
@@ -2310,72 +2531,118 @@
       </p:sp>
       <p:sp>
         <p:nvSpPr>
-          <p:cNvPr id="6" name="Shape 4"/>
-          <p:cNvSpPr/>
-          <p:nvPr/>
-        </p:nvSpPr>
-        <p:spPr>
-          <a:xfrm>
-            <a:off x="804672" y="2286000"/>
-            <a:ext cx="310896" cy="27432"/>
-          </a:xfrm>
-          <a:prstGeom prst="rect">
-            <a:avLst/>
-          </a:prstGeom>
-          <a:solidFill>
-            <a:srgbClr val="B08D5B"/>
-          </a:solidFill>
-          <a:ln/>
-        </p:spPr>
-      </p:sp>
-      <p:sp>
-        <p:nvSpPr>
-          <p:cNvPr id="7" name="Text 5"/>
-          <p:cNvSpPr/>
-          <p:nvPr/>
-        </p:nvSpPr>
-        <p:spPr>
-          <a:xfrm>
-            <a:off x="804672" y="2414016"/>
-            <a:ext cx="2048256" cy="329184"/>
-          </a:xfrm>
-          <a:prstGeom prst="rect">
-            <a:avLst/>
-          </a:prstGeom>
-          <a:noFill/>
-          <a:ln/>
-        </p:spPr>
-        <p:txBody>
-          <a:bodyPr wrap="square" rtlCol="0" anchor="ctr"/>
-          <a:lstStyle/>
-          <a:p>
-            <a:pPr indent="0" marL="0">
-              <a:buNone/>
-            </a:pPr>
-            <a:r>
-              <a:rPr lang="en-US" sz="1600" b="1" spc="60" kern="0" dirty="0">
-                <a:solidFill>
-                  <a:srgbClr val="7A1524"/>
+          <p:cNvPr id="6" name="Text 4"/>
+          <p:cNvSpPr/>
+          <p:nvPr/>
+        </p:nvSpPr>
+        <p:spPr>
+          <a:xfrm>
+            <a:off x="859536" y="1920240"/>
+            <a:ext cx="548640" cy="384048"/>
+          </a:xfrm>
+          <a:prstGeom prst="rect">
+            <a:avLst/>
+          </a:prstGeom>
+          <a:noFill/>
+          <a:ln/>
+        </p:spPr>
+        <p:txBody>
+          <a:bodyPr wrap="square" rtlCol="0" anchor="ctr"/>
+          <a:lstStyle/>
+          <a:p>
+            <a:pPr indent="0" marL="0">
+              <a:buNone/>
+            </a:pPr>
+            <a:r>
+              <a:rPr lang="en-US" sz="2000" b="1" spc="80" kern="0" dirty="0">
+                <a:solidFill>
+                  <a:srgbClr val="F7DCE3"/>
                 </a:solidFill>
                 <a:latin typeface="Yu Mincho" pitchFamily="34" charset="0"/>
                 <a:ea typeface="Yu Mincho" pitchFamily="34" charset="-122"/>
                 <a:cs typeface="Yu Mincho" pitchFamily="34" charset="-120"/>
               </a:rPr>
+              <a:t>01</a:t>
+            </a:r>
+            <a:endParaRPr lang="en-US" sz="2000" dirty="0"/>
+          </a:p>
+        </p:txBody>
+      </p:sp>
+      <p:sp>
+        <p:nvSpPr>
+          <p:cNvPr id="7" name="Shape 5"/>
+          <p:cNvSpPr/>
+          <p:nvPr/>
+        </p:nvSpPr>
+        <p:spPr>
+          <a:xfrm>
+            <a:off x="1371600" y="1993392"/>
+            <a:ext cx="1572768" cy="274320"/>
+          </a:xfrm>
+          <a:prstGeom prst="roundRect">
+            <a:avLst>
+              <a:gd name="adj" fmla="val 166667"/>
+            </a:avLst>
+          </a:prstGeom>
+          <a:solidFill>
+            <a:srgbClr val="F7DCE3"/>
+          </a:solidFill>
+          <a:ln w="12700">
+            <a:solidFill>
+              <a:srgbClr val="F7DCE3"/>
+            </a:solidFill>
+            <a:prstDash val="solid"/>
+          </a:ln>
+        </p:spPr>
+      </p:sp>
+      <p:sp>
+        <p:nvSpPr>
+          <p:cNvPr id="8" name="Text 6"/>
+          <p:cNvSpPr/>
+          <p:nvPr/>
+        </p:nvSpPr>
+        <p:spPr>
+          <a:xfrm>
+            <a:off x="1371600" y="1975104"/>
+            <a:ext cx="1572768" cy="292608"/>
+          </a:xfrm>
+          <a:prstGeom prst="rect">
+            <a:avLst/>
+          </a:prstGeom>
+          <a:noFill/>
+          <a:ln/>
+        </p:spPr>
+        <p:txBody>
+          <a:bodyPr wrap="square" rtlCol="0" anchor="ctr"/>
+          <a:lstStyle/>
+          <a:p>
+            <a:pPr algn="ctr" indent="0" marL="0">
+              <a:buNone/>
+            </a:pPr>
+            <a:r>
+              <a:rPr lang="en-US" sz="1350" b="1" spc="80" kern="0" dirty="0">
+                <a:solidFill>
+                  <a:srgbClr val="A42647"/>
+                </a:solidFill>
+                <a:latin typeface="Yu Mincho" pitchFamily="34" charset="0"/>
+                <a:ea typeface="Yu Mincho" pitchFamily="34" charset="-122"/>
+                <a:cs typeface="Yu Mincho" pitchFamily="34" charset="-120"/>
+              </a:rPr>
               <a:t>からだの5分</a:t>
             </a:r>
-            <a:endParaRPr lang="en-US" sz="1600" dirty="0"/>
-          </a:p>
-        </p:txBody>
-      </p:sp>
-      <p:sp>
-        <p:nvSpPr>
-          <p:cNvPr id="8" name="Text 6"/>
-          <p:cNvSpPr/>
-          <p:nvPr/>
-        </p:nvSpPr>
-        <p:spPr>
-          <a:xfrm>
-            <a:off x="804672" y="2761488"/>
+            <a:endParaRPr lang="en-US" sz="1350" dirty="0"/>
+          </a:p>
+        </p:txBody>
+      </p:sp>
+      <p:sp>
+        <p:nvSpPr>
+          <p:cNvPr id="9" name="Text 7"/>
+          <p:cNvSpPr/>
+          <p:nvPr/>
+        </p:nvSpPr>
+        <p:spPr>
+          <a:xfrm>
+            <a:off x="859536" y="2395728"/>
             <a:ext cx="2048256" cy="237744"/>
           </a:xfrm>
           <a:prstGeom prst="rect">
@@ -2392,9 +2659,9 @@
               <a:buNone/>
             </a:pPr>
             <a:r>
-              <a:rPr lang="en-US" sz="1050" spc="40" kern="0" dirty="0">
-                <a:solidFill>
-                  <a:srgbClr val="7A6E6B"/>
+              <a:rPr lang="en-US" sz="1000" spc="40" kern="0" dirty="0">
+                <a:solidFill>
+                  <a:srgbClr val="C4A06A"/>
                 </a:solidFill>
                 <a:latin typeface="Yu Gothic" pitchFamily="34" charset="0"/>
                 <a:ea typeface="Yu Gothic" pitchFamily="34" charset="-122"/>
@@ -2402,20 +2669,20 @@
               </a:rPr>
               <a:t>しおりん</a:t>
             </a:r>
-            <a:endParaRPr lang="en-US" sz="1050" dirty="0"/>
-          </a:p>
-        </p:txBody>
-      </p:sp>
-      <p:sp>
-        <p:nvSpPr>
-          <p:cNvPr id="9" name="Text 7"/>
-          <p:cNvSpPr/>
-          <p:nvPr/>
-        </p:nvSpPr>
-        <p:spPr>
-          <a:xfrm>
-            <a:off x="804672" y="3017520"/>
-            <a:ext cx="2048256" cy="786384"/>
+            <a:endParaRPr lang="en-US" sz="1000" dirty="0"/>
+          </a:p>
+        </p:txBody>
+      </p:sp>
+      <p:sp>
+        <p:nvSpPr>
+          <p:cNvPr id="10" name="Text 8"/>
+          <p:cNvSpPr/>
+          <p:nvPr/>
+        </p:nvSpPr>
+        <p:spPr>
+          <a:xfrm>
+            <a:off x="859536" y="2688336"/>
+            <a:ext cx="2048256" cy="1005840"/>
           </a:xfrm>
           <a:prstGeom prst="rect">
             <a:avLst/>
@@ -2436,7 +2703,7 @@
             <a:r>
               <a:rPr lang="en-US" sz="1150" spc="40" kern="0" dirty="0">
                 <a:solidFill>
-                  <a:srgbClr val="2B2224"/>
+                  <a:srgbClr val="3F2E33"/>
                 </a:solidFill>
                 <a:latin typeface="Yu Gothic" pitchFamily="34" charset="0"/>
                 <a:ea typeface="Yu Gothic" pitchFamily="34" charset="-122"/>
@@ -2456,7 +2723,7 @@
             <a:r>
               <a:rPr lang="en-US" sz="1150" spc="40" kern="0" dirty="0">
                 <a:solidFill>
-                  <a:srgbClr val="2B2224"/>
+                  <a:srgbClr val="3F2E33"/>
                 </a:solidFill>
                 <a:latin typeface="Yu Gothic" pitchFamily="34" charset="0"/>
                 <a:ea typeface="Yu Gothic" pitchFamily="34" charset="-122"/>
@@ -2470,18 +2737,18 @@
       </p:sp>
       <p:sp>
         <p:nvSpPr>
-          <p:cNvPr id="10" name="Shape 8"/>
-          <p:cNvSpPr/>
-          <p:nvPr/>
-        </p:nvSpPr>
-        <p:spPr>
-          <a:xfrm>
-            <a:off x="3310128" y="2066544"/>
-            <a:ext cx="2523744" cy="1847088"/>
+          <p:cNvPr id="11" name="Shape 9"/>
+          <p:cNvSpPr/>
+          <p:nvPr/>
+        </p:nvSpPr>
+        <p:spPr>
+          <a:xfrm>
+            <a:off x="3328416" y="1792224"/>
+            <a:ext cx="2487168" cy="2103120"/>
           </a:xfrm>
           <a:prstGeom prst="roundRect">
             <a:avLst>
-              <a:gd name="adj" fmla="val 2970"/>
+              <a:gd name="adj" fmla="val 3913"/>
             </a:avLst>
           </a:prstGeom>
           <a:solidFill>
@@ -2489,7 +2756,7 @@
           </a:solidFill>
           <a:ln w="10160">
             <a:solidFill>
-              <a:srgbClr val="E8DCDB"/>
+              <a:srgbClr val="E8D8BC"/>
             </a:solidFill>
             <a:prstDash val="solid"/>
           </a:ln>
@@ -2497,72 +2764,118 @@
       </p:sp>
       <p:sp>
         <p:nvSpPr>
-          <p:cNvPr id="11" name="Shape 9"/>
-          <p:cNvSpPr/>
-          <p:nvPr/>
-        </p:nvSpPr>
-        <p:spPr>
-          <a:xfrm>
-            <a:off x="3547872" y="2286000"/>
-            <a:ext cx="310896" cy="27432"/>
-          </a:xfrm>
-          <a:prstGeom prst="rect">
-            <a:avLst/>
-          </a:prstGeom>
-          <a:solidFill>
-            <a:srgbClr val="B08D5B"/>
-          </a:solidFill>
-          <a:ln/>
-        </p:spPr>
-      </p:sp>
-      <p:sp>
-        <p:nvSpPr>
           <p:cNvPr id="12" name="Text 10"/>
           <p:cNvSpPr/>
           <p:nvPr/>
         </p:nvSpPr>
         <p:spPr>
           <a:xfrm>
-            <a:off x="3547872" y="2414016"/>
-            <a:ext cx="2048256" cy="329184"/>
-          </a:xfrm>
-          <a:prstGeom prst="rect">
-            <a:avLst/>
-          </a:prstGeom>
-          <a:noFill/>
-          <a:ln/>
-        </p:spPr>
-        <p:txBody>
-          <a:bodyPr wrap="square" rtlCol="0" anchor="ctr"/>
-          <a:lstStyle/>
-          <a:p>
-            <a:pPr indent="0" marL="0">
-              <a:buNone/>
-            </a:pPr>
-            <a:r>
-              <a:rPr lang="en-US" sz="1600" b="1" spc="60" kern="0" dirty="0">
-                <a:solidFill>
-                  <a:srgbClr val="7A1524"/>
+            <a:off x="3547872" y="1920240"/>
+            <a:ext cx="548640" cy="384048"/>
+          </a:xfrm>
+          <a:prstGeom prst="rect">
+            <a:avLst/>
+          </a:prstGeom>
+          <a:noFill/>
+          <a:ln/>
+        </p:spPr>
+        <p:txBody>
+          <a:bodyPr wrap="square" rtlCol="0" anchor="ctr"/>
+          <a:lstStyle/>
+          <a:p>
+            <a:pPr indent="0" marL="0">
+              <a:buNone/>
+            </a:pPr>
+            <a:r>
+              <a:rPr lang="en-US" sz="2000" b="1" spc="80" kern="0" dirty="0">
+                <a:solidFill>
+                  <a:srgbClr val="F7DCE3"/>
                 </a:solidFill>
                 <a:latin typeface="Yu Mincho" pitchFamily="34" charset="0"/>
                 <a:ea typeface="Yu Mincho" pitchFamily="34" charset="-122"/>
                 <a:cs typeface="Yu Mincho" pitchFamily="34" charset="-120"/>
               </a:rPr>
+              <a:t>02</a:t>
+            </a:r>
+            <a:endParaRPr lang="en-US" sz="2000" dirty="0"/>
+          </a:p>
+        </p:txBody>
+      </p:sp>
+      <p:sp>
+        <p:nvSpPr>
+          <p:cNvPr id="13" name="Shape 11"/>
+          <p:cNvSpPr/>
+          <p:nvPr/>
+        </p:nvSpPr>
+        <p:spPr>
+          <a:xfrm>
+            <a:off x="4059936" y="1993392"/>
+            <a:ext cx="1572768" cy="274320"/>
+          </a:xfrm>
+          <a:prstGeom prst="roundRect">
+            <a:avLst>
+              <a:gd name="adj" fmla="val 166667"/>
+            </a:avLst>
+          </a:prstGeom>
+          <a:solidFill>
+            <a:srgbClr val="F7DCE3"/>
+          </a:solidFill>
+          <a:ln w="12700">
+            <a:solidFill>
+              <a:srgbClr val="F7DCE3"/>
+            </a:solidFill>
+            <a:prstDash val="solid"/>
+          </a:ln>
+        </p:spPr>
+      </p:sp>
+      <p:sp>
+        <p:nvSpPr>
+          <p:cNvPr id="14" name="Text 12"/>
+          <p:cNvSpPr/>
+          <p:nvPr/>
+        </p:nvSpPr>
+        <p:spPr>
+          <a:xfrm>
+            <a:off x="4059936" y="1975104"/>
+            <a:ext cx="1572768" cy="292608"/>
+          </a:xfrm>
+          <a:prstGeom prst="rect">
+            <a:avLst/>
+          </a:prstGeom>
+          <a:noFill/>
+          <a:ln/>
+        </p:spPr>
+        <p:txBody>
+          <a:bodyPr wrap="square" rtlCol="0" anchor="ctr"/>
+          <a:lstStyle/>
+          <a:p>
+            <a:pPr algn="ctr" indent="0" marL="0">
+              <a:buNone/>
+            </a:pPr>
+            <a:r>
+              <a:rPr lang="en-US" sz="1350" b="1" spc="80" kern="0" dirty="0">
+                <a:solidFill>
+                  <a:srgbClr val="A42647"/>
+                </a:solidFill>
+                <a:latin typeface="Yu Mincho" pitchFamily="34" charset="0"/>
+                <a:ea typeface="Yu Mincho" pitchFamily="34" charset="-122"/>
+                <a:cs typeface="Yu Mincho" pitchFamily="34" charset="-120"/>
+              </a:rPr>
               <a:t>所作の5分</a:t>
             </a:r>
-            <a:endParaRPr lang="en-US" sz="1600" dirty="0"/>
-          </a:p>
-        </p:txBody>
-      </p:sp>
-      <p:sp>
-        <p:nvSpPr>
-          <p:cNvPr id="13" name="Text 11"/>
-          <p:cNvSpPr/>
-          <p:nvPr/>
-        </p:nvSpPr>
-        <p:spPr>
-          <a:xfrm>
-            <a:off x="3547872" y="2761488"/>
+            <a:endParaRPr lang="en-US" sz="1350" dirty="0"/>
+          </a:p>
+        </p:txBody>
+      </p:sp>
+      <p:sp>
+        <p:nvSpPr>
+          <p:cNvPr id="15" name="Text 13"/>
+          <p:cNvSpPr/>
+          <p:nvPr/>
+        </p:nvSpPr>
+        <p:spPr>
+          <a:xfrm>
+            <a:off x="3547872" y="2395728"/>
             <a:ext cx="2048256" cy="237744"/>
           </a:xfrm>
           <a:prstGeom prst="rect">
@@ -2579,9 +2892,9 @@
               <a:buNone/>
             </a:pPr>
             <a:r>
-              <a:rPr lang="en-US" sz="1050" spc="40" kern="0" dirty="0">
-                <a:solidFill>
-                  <a:srgbClr val="7A6E6B"/>
+              <a:rPr lang="en-US" sz="1000" spc="40" kern="0" dirty="0">
+                <a:solidFill>
+                  <a:srgbClr val="C4A06A"/>
                 </a:solidFill>
                 <a:latin typeface="Yu Gothic" pitchFamily="34" charset="0"/>
                 <a:ea typeface="Yu Gothic" pitchFamily="34" charset="-122"/>
@@ -2589,20 +2902,20 @@
               </a:rPr>
               <a:t>みゆき</a:t>
             </a:r>
-            <a:endParaRPr lang="en-US" sz="1050" dirty="0"/>
-          </a:p>
-        </p:txBody>
-      </p:sp>
-      <p:sp>
-        <p:nvSpPr>
-          <p:cNvPr id="14" name="Text 12"/>
-          <p:cNvSpPr/>
-          <p:nvPr/>
-        </p:nvSpPr>
-        <p:spPr>
-          <a:xfrm>
-            <a:off x="3547872" y="3017520"/>
-            <a:ext cx="2048256" cy="786384"/>
+            <a:endParaRPr lang="en-US" sz="1000" dirty="0"/>
+          </a:p>
+        </p:txBody>
+      </p:sp>
+      <p:sp>
+        <p:nvSpPr>
+          <p:cNvPr id="16" name="Text 14"/>
+          <p:cNvSpPr/>
+          <p:nvPr/>
+        </p:nvSpPr>
+        <p:spPr>
+          <a:xfrm>
+            <a:off x="3547872" y="2688336"/>
+            <a:ext cx="2048256" cy="1005840"/>
           </a:xfrm>
           <a:prstGeom prst="rect">
             <a:avLst/>
@@ -2623,7 +2936,7 @@
             <a:r>
               <a:rPr lang="en-US" sz="1150" spc="40" kern="0" dirty="0">
                 <a:solidFill>
-                  <a:srgbClr val="2B2224"/>
+                  <a:srgbClr val="3F2E33"/>
                 </a:solidFill>
                 <a:latin typeface="Yu Gothic" pitchFamily="34" charset="0"/>
                 <a:ea typeface="Yu Gothic" pitchFamily="34" charset="-122"/>
@@ -2643,40 +2956,60 @@
             <a:r>
               <a:rPr lang="en-US" sz="1150" spc="40" kern="0" dirty="0">
                 <a:solidFill>
-                  <a:srgbClr val="2B2224"/>
+                  <a:srgbClr val="3F2E33"/>
                 </a:solidFill>
                 <a:latin typeface="Yu Gothic" pitchFamily="34" charset="0"/>
                 <a:ea typeface="Yu Gothic" pitchFamily="34" charset="-122"/>
                 <a:cs typeface="Yu Gothic" pitchFamily="34" charset="-120"/>
               </a:rPr>
-              <a:t>いつもの食事を私のための時間に</a:t>
+              <a:t>いつもの食事を</a:t>
             </a:r>
             <a:endParaRPr lang="en-US" sz="1150" dirty="0"/>
           </a:p>
-        </p:txBody>
-      </p:sp>
-      <p:sp>
-        <p:nvSpPr>
-          <p:cNvPr id="15" name="Shape 13"/>
-          <p:cNvSpPr/>
-          <p:nvPr/>
-        </p:nvSpPr>
-        <p:spPr>
-          <a:xfrm>
-            <a:off x="6053328" y="2066544"/>
-            <a:ext cx="2523744" cy="1847088"/>
+          <a:p>
+            <a:pPr indent="0" marL="0">
+              <a:lnSpc>
+                <a:spcPts val="1700"/>
+              </a:lnSpc>
+              <a:buNone/>
+            </a:pPr>
+            <a:r>
+              <a:rPr lang="en-US" sz="1150" spc="40" kern="0" dirty="0">
+                <a:solidFill>
+                  <a:srgbClr val="3F2E33"/>
+                </a:solidFill>
+                <a:latin typeface="Yu Gothic" pitchFamily="34" charset="0"/>
+                <a:ea typeface="Yu Gothic" pitchFamily="34" charset="-122"/>
+                <a:cs typeface="Yu Gothic" pitchFamily="34" charset="-120"/>
+              </a:rPr>
+              <a:t>私のための時間に</a:t>
+            </a:r>
+            <a:endParaRPr lang="en-US" sz="1150" dirty="0"/>
+          </a:p>
+        </p:txBody>
+      </p:sp>
+      <p:sp>
+        <p:nvSpPr>
+          <p:cNvPr id="17" name="Shape 15"/>
+          <p:cNvSpPr/>
+          <p:nvPr/>
+        </p:nvSpPr>
+        <p:spPr>
+          <a:xfrm>
+            <a:off x="6016752" y="1792224"/>
+            <a:ext cx="2487168" cy="2103120"/>
           </a:xfrm>
           <a:prstGeom prst="roundRect">
             <a:avLst>
-              <a:gd name="adj" fmla="val 2970"/>
+              <a:gd name="adj" fmla="val 3913"/>
             </a:avLst>
           </a:prstGeom>
           <a:solidFill>
             <a:srgbClr val="FFFFFF"/>
           </a:solidFill>
-          <a:ln w="17780">
+          <a:ln w="16510">
             <a:solidFill>
-              <a:srgbClr val="7A1524"/>
+              <a:srgbClr val="E8A0B4"/>
             </a:solidFill>
             <a:prstDash val="solid"/>
           </a:ln>
@@ -2684,72 +3017,118 @@
       </p:sp>
       <p:sp>
         <p:nvSpPr>
-          <p:cNvPr id="16" name="Shape 14"/>
-          <p:cNvSpPr/>
-          <p:nvPr/>
-        </p:nvSpPr>
-        <p:spPr>
-          <a:xfrm>
-            <a:off x="6291072" y="2286000"/>
-            <a:ext cx="310896" cy="27432"/>
-          </a:xfrm>
-          <a:prstGeom prst="rect">
-            <a:avLst/>
-          </a:prstGeom>
-          <a:solidFill>
-            <a:srgbClr val="B08D5B"/>
-          </a:solidFill>
-          <a:ln/>
-        </p:spPr>
-      </p:sp>
-      <p:sp>
-        <p:nvSpPr>
-          <p:cNvPr id="17" name="Text 15"/>
-          <p:cNvSpPr/>
-          <p:nvPr/>
-        </p:nvSpPr>
-        <p:spPr>
-          <a:xfrm>
-            <a:off x="6291072" y="2414016"/>
-            <a:ext cx="2048256" cy="329184"/>
-          </a:xfrm>
-          <a:prstGeom prst="rect">
-            <a:avLst/>
-          </a:prstGeom>
-          <a:noFill/>
-          <a:ln/>
-        </p:spPr>
-        <p:txBody>
-          <a:bodyPr wrap="square" rtlCol="0" anchor="ctr"/>
-          <a:lstStyle/>
-          <a:p>
-            <a:pPr indent="0" marL="0">
-              <a:buNone/>
-            </a:pPr>
-            <a:r>
-              <a:rPr lang="en-US" sz="1600" b="1" spc="60" kern="0" dirty="0">
-                <a:solidFill>
-                  <a:srgbClr val="7A1524"/>
+          <p:cNvPr id="18" name="Text 16"/>
+          <p:cNvSpPr/>
+          <p:nvPr/>
+        </p:nvSpPr>
+        <p:spPr>
+          <a:xfrm>
+            <a:off x="6236208" y="1920240"/>
+            <a:ext cx="548640" cy="384048"/>
+          </a:xfrm>
+          <a:prstGeom prst="rect">
+            <a:avLst/>
+          </a:prstGeom>
+          <a:noFill/>
+          <a:ln/>
+        </p:spPr>
+        <p:txBody>
+          <a:bodyPr wrap="square" rtlCol="0" anchor="ctr"/>
+          <a:lstStyle/>
+          <a:p>
+            <a:pPr indent="0" marL="0">
+              <a:buNone/>
+            </a:pPr>
+            <a:r>
+              <a:rPr lang="en-US" sz="2000" b="1" spc="80" kern="0" dirty="0">
+                <a:solidFill>
+                  <a:srgbClr val="F7DCE3"/>
                 </a:solidFill>
                 <a:latin typeface="Yu Mincho" pitchFamily="34" charset="0"/>
                 <a:ea typeface="Yu Mincho" pitchFamily="34" charset="-122"/>
                 <a:cs typeface="Yu Mincho" pitchFamily="34" charset="-120"/>
               </a:rPr>
+              <a:t>03</a:t>
+            </a:r>
+            <a:endParaRPr lang="en-US" sz="2000" dirty="0"/>
+          </a:p>
+        </p:txBody>
+      </p:sp>
+      <p:sp>
+        <p:nvSpPr>
+          <p:cNvPr id="19" name="Shape 17"/>
+          <p:cNvSpPr/>
+          <p:nvPr/>
+        </p:nvSpPr>
+        <p:spPr>
+          <a:xfrm>
+            <a:off x="6748272" y="1993392"/>
+            <a:ext cx="1572768" cy="274320"/>
+          </a:xfrm>
+          <a:prstGeom prst="roundRect">
+            <a:avLst>
+              <a:gd name="adj" fmla="val 166667"/>
+            </a:avLst>
+          </a:prstGeom>
+          <a:solidFill>
+            <a:srgbClr val="F7DCE3"/>
+          </a:solidFill>
+          <a:ln w="12700">
+            <a:solidFill>
+              <a:srgbClr val="F7DCE3"/>
+            </a:solidFill>
+            <a:prstDash val="solid"/>
+          </a:ln>
+        </p:spPr>
+      </p:sp>
+      <p:sp>
+        <p:nvSpPr>
+          <p:cNvPr id="20" name="Text 18"/>
+          <p:cNvSpPr/>
+          <p:nvPr/>
+        </p:nvSpPr>
+        <p:spPr>
+          <a:xfrm>
+            <a:off x="6748272" y="1975104"/>
+            <a:ext cx="1572768" cy="292608"/>
+          </a:xfrm>
+          <a:prstGeom prst="rect">
+            <a:avLst/>
+          </a:prstGeom>
+          <a:noFill/>
+          <a:ln/>
+        </p:spPr>
+        <p:txBody>
+          <a:bodyPr wrap="square" rtlCol="0" anchor="ctr"/>
+          <a:lstStyle/>
+          <a:p>
+            <a:pPr algn="ctr" indent="0" marL="0">
+              <a:buNone/>
+            </a:pPr>
+            <a:r>
+              <a:rPr lang="en-US" sz="1350" b="1" spc="80" kern="0" dirty="0">
+                <a:solidFill>
+                  <a:srgbClr val="A42647"/>
+                </a:solidFill>
+                <a:latin typeface="Yu Mincho" pitchFamily="34" charset="0"/>
+                <a:ea typeface="Yu Mincho" pitchFamily="34" charset="-122"/>
+                <a:cs typeface="Yu Mincho" pitchFamily="34" charset="-120"/>
+              </a:rPr>
               <a:t>今日の私の5分</a:t>
             </a:r>
-            <a:endParaRPr lang="en-US" sz="1600" dirty="0"/>
-          </a:p>
-        </p:txBody>
-      </p:sp>
-      <p:sp>
-        <p:nvSpPr>
-          <p:cNvPr id="18" name="Text 16"/>
-          <p:cNvSpPr/>
-          <p:nvPr/>
-        </p:nvSpPr>
-        <p:spPr>
-          <a:xfrm>
-            <a:off x="6291072" y="2761488"/>
+            <a:endParaRPr lang="en-US" sz="1350" dirty="0"/>
+          </a:p>
+        </p:txBody>
+      </p:sp>
+      <p:sp>
+        <p:nvSpPr>
+          <p:cNvPr id="21" name="Text 19"/>
+          <p:cNvSpPr/>
+          <p:nvPr/>
+        </p:nvSpPr>
+        <p:spPr>
+          <a:xfrm>
+            <a:off x="6236208" y="2395728"/>
             <a:ext cx="2048256" cy="237744"/>
           </a:xfrm>
           <a:prstGeom prst="rect">
@@ -2766,9 +3145,9 @@
               <a:buNone/>
             </a:pPr>
             <a:r>
-              <a:rPr lang="en-US" sz="1050" spc="40" kern="0" dirty="0">
-                <a:solidFill>
-                  <a:srgbClr val="7A6E6B"/>
+              <a:rPr lang="en-US" sz="1000" spc="40" kern="0" dirty="0">
+                <a:solidFill>
+                  <a:srgbClr val="C4A06A"/>
                 </a:solidFill>
                 <a:latin typeface="Yu Gothic" pitchFamily="34" charset="0"/>
                 <a:ea typeface="Yu Gothic" pitchFamily="34" charset="-122"/>
@@ -2776,20 +3155,20 @@
               </a:rPr>
               <a:t>おふたりで</a:t>
             </a:r>
-            <a:endParaRPr lang="en-US" sz="1050" dirty="0"/>
-          </a:p>
-        </p:txBody>
-      </p:sp>
-      <p:sp>
-        <p:nvSpPr>
-          <p:cNvPr id="19" name="Text 17"/>
-          <p:cNvSpPr/>
-          <p:nvPr/>
-        </p:nvSpPr>
-        <p:spPr>
-          <a:xfrm>
-            <a:off x="6291072" y="3017520"/>
-            <a:ext cx="2048256" cy="786384"/>
+            <a:endParaRPr lang="en-US" sz="1000" dirty="0"/>
+          </a:p>
+        </p:txBody>
+      </p:sp>
+      <p:sp>
+        <p:nvSpPr>
+          <p:cNvPr id="22" name="Text 20"/>
+          <p:cNvSpPr/>
+          <p:nvPr/>
+        </p:nvSpPr>
+        <p:spPr>
+          <a:xfrm>
+            <a:off x="6236208" y="2688336"/>
+            <a:ext cx="2048256" cy="1005840"/>
           </a:xfrm>
           <a:prstGeom prst="rect">
             <a:avLst/>
@@ -2810,7 +3189,7 @@
             <a:r>
               <a:rPr lang="en-US" sz="1150" spc="40" kern="0" dirty="0">
                 <a:solidFill>
-                  <a:srgbClr val="2B2224"/>
+                  <a:srgbClr val="3F2E33"/>
                 </a:solidFill>
                 <a:latin typeface="Yu Gothic" pitchFamily="34" charset="0"/>
                 <a:ea typeface="Yu Gothic" pitchFamily="34" charset="-122"/>
@@ -2830,7 +3209,7 @@
             <a:r>
               <a:rPr lang="en-US" sz="1150" spc="40" kern="0" dirty="0">
                 <a:solidFill>
-                  <a:srgbClr val="2B2224"/>
+                  <a:srgbClr val="3F2E33"/>
                 </a:solidFill>
                 <a:latin typeface="Yu Gothic" pitchFamily="34" charset="0"/>
                 <a:ea typeface="Yu Gothic" pitchFamily="34" charset="-122"/>
@@ -2850,7 +3229,7 @@
             <a:r>
               <a:rPr lang="en-US" sz="1150" spc="40" kern="0" dirty="0">
                 <a:solidFill>
-                  <a:srgbClr val="2B2224"/>
+                  <a:srgbClr val="3F2E33"/>
                 </a:solidFill>
                 <a:latin typeface="Yu Gothic" pitchFamily="34" charset="0"/>
                 <a:ea typeface="Yu Gothic" pitchFamily="34" charset="-122"/>
@@ -2864,14 +3243,14 @@
       </p:sp>
       <p:sp>
         <p:nvSpPr>
-          <p:cNvPr id="20" name="Text 18"/>
-          <p:cNvSpPr/>
-          <p:nvPr/>
-        </p:nvSpPr>
-        <p:spPr>
-          <a:xfrm>
-            <a:off x="566928" y="4169664"/>
-            <a:ext cx="8046720" cy="274320"/>
+          <p:cNvPr id="23" name="Text 21"/>
+          <p:cNvSpPr/>
+          <p:nvPr/>
+        </p:nvSpPr>
+        <p:spPr>
+          <a:xfrm>
+            <a:off x="640080" y="4078224"/>
+            <a:ext cx="7863840" cy="274320"/>
           </a:xfrm>
           <a:prstGeom prst="rect">
             <a:avLst/>
@@ -2889,7 +3268,7 @@
             <a:r>
               <a:rPr lang="en-US" sz="1250" spc="40" kern="0" dirty="0">
                 <a:solidFill>
-                  <a:srgbClr val="7A6E6B"/>
+                  <a:srgbClr val="8C757C"/>
                 </a:solidFill>
                 <a:latin typeface="Yu Gothic" pitchFamily="34" charset="0"/>
                 <a:ea typeface="Yu Gothic" pitchFamily="34" charset="-122"/>
@@ -2903,14 +3282,34 @@
       </p:sp>
       <p:sp>
         <p:nvSpPr>
-          <p:cNvPr id="21" name="Text 19"/>
-          <p:cNvSpPr/>
-          <p:nvPr/>
-        </p:nvSpPr>
-        <p:spPr>
-          <a:xfrm>
-            <a:off x="566928" y="4681728"/>
-            <a:ext cx="4114800" cy="237744"/>
+          <p:cNvPr id="24" name="Shape 22"/>
+          <p:cNvSpPr/>
+          <p:nvPr/>
+        </p:nvSpPr>
+        <p:spPr>
+          <a:xfrm>
+            <a:off x="640080" y="4590288"/>
+            <a:ext cx="7863840" cy="10973"/>
+          </a:xfrm>
+          <a:prstGeom prst="rect">
+            <a:avLst/>
+          </a:prstGeom>
+          <a:solidFill>
+            <a:srgbClr val="E8D8BC"/>
+          </a:solidFill>
+          <a:ln/>
+        </p:spPr>
+      </p:sp>
+      <p:sp>
+        <p:nvSpPr>
+          <p:cNvPr id="25" name="Text 23"/>
+          <p:cNvSpPr/>
+          <p:nvPr/>
+        </p:nvSpPr>
+        <p:spPr>
+          <a:xfrm>
+            <a:off x="640080" y="4681728"/>
+            <a:ext cx="4572000" cy="237744"/>
           </a:xfrm>
           <a:prstGeom prst="rect">
             <a:avLst/>
@@ -2928,7 +3327,7 @@
             <a:r>
               <a:rPr lang="en-US" sz="850" spc="40" kern="0" dirty="0">
                 <a:solidFill>
-                  <a:srgbClr val="7A6E6B"/>
+                  <a:srgbClr val="8C757C"/>
                 </a:solidFill>
                 <a:latin typeface="Yu Gothic" pitchFamily="34" charset="0"/>
                 <a:ea typeface="Yu Gothic" pitchFamily="34" charset="-122"/>
@@ -2942,13 +3341,13 @@
       </p:sp>
       <p:sp>
         <p:nvSpPr>
-          <p:cNvPr id="22" name="Text 20"/>
-          <p:cNvSpPr/>
-          <p:nvPr/>
-        </p:nvSpPr>
-        <p:spPr>
-          <a:xfrm>
-            <a:off x="8138160" y="4681728"/>
+          <p:cNvPr id="26" name="Text 24"/>
+          <p:cNvSpPr/>
+          <p:nvPr/>
+        </p:nvSpPr>
+        <p:spPr>
+          <a:xfrm>
+            <a:off x="8046720" y="4681728"/>
             <a:ext cx="457200" cy="237744"/>
           </a:xfrm>
           <a:prstGeom prst="rect">
@@ -2967,7 +3366,7 @@
             <a:r>
               <a:rPr lang="en-US" sz="850" spc="40" kern="0" dirty="0">
                 <a:solidFill>
-                  <a:srgbClr val="7A6E6B"/>
+                  <a:srgbClr val="8C757C"/>
                 </a:solidFill>
                 <a:latin typeface="Yu Gothic" pitchFamily="34" charset="0"/>
                 <a:ea typeface="Yu Gothic" pitchFamily="34" charset="-122"/>
@@ -2993,7 +3392,7 @@
     <p:bg>
       <p:bgPr>
         <a:solidFill>
-          <a:srgbClr val="FDF7F7"/>
+          <a:srgbClr val="FDF5F6"/>
         </a:solidFill>
       </p:bgPr>
     </p:bg>
@@ -3019,34 +3418,34 @@
         </p:nvSpPr>
         <p:spPr>
           <a:xfrm>
-            <a:off x="566928" y="384048"/>
-            <a:ext cx="8046720" cy="237744"/>
-          </a:xfrm>
-          <a:prstGeom prst="rect">
-            <a:avLst/>
-          </a:prstGeom>
-          <a:noFill/>
-          <a:ln/>
-        </p:spPr>
-        <p:txBody>
-          <a:bodyPr wrap="square" rtlCol="0" anchor="ctr"/>
-          <a:lstStyle/>
-          <a:p>
-            <a:pPr indent="0" marL="0">
-              <a:buNone/>
-            </a:pPr>
-            <a:r>
-              <a:rPr lang="en-US" sz="1000" b="1" spc="160" kern="0" dirty="0">
-                <a:solidFill>
-                  <a:srgbClr val="7A1524"/>
+            <a:off x="640080" y="420624"/>
+            <a:ext cx="7863840" cy="237744"/>
+          </a:xfrm>
+          <a:prstGeom prst="rect">
+            <a:avLst/>
+          </a:prstGeom>
+          <a:noFill/>
+          <a:ln/>
+        </p:spPr>
+        <p:txBody>
+          <a:bodyPr wrap="square" rtlCol="0" anchor="ctr"/>
+          <a:lstStyle/>
+          <a:p>
+            <a:pPr indent="0" marL="0">
+              <a:buNone/>
+            </a:pPr>
+            <a:r>
+              <a:rPr lang="en-US" sz="950" b="1" spc="200" kern="0" dirty="0">
+                <a:solidFill>
+                  <a:srgbClr val="C4A06A"/>
                 </a:solidFill>
                 <a:latin typeface="Yu Gothic" pitchFamily="34" charset="0"/>
                 <a:ea typeface="Yu Gothic" pitchFamily="34" charset="-122"/>
                 <a:cs typeface="Yu Gothic" pitchFamily="34" charset="-120"/>
               </a:rPr>
-              <a:t>YOUR GOAL</a:t>
-            </a:r>
-            <a:endParaRPr lang="en-US" sz="1000" dirty="0"/>
+              <a:t>YOUR  GOAL</a:t>
+            </a:r>
+            <a:endParaRPr lang="en-US" sz="950" dirty="0"/>
           </a:p>
         </p:txBody>
       </p:sp>
@@ -3058,16 +3457,23 @@
         </p:nvSpPr>
         <p:spPr>
           <a:xfrm>
-            <a:off x="566928" y="667512"/>
-            <a:ext cx="457200" cy="32004"/>
-          </a:xfrm>
-          <a:prstGeom prst="rect">
-            <a:avLst/>
+            <a:off x="640080" y="822960"/>
+            <a:ext cx="4937760" cy="274320"/>
+          </a:xfrm>
+          <a:prstGeom prst="roundRect">
+            <a:avLst>
+              <a:gd name="adj" fmla="val 166667"/>
+            </a:avLst>
           </a:prstGeom>
           <a:solidFill>
-            <a:srgbClr val="7A1524"/>
+            <a:srgbClr val="F7DCE3"/>
           </a:solidFill>
-          <a:ln/>
+          <a:ln w="12700">
+            <a:solidFill>
+              <a:srgbClr val="F7DCE3"/>
+            </a:solidFill>
+            <a:prstDash val="solid"/>
+          </a:ln>
         </p:spPr>
       </p:sp>
       <p:sp>
@@ -3078,8 +3484,8 @@
         </p:nvSpPr>
         <p:spPr>
           <a:xfrm>
-            <a:off x="566928" y="822960"/>
-            <a:ext cx="8046720" cy="914400"/>
+            <a:off x="640080" y="676656"/>
+            <a:ext cx="7863840" cy="566928"/>
           </a:xfrm>
           <a:prstGeom prst="rect">
             <a:avLst/>
@@ -3093,65 +3499,92 @@
           <a:p>
             <a:pPr indent="0" marL="0">
               <a:lnSpc>
-                <a:spcPts val="3800"/>
+                <a:spcPts val="3600"/>
               </a:lnSpc>
               <a:buNone/>
             </a:pPr>
             <a:r>
-              <a:rPr lang="en-US" sz="2600" b="1" spc="60" kern="0" dirty="0">
-                <a:solidFill>
-                  <a:srgbClr val="2B2224"/>
+              <a:rPr lang="en-US" sz="2500" b="1" spc="80" kern="0" dirty="0">
+                <a:solidFill>
+                  <a:srgbClr val="A42647"/>
                 </a:solidFill>
                 <a:latin typeface="Yu Mincho" pitchFamily="34" charset="0"/>
                 <a:ea typeface="Yu Mincho" pitchFamily="34" charset="-122"/>
                 <a:cs typeface="Yu Mincho" pitchFamily="34" charset="-120"/>
               </a:rPr>
-              <a:t>あなたの5日後を、</a:t>
-            </a:r>
-            <a:endParaRPr lang="en-US" sz="2600" dirty="0"/>
-          </a:p>
+              <a:t>あなたの5日後を、1つ決めましょう</a:t>
+            </a:r>
+            <a:endParaRPr lang="en-US" sz="2500" dirty="0"/>
+          </a:p>
+        </p:txBody>
+      </p:sp>
+      <p:sp>
+        <p:nvSpPr>
+          <p:cNvPr id="5" name="Shape 3"/>
+          <p:cNvSpPr/>
+          <p:nvPr/>
+        </p:nvSpPr>
+        <p:spPr>
+          <a:xfrm>
+            <a:off x="640080" y="1591056"/>
+            <a:ext cx="5943600" cy="402336"/>
+          </a:xfrm>
+          <a:prstGeom prst="roundRect">
+            <a:avLst>
+              <a:gd name="adj" fmla="val 113636"/>
+            </a:avLst>
+          </a:prstGeom>
+          <a:solidFill>
+            <a:srgbClr val="F7DCE3"/>
+          </a:solidFill>
+          <a:ln w="12700">
+            <a:solidFill>
+              <a:srgbClr val="F7DCE3"/>
+            </a:solidFill>
+            <a:prstDash val="solid"/>
+          </a:ln>
+        </p:spPr>
+      </p:sp>
+      <p:sp>
+        <p:nvSpPr>
+          <p:cNvPr id="6" name="Text 4"/>
+          <p:cNvSpPr/>
+          <p:nvPr/>
+        </p:nvSpPr>
+        <p:spPr>
+          <a:xfrm>
+            <a:off x="640080" y="1572768"/>
+            <a:ext cx="7863840" cy="768096"/>
+          </a:xfrm>
+          <a:prstGeom prst="rect">
+            <a:avLst/>
+          </a:prstGeom>
+          <a:noFill/>
+          <a:ln/>
+        </p:spPr>
+        <p:txBody>
+          <a:bodyPr wrap="square" rtlCol="0" anchor="ctr"/>
+          <a:lstStyle/>
           <a:p>
             <a:pPr indent="0" marL="0">
               <a:lnSpc>
-                <a:spcPts val="3800"/>
+                <a:spcPts val="3000"/>
               </a:lnSpc>
               <a:buNone/>
             </a:pPr>
             <a:r>
-              <a:rPr lang="en-US" sz="2600" b="1" spc="60" kern="0" dirty="0">
-                <a:solidFill>
-                  <a:srgbClr val="2B2224"/>
+              <a:rPr lang="en-US" sz="1850" b="1" spc="80" kern="0" dirty="0">
+                <a:solidFill>
+                  <a:srgbClr val="A42647"/>
                 </a:solidFill>
                 <a:latin typeface="Yu Mincho" pitchFamily="34" charset="0"/>
                 <a:ea typeface="Yu Mincho" pitchFamily="34" charset="-122"/>
                 <a:cs typeface="Yu Mincho" pitchFamily="34" charset="-120"/>
               </a:rPr>
-              <a:t>1つ決めましょう</a:t>
-            </a:r>
-            <a:endParaRPr lang="en-US" sz="2600" dirty="0"/>
-          </a:p>
-        </p:txBody>
-      </p:sp>
-      <p:sp>
-        <p:nvSpPr>
-          <p:cNvPr id="5" name="Text 3"/>
-          <p:cNvSpPr/>
-          <p:nvPr/>
-        </p:nvSpPr>
-        <p:spPr>
-          <a:xfrm>
-            <a:off x="566928" y="2011680"/>
-            <a:ext cx="8046720" cy="713232"/>
-          </a:xfrm>
-          <a:prstGeom prst="rect">
-            <a:avLst/>
-          </a:prstGeom>
-          <a:noFill/>
-          <a:ln/>
-        </p:spPr>
-        <p:txBody>
-          <a:bodyPr wrap="square" rtlCol="0" anchor="ctr"/>
-          <a:lstStyle/>
+              <a:t>5日後に、どんな小さな変化があったら</a:t>
+            </a:r>
+            <a:endParaRPr lang="en-US" sz="1850" dirty="0"/>
+          </a:p>
           <a:p>
             <a:pPr indent="0" marL="0">
               <a:lnSpc>
@@ -3160,59 +3593,19 @@
               <a:buNone/>
             </a:pPr>
             <a:r>
-              <a:rPr lang="en-US" sz="1900" b="1" spc="60" kern="0" dirty="0">
-                <a:solidFill>
-                  <a:srgbClr val="7A1524"/>
+              <a:rPr lang="en-US" sz="1850" b="1" spc="80" kern="0" dirty="0">
+                <a:solidFill>
+                  <a:srgbClr val="A42647"/>
                 </a:solidFill>
                 <a:latin typeface="Yu Mincho" pitchFamily="34" charset="0"/>
                 <a:ea typeface="Yu Mincho" pitchFamily="34" charset="-122"/>
                 <a:cs typeface="Yu Mincho" pitchFamily="34" charset="-120"/>
               </a:rPr>
-              <a:t>5日後に、どんな小さな変化があったら</a:t>
-            </a:r>
-            <a:endParaRPr lang="en-US" sz="1900" dirty="0"/>
-          </a:p>
-          <a:p>
-            <a:pPr indent="0" marL="0">
-              <a:lnSpc>
-                <a:spcPts val="3000"/>
-              </a:lnSpc>
-              <a:buNone/>
-            </a:pPr>
-            <a:r>
-              <a:rPr lang="en-US" sz="1900" b="1" spc="60" kern="0" dirty="0">
-                <a:solidFill>
-                  <a:srgbClr val="7A1524"/>
-                </a:solidFill>
-                <a:latin typeface="Yu Mincho" pitchFamily="34" charset="0"/>
-                <a:ea typeface="Yu Mincho" pitchFamily="34" charset="-122"/>
-                <a:cs typeface="Yu Mincho" pitchFamily="34" charset="-120"/>
-              </a:rPr>
               <a:t>「ちょっと変わった」と思えそうですか？</a:t>
             </a:r>
-            <a:endParaRPr lang="en-US" sz="1900" dirty="0"/>
-          </a:p>
-        </p:txBody>
-      </p:sp>
-      <p:sp>
-        <p:nvSpPr>
-          <p:cNvPr id="6" name="Shape 4"/>
-          <p:cNvSpPr/>
-          <p:nvPr/>
-        </p:nvSpPr>
-        <p:spPr>
-          <a:xfrm>
-            <a:off x="566928" y="2834640"/>
-            <a:ext cx="8010144" cy="10973"/>
-          </a:xfrm>
-          <a:prstGeom prst="rect">
-            <a:avLst/>
-          </a:prstGeom>
-          <a:solidFill>
-            <a:srgbClr val="E8DCDB"/>
-          </a:solidFill>
-          <a:ln/>
-        </p:spPr>
+            <a:endParaRPr lang="en-US" sz="1850" dirty="0"/>
+          </a:p>
+        </p:txBody>
       </p:sp>
       <p:sp>
         <p:nvSpPr>
@@ -3222,12 +3615,12 @@
         </p:nvSpPr>
         <p:spPr>
           <a:xfrm>
-            <a:off x="566928" y="2907792"/>
-            <a:ext cx="3895344" cy="1499616"/>
+            <a:off x="640080" y="2542032"/>
+            <a:ext cx="3803904" cy="1316736"/>
           </a:xfrm>
           <a:prstGeom prst="roundRect">
             <a:avLst>
-              <a:gd name="adj" fmla="val 3659"/>
+              <a:gd name="adj" fmla="val 6250"/>
             </a:avLst>
           </a:prstGeom>
           <a:solidFill>
@@ -3235,7 +3628,7 @@
           </a:solidFill>
           <a:ln w="10160">
             <a:solidFill>
-              <a:srgbClr val="E8DCDB"/>
+              <a:srgbClr val="E8D8BC"/>
             </a:solidFill>
             <a:prstDash val="solid"/>
           </a:ln>
@@ -3243,63 +3636,110 @@
       </p:sp>
       <p:sp>
         <p:nvSpPr>
-          <p:cNvPr id="8" name="Text 6"/>
-          <p:cNvSpPr/>
-          <p:nvPr/>
-        </p:nvSpPr>
-        <p:spPr>
-          <a:xfrm>
-            <a:off x="804672" y="3108960"/>
-            <a:ext cx="3419856" cy="310896"/>
-          </a:xfrm>
-          <a:prstGeom prst="rect">
-            <a:avLst/>
-          </a:prstGeom>
-          <a:noFill/>
-          <a:ln/>
-        </p:spPr>
-        <p:txBody>
-          <a:bodyPr wrap="square" rtlCol="0" anchor="ctr"/>
-          <a:lstStyle/>
-          <a:p>
-            <a:pPr indent="0" marL="0">
-              <a:buNone/>
-            </a:pPr>
-            <a:r>
-              <a:rPr lang="en-US" sz="1350" b="1" spc="40" kern="0" dirty="0">
-                <a:solidFill>
-                  <a:srgbClr val="7A1524"/>
+          <p:cNvPr id="8" name="Shape 6"/>
+          <p:cNvSpPr/>
+          <p:nvPr/>
+        </p:nvSpPr>
+        <p:spPr>
+          <a:xfrm>
+            <a:off x="841248" y="2724912"/>
+            <a:ext cx="1600200" cy="274320"/>
+          </a:xfrm>
+          <a:prstGeom prst="roundRect">
+            <a:avLst>
+              <a:gd name="adj" fmla="val 166667"/>
+            </a:avLst>
+          </a:prstGeom>
+          <a:solidFill>
+            <a:srgbClr val="F7DCE3"/>
+          </a:solidFill>
+          <a:ln w="12700">
+            <a:solidFill>
+              <a:srgbClr val="F7DCE3"/>
+            </a:solidFill>
+            <a:prstDash val="solid"/>
+          </a:ln>
+        </p:spPr>
+      </p:sp>
+      <p:sp>
+        <p:nvSpPr>
+          <p:cNvPr id="9" name="Text 7"/>
+          <p:cNvSpPr/>
+          <p:nvPr/>
+        </p:nvSpPr>
+        <p:spPr>
+          <a:xfrm>
+            <a:off x="914400" y="2697480"/>
+            <a:ext cx="3255264" cy="310896"/>
+          </a:xfrm>
+          <a:prstGeom prst="rect">
+            <a:avLst/>
+          </a:prstGeom>
+          <a:noFill/>
+          <a:ln/>
+        </p:spPr>
+        <p:txBody>
+          <a:bodyPr wrap="square" rtlCol="0" anchor="ctr"/>
+          <a:lstStyle/>
+          <a:p>
+            <a:pPr indent="0" marL="0">
+              <a:buNone/>
+            </a:pPr>
+            <a:r>
+              <a:rPr lang="en-US" sz="1300" b="1" spc="80" kern="0" dirty="0">
+                <a:solidFill>
+                  <a:srgbClr val="A42647"/>
+                </a:solidFill>
+                <a:latin typeface="Yu Mincho" pitchFamily="34" charset="0"/>
+                <a:ea typeface="Yu Mincho" pitchFamily="34" charset="-122"/>
+                <a:cs typeface="Yu Mincho" pitchFamily="34" charset="-120"/>
+              </a:rPr>
+              <a:t>大きすぎるもの</a:t>
+            </a:r>
+            <a:endParaRPr lang="en-US" sz="1300" dirty="0"/>
+          </a:p>
+        </p:txBody>
+      </p:sp>
+      <p:sp>
+        <p:nvSpPr>
+          <p:cNvPr id="10" name="Text 8"/>
+          <p:cNvSpPr/>
+          <p:nvPr/>
+        </p:nvSpPr>
+        <p:spPr>
+          <a:xfrm>
+            <a:off x="914400" y="3108960"/>
+            <a:ext cx="3255264" cy="585216"/>
+          </a:xfrm>
+          <a:prstGeom prst="rect">
+            <a:avLst/>
+          </a:prstGeom>
+          <a:noFill/>
+          <a:ln/>
+        </p:spPr>
+        <p:txBody>
+          <a:bodyPr wrap="square" rtlCol="0" anchor="t"/>
+          <a:lstStyle/>
+          <a:p>
+            <a:pPr indent="0" marL="0">
+              <a:lnSpc>
+                <a:spcPts val="1700"/>
+              </a:lnSpc>
+              <a:buNone/>
+            </a:pPr>
+            <a:r>
+              <a:rPr lang="en-US" sz="1150" spc="40" kern="0" dirty="0">
+                <a:solidFill>
+                  <a:srgbClr val="3F2E33"/>
                 </a:solidFill>
                 <a:latin typeface="Yu Gothic" pitchFamily="34" charset="0"/>
                 <a:ea typeface="Yu Gothic" pitchFamily="34" charset="-122"/>
                 <a:cs typeface="Yu Gothic" pitchFamily="34" charset="-120"/>
               </a:rPr>
-              <a:t>✗　大きすぎるもの</a:t>
-            </a:r>
-            <a:endParaRPr lang="en-US" sz="1350" dirty="0"/>
-          </a:p>
-        </p:txBody>
-      </p:sp>
-      <p:sp>
-        <p:nvSpPr>
-          <p:cNvPr id="9" name="Text 7"/>
-          <p:cNvSpPr/>
-          <p:nvPr/>
-        </p:nvSpPr>
-        <p:spPr>
-          <a:xfrm>
-            <a:off x="804672" y="3474720"/>
-            <a:ext cx="3419856" cy="731520"/>
-          </a:xfrm>
-          <a:prstGeom prst="rect">
-            <a:avLst/>
-          </a:prstGeom>
-          <a:noFill/>
-          <a:ln/>
-        </p:spPr>
-        <p:txBody>
-          <a:bodyPr wrap="square" rtlCol="0" anchor="t"/>
-          <a:lstStyle/>
+              <a:t>毎朝、完璧に起きられた</a:t>
+            </a:r>
+            <a:endParaRPr lang="en-US" sz="1150" dirty="0"/>
+          </a:p>
           <a:p>
             <a:pPr indent="0" marL="0">
               <a:lnSpc>
@@ -3310,16 +3750,131 @@
             <a:r>
               <a:rPr lang="en-US" sz="1150" spc="40" kern="0" dirty="0">
                 <a:solidFill>
-                  <a:srgbClr val="2B2224"/>
+                  <a:srgbClr val="3F2E33"/>
                 </a:solidFill>
                 <a:latin typeface="Yu Gothic" pitchFamily="34" charset="0"/>
                 <a:ea typeface="Yu Gothic" pitchFamily="34" charset="-122"/>
                 <a:cs typeface="Yu Gothic" pitchFamily="34" charset="-120"/>
               </a:rPr>
-              <a:t>毎朝、完璧に起きられた</a:t>
+              <a:t>5日で体が変わった</a:t>
             </a:r>
             <a:endParaRPr lang="en-US" sz="1150" dirty="0"/>
           </a:p>
+        </p:txBody>
+      </p:sp>
+      <p:sp>
+        <p:nvSpPr>
+          <p:cNvPr id="11" name="Shape 9"/>
+          <p:cNvSpPr/>
+          <p:nvPr/>
+        </p:nvSpPr>
+        <p:spPr>
+          <a:xfrm>
+            <a:off x="4700016" y="2542032"/>
+            <a:ext cx="3803904" cy="1316736"/>
+          </a:xfrm>
+          <a:prstGeom prst="roundRect">
+            <a:avLst>
+              <a:gd name="adj" fmla="val 6250"/>
+            </a:avLst>
+          </a:prstGeom>
+          <a:solidFill>
+            <a:srgbClr val="FFFFFF"/>
+          </a:solidFill>
+          <a:ln w="16510">
+            <a:solidFill>
+              <a:srgbClr val="E8A0B4"/>
+            </a:solidFill>
+            <a:prstDash val="solid"/>
+          </a:ln>
+        </p:spPr>
+      </p:sp>
+      <p:sp>
+        <p:nvSpPr>
+          <p:cNvPr id="12" name="Shape 10"/>
+          <p:cNvSpPr/>
+          <p:nvPr/>
+        </p:nvSpPr>
+        <p:spPr>
+          <a:xfrm>
+            <a:off x="4901184" y="2724912"/>
+            <a:ext cx="2121408" cy="274320"/>
+          </a:xfrm>
+          <a:prstGeom prst="roundRect">
+            <a:avLst>
+              <a:gd name="adj" fmla="val 166667"/>
+            </a:avLst>
+          </a:prstGeom>
+          <a:solidFill>
+            <a:srgbClr val="F7DCE3"/>
+          </a:solidFill>
+          <a:ln w="12700">
+            <a:solidFill>
+              <a:srgbClr val="F7DCE3"/>
+            </a:solidFill>
+            <a:prstDash val="solid"/>
+          </a:ln>
+        </p:spPr>
+      </p:sp>
+      <p:sp>
+        <p:nvSpPr>
+          <p:cNvPr id="13" name="Text 11"/>
+          <p:cNvSpPr/>
+          <p:nvPr/>
+        </p:nvSpPr>
+        <p:spPr>
+          <a:xfrm>
+            <a:off x="4974336" y="2697480"/>
+            <a:ext cx="3255264" cy="310896"/>
+          </a:xfrm>
+          <a:prstGeom prst="rect">
+            <a:avLst/>
+          </a:prstGeom>
+          <a:noFill/>
+          <a:ln/>
+        </p:spPr>
+        <p:txBody>
+          <a:bodyPr wrap="square" rtlCol="0" anchor="ctr"/>
+          <a:lstStyle/>
+          <a:p>
+            <a:pPr indent="0" marL="0">
+              <a:buNone/>
+            </a:pPr>
+            <a:r>
+              <a:rPr lang="en-US" sz="1300" b="1" spc="80" kern="0" dirty="0">
+                <a:solidFill>
+                  <a:srgbClr val="A42647"/>
+                </a:solidFill>
+                <a:latin typeface="Yu Mincho" pitchFamily="34" charset="0"/>
+                <a:ea typeface="Yu Mincho" pitchFamily="34" charset="-122"/>
+                <a:cs typeface="Yu Mincho" pitchFamily="34" charset="-120"/>
+              </a:rPr>
+              <a:t>これくらいで十分です</a:t>
+            </a:r>
+            <a:endParaRPr lang="en-US" sz="1300" dirty="0"/>
+          </a:p>
+        </p:txBody>
+      </p:sp>
+      <p:sp>
+        <p:nvSpPr>
+          <p:cNvPr id="14" name="Text 12"/>
+          <p:cNvSpPr/>
+          <p:nvPr/>
+        </p:nvSpPr>
+        <p:spPr>
+          <a:xfrm>
+            <a:off x="4974336" y="3108960"/>
+            <a:ext cx="3255264" cy="585216"/>
+          </a:xfrm>
+          <a:prstGeom prst="rect">
+            <a:avLst/>
+          </a:prstGeom>
+          <a:noFill/>
+          <a:ln/>
+        </p:spPr>
+        <p:txBody>
+          <a:bodyPr wrap="square" rtlCol="0" anchor="t"/>
+          <a:lstStyle/>
           <a:p>
             <a:pPr indent="0" marL="0">
               <a:lnSpc>
@@ -3330,104 +3885,36 @@
             <a:r>
               <a:rPr lang="en-US" sz="1150" spc="40" kern="0" dirty="0">
                 <a:solidFill>
-                  <a:srgbClr val="2B2224"/>
+                  <a:srgbClr val="3F2E33"/>
                 </a:solidFill>
                 <a:latin typeface="Yu Gothic" pitchFamily="34" charset="0"/>
                 <a:ea typeface="Yu Gothic" pitchFamily="34" charset="-122"/>
                 <a:cs typeface="Yu Gothic" pitchFamily="34" charset="-120"/>
               </a:rPr>
-              <a:t>5日で体が変わった</a:t>
+              <a:t>自分の疲れに気づけた</a:t>
             </a:r>
             <a:endParaRPr lang="en-US" sz="1150" dirty="0"/>
           </a:p>
-        </p:txBody>
-      </p:sp>
-      <p:sp>
-        <p:nvSpPr>
-          <p:cNvPr id="10" name="Shape 8"/>
-          <p:cNvSpPr/>
-          <p:nvPr/>
-        </p:nvSpPr>
-        <p:spPr>
-          <a:xfrm>
-            <a:off x="4681728" y="2907792"/>
-            <a:ext cx="3895344" cy="1499616"/>
-          </a:xfrm>
-          <a:prstGeom prst="roundRect">
-            <a:avLst>
-              <a:gd name="adj" fmla="val 3659"/>
-            </a:avLst>
-          </a:prstGeom>
-          <a:solidFill>
-            <a:srgbClr val="FFFFFF"/>
-          </a:solidFill>
-          <a:ln w="17780">
-            <a:solidFill>
-              <a:srgbClr val="7A1524"/>
-            </a:solidFill>
-            <a:prstDash val="solid"/>
-          </a:ln>
-        </p:spPr>
-      </p:sp>
-      <p:sp>
-        <p:nvSpPr>
-          <p:cNvPr id="11" name="Text 9"/>
-          <p:cNvSpPr/>
-          <p:nvPr/>
-        </p:nvSpPr>
-        <p:spPr>
-          <a:xfrm>
-            <a:off x="4919472" y="3108960"/>
-            <a:ext cx="3419856" cy="310896"/>
-          </a:xfrm>
-          <a:prstGeom prst="rect">
-            <a:avLst/>
-          </a:prstGeom>
-          <a:noFill/>
-          <a:ln/>
-        </p:spPr>
-        <p:txBody>
-          <a:bodyPr wrap="square" rtlCol="0" anchor="ctr"/>
-          <a:lstStyle/>
-          <a:p>
-            <a:pPr indent="0" marL="0">
-              <a:buNone/>
-            </a:pPr>
-            <a:r>
-              <a:rPr lang="en-US" sz="1350" b="1" spc="40" kern="0" dirty="0">
-                <a:solidFill>
-                  <a:srgbClr val="7A1524"/>
+          <a:p>
+            <a:pPr indent="0" marL="0">
+              <a:lnSpc>
+                <a:spcPts val="1700"/>
+              </a:lnSpc>
+              <a:buNone/>
+            </a:pPr>
+            <a:r>
+              <a:rPr lang="en-US" sz="1150" spc="40" kern="0" dirty="0">
+                <a:solidFill>
+                  <a:srgbClr val="3F2E33"/>
                 </a:solidFill>
                 <a:latin typeface="Yu Gothic" pitchFamily="34" charset="0"/>
                 <a:ea typeface="Yu Gothic" pitchFamily="34" charset="-122"/>
                 <a:cs typeface="Yu Gothic" pitchFamily="34" charset="-120"/>
               </a:rPr>
-              <a:t>◯　これくらいで十分です</a:t>
-            </a:r>
-            <a:endParaRPr lang="en-US" sz="1350" dirty="0"/>
-          </a:p>
-        </p:txBody>
-      </p:sp>
-      <p:sp>
-        <p:nvSpPr>
-          <p:cNvPr id="12" name="Text 10"/>
-          <p:cNvSpPr/>
-          <p:nvPr/>
-        </p:nvSpPr>
-        <p:spPr>
-          <a:xfrm>
-            <a:off x="4919472" y="3474720"/>
-            <a:ext cx="3419856" cy="731520"/>
-          </a:xfrm>
-          <a:prstGeom prst="rect">
-            <a:avLst/>
-          </a:prstGeom>
-          <a:noFill/>
-          <a:ln/>
-        </p:spPr>
-        <p:txBody>
-          <a:bodyPr wrap="square" rtlCol="0" anchor="t"/>
-          <a:lstStyle/>
+              <a:t>食事を一度、丁寧に食べられた</a:t>
+            </a:r>
+            <a:endParaRPr lang="en-US" sz="1150" dirty="0"/>
+          </a:p>
           <a:p>
             <a:pPr indent="0" marL="0">
               <a:lnSpc>
@@ -3438,125 +3925,105 @@
             <a:r>
               <a:rPr lang="en-US" sz="1150" spc="40" kern="0" dirty="0">
                 <a:solidFill>
-                  <a:srgbClr val="2B2224"/>
+                  <a:srgbClr val="3F2E33"/>
                 </a:solidFill>
                 <a:latin typeface="Yu Gothic" pitchFamily="34" charset="0"/>
                 <a:ea typeface="Yu Gothic" pitchFamily="34" charset="-122"/>
                 <a:cs typeface="Yu Gothic" pitchFamily="34" charset="-120"/>
               </a:rPr>
-              <a:t>自分の疲れに気づけた</a:t>
+              <a:t>イライラしたときに深呼吸できた</a:t>
             </a:r>
             <a:endParaRPr lang="en-US" sz="1150" dirty="0"/>
           </a:p>
-          <a:p>
-            <a:pPr indent="0" marL="0">
-              <a:lnSpc>
-                <a:spcPts val="1700"/>
-              </a:lnSpc>
-              <a:buNone/>
-            </a:pPr>
-            <a:r>
-              <a:rPr lang="en-US" sz="1150" spc="40" kern="0" dirty="0">
-                <a:solidFill>
-                  <a:srgbClr val="2B2224"/>
+        </p:txBody>
+      </p:sp>
+      <p:sp>
+        <p:nvSpPr>
+          <p:cNvPr id="15" name="Shape 13"/>
+          <p:cNvSpPr/>
+          <p:nvPr/>
+        </p:nvSpPr>
+        <p:spPr>
+          <a:xfrm>
+            <a:off x="640080" y="4590288"/>
+            <a:ext cx="7863840" cy="10973"/>
+          </a:xfrm>
+          <a:prstGeom prst="rect">
+            <a:avLst/>
+          </a:prstGeom>
+          <a:solidFill>
+            <a:srgbClr val="E8D8BC"/>
+          </a:solidFill>
+          <a:ln/>
+        </p:spPr>
+      </p:sp>
+      <p:sp>
+        <p:nvSpPr>
+          <p:cNvPr id="16" name="Text 14"/>
+          <p:cNvSpPr/>
+          <p:nvPr/>
+        </p:nvSpPr>
+        <p:spPr>
+          <a:xfrm>
+            <a:off x="640080" y="4681728"/>
+            <a:ext cx="4572000" cy="237744"/>
+          </a:xfrm>
+          <a:prstGeom prst="rect">
+            <a:avLst/>
+          </a:prstGeom>
+          <a:noFill/>
+          <a:ln/>
+        </p:spPr>
+        <p:txBody>
+          <a:bodyPr wrap="square" rtlCol="0" anchor="ctr"/>
+          <a:lstStyle/>
+          <a:p>
+            <a:pPr indent="0" marL="0">
+              <a:buNone/>
+            </a:pPr>
+            <a:r>
+              <a:rPr lang="en-US" sz="850" spc="40" kern="0" dirty="0">
+                <a:solidFill>
+                  <a:srgbClr val="8C757C"/>
                 </a:solidFill>
                 <a:latin typeface="Yu Gothic" pitchFamily="34" charset="0"/>
                 <a:ea typeface="Yu Gothic" pitchFamily="34" charset="-122"/>
                 <a:cs typeface="Yu Gothic" pitchFamily="34" charset="-120"/>
               </a:rPr>
-              <a:t>食事を一度、丁寧に食べられた</a:t>
-            </a:r>
-            <a:endParaRPr lang="en-US" sz="1150" dirty="0"/>
-          </a:p>
-          <a:p>
-            <a:pPr indent="0" marL="0">
-              <a:lnSpc>
-                <a:spcPts val="1700"/>
-              </a:lnSpc>
-              <a:buNone/>
-            </a:pPr>
-            <a:r>
-              <a:rPr lang="en-US" sz="1150" spc="40" kern="0" dirty="0">
-                <a:solidFill>
-                  <a:srgbClr val="2B2224"/>
-                </a:solidFill>
-                <a:latin typeface="Yu Gothic" pitchFamily="34" charset="0"/>
-                <a:ea typeface="Yu Gothic" pitchFamily="34" charset="-122"/>
-                <a:cs typeface="Yu Gothic" pitchFamily="34" charset="-120"/>
-              </a:rPr>
-              <a:t>イライラしたときに深呼吸できた</a:t>
-            </a:r>
-            <a:endParaRPr lang="en-US" sz="1150" dirty="0"/>
-          </a:p>
-        </p:txBody>
-      </p:sp>
-      <p:sp>
-        <p:nvSpPr>
-          <p:cNvPr id="13" name="Text 11"/>
-          <p:cNvSpPr/>
-          <p:nvPr/>
-        </p:nvSpPr>
-        <p:spPr>
-          <a:xfrm>
-            <a:off x="566928" y="4681728"/>
-            <a:ext cx="4114800" cy="237744"/>
-          </a:xfrm>
-          <a:prstGeom prst="rect">
-            <a:avLst/>
-          </a:prstGeom>
-          <a:noFill/>
-          <a:ln/>
-        </p:spPr>
-        <p:txBody>
-          <a:bodyPr wrap="square" rtlCol="0" anchor="ctr"/>
-          <a:lstStyle/>
-          <a:p>
-            <a:pPr indent="0" marL="0">
+              <a:t>私ファーストプログラム 5DAYS</a:t>
+            </a:r>
+            <a:endParaRPr lang="en-US" sz="850" dirty="0"/>
+          </a:p>
+        </p:txBody>
+      </p:sp>
+      <p:sp>
+        <p:nvSpPr>
+          <p:cNvPr id="17" name="Text 15"/>
+          <p:cNvSpPr/>
+          <p:nvPr/>
+        </p:nvSpPr>
+        <p:spPr>
+          <a:xfrm>
+            <a:off x="8046720" y="4681728"/>
+            <a:ext cx="457200" cy="237744"/>
+          </a:xfrm>
+          <a:prstGeom prst="rect">
+            <a:avLst/>
+          </a:prstGeom>
+          <a:noFill/>
+          <a:ln/>
+        </p:spPr>
+        <p:txBody>
+          <a:bodyPr wrap="square" rtlCol="0" anchor="ctr"/>
+          <a:lstStyle/>
+          <a:p>
+            <a:pPr algn="r" indent="0" marL="0">
               <a:buNone/>
             </a:pPr>
             <a:r>
               <a:rPr lang="en-US" sz="850" spc="40" kern="0" dirty="0">
                 <a:solidFill>
-                  <a:srgbClr val="7A6E6B"/>
-                </a:solidFill>
-                <a:latin typeface="Yu Gothic" pitchFamily="34" charset="0"/>
-                <a:ea typeface="Yu Gothic" pitchFamily="34" charset="-122"/>
-                <a:cs typeface="Yu Gothic" pitchFamily="34" charset="-120"/>
-              </a:rPr>
-              <a:t>私ファーストプログラム 5DAYS</a:t>
-            </a:r>
-            <a:endParaRPr lang="en-US" sz="850" dirty="0"/>
-          </a:p>
-        </p:txBody>
-      </p:sp>
-      <p:sp>
-        <p:nvSpPr>
-          <p:cNvPr id="14" name="Text 12"/>
-          <p:cNvSpPr/>
-          <p:nvPr/>
-        </p:nvSpPr>
-        <p:spPr>
-          <a:xfrm>
-            <a:off x="8138160" y="4681728"/>
-            <a:ext cx="457200" cy="237744"/>
-          </a:xfrm>
-          <a:prstGeom prst="rect">
-            <a:avLst/>
-          </a:prstGeom>
-          <a:noFill/>
-          <a:ln/>
-        </p:spPr>
-        <p:txBody>
-          <a:bodyPr wrap="square" rtlCol="0" anchor="ctr"/>
-          <a:lstStyle/>
-          <a:p>
-            <a:pPr algn="r" indent="0" marL="0">
-              <a:buNone/>
-            </a:pPr>
-            <a:r>
-              <a:rPr lang="en-US" sz="850" spc="40" kern="0" dirty="0">
-                <a:solidFill>
-                  <a:srgbClr val="7A6E6B"/>
+                  <a:srgbClr val="8C757C"/>
                 </a:solidFill>
                 <a:latin typeface="Yu Gothic" pitchFamily="34" charset="0"/>
                 <a:ea typeface="Yu Gothic" pitchFamily="34" charset="-122"/>
@@ -3582,7 +4049,7 @@
     <p:bg>
       <p:bgPr>
         <a:solidFill>
-          <a:srgbClr val="FDF7F7"/>
+          <a:srgbClr val="FDF5F6"/>
         </a:solidFill>
       </p:bgPr>
     </p:bg>
@@ -3608,26 +4075,26 @@
         </p:nvSpPr>
         <p:spPr>
           <a:xfrm>
-            <a:off x="566928" y="384048"/>
-            <a:ext cx="8046720" cy="237744"/>
-          </a:xfrm>
-          <a:prstGeom prst="rect">
-            <a:avLst/>
-          </a:prstGeom>
-          <a:noFill/>
-          <a:ln/>
-        </p:spPr>
-        <p:txBody>
-          <a:bodyPr wrap="square" rtlCol="0" anchor="ctr"/>
-          <a:lstStyle/>
-          <a:p>
-            <a:pPr indent="0" marL="0">
-              <a:buNone/>
-            </a:pPr>
-            <a:r>
-              <a:rPr lang="en-US" sz="1000" b="1" spc="160" kern="0" dirty="0">
-                <a:solidFill>
-                  <a:srgbClr val="7A1524"/>
+            <a:off x="640080" y="420624"/>
+            <a:ext cx="7863840" cy="237744"/>
+          </a:xfrm>
+          <a:prstGeom prst="rect">
+            <a:avLst/>
+          </a:prstGeom>
+          <a:noFill/>
+          <a:ln/>
+        </p:spPr>
+        <p:txBody>
+          <a:bodyPr wrap="square" rtlCol="0" anchor="ctr"/>
+          <a:lstStyle/>
+          <a:p>
+            <a:pPr indent="0" marL="0">
+              <a:buNone/>
+            </a:pPr>
+            <a:r>
+              <a:rPr lang="en-US" sz="950" b="1" spc="200" kern="0" dirty="0">
+                <a:solidFill>
+                  <a:srgbClr val="C4A06A"/>
                 </a:solidFill>
                 <a:latin typeface="Yu Gothic" pitchFamily="34" charset="0"/>
                 <a:ea typeface="Yu Gothic" pitchFamily="34" charset="-122"/>
@@ -3635,7 +4102,7 @@
               </a:rPr>
               <a:t>START</a:t>
             </a:r>
-            <a:endParaRPr lang="en-US" sz="1000" dirty="0"/>
+            <a:endParaRPr lang="en-US" sz="950" dirty="0"/>
           </a:p>
         </p:txBody>
       </p:sp>
@@ -3647,16 +4114,23 @@
         </p:nvSpPr>
         <p:spPr>
           <a:xfrm>
-            <a:off x="566928" y="667512"/>
-            <a:ext cx="457200" cy="32004"/>
-          </a:xfrm>
-          <a:prstGeom prst="rect">
-            <a:avLst/>
+            <a:off x="640080" y="822960"/>
+            <a:ext cx="5303520" cy="274320"/>
+          </a:xfrm>
+          <a:prstGeom prst="roundRect">
+            <a:avLst>
+              <a:gd name="adj" fmla="val 166667"/>
+            </a:avLst>
           </a:prstGeom>
           <a:solidFill>
-            <a:srgbClr val="7A1524"/>
+            <a:srgbClr val="F7DCE3"/>
           </a:solidFill>
-          <a:ln/>
+          <a:ln w="12700">
+            <a:solidFill>
+              <a:srgbClr val="F7DCE3"/>
+            </a:solidFill>
+            <a:prstDash val="solid"/>
+          </a:ln>
         </p:spPr>
       </p:sp>
       <p:sp>
@@ -3667,8 +4141,8 @@
         </p:nvSpPr>
         <p:spPr>
           <a:xfrm>
-            <a:off x="566928" y="822960"/>
-            <a:ext cx="8046720" cy="914400"/>
+            <a:off x="640080" y="676656"/>
+            <a:ext cx="7863840" cy="566928"/>
           </a:xfrm>
           <a:prstGeom prst="rect">
             <a:avLst/>
@@ -3682,67 +4156,191 @@
           <a:p>
             <a:pPr indent="0" marL="0">
               <a:lnSpc>
-                <a:spcPts val="3800"/>
+                <a:spcPts val="3600"/>
               </a:lnSpc>
               <a:buNone/>
             </a:pPr>
             <a:r>
-              <a:rPr lang="en-US" sz="2600" b="1" spc="60" kern="0" dirty="0">
-                <a:solidFill>
-                  <a:srgbClr val="2B2224"/>
+              <a:rPr lang="en-US" sz="2400" b="1" spc="80" kern="0" dirty="0">
+                <a:solidFill>
+                  <a:srgbClr val="A42647"/>
                 </a:solidFill>
                 <a:latin typeface="Yu Mincho" pitchFamily="34" charset="0"/>
                 <a:ea typeface="Yu Mincho" pitchFamily="34" charset="-122"/>
                 <a:cs typeface="Yu Mincho" pitchFamily="34" charset="-120"/>
               </a:rPr>
-              <a:t>明日から、まず15分だけ</a:t>
-            </a:r>
-            <a:endParaRPr lang="en-US" sz="2600" dirty="0"/>
-          </a:p>
-          <a:p>
-            <a:pPr indent="0" marL="0">
-              <a:lnSpc>
-                <a:spcPts val="3800"/>
-              </a:lnSpc>
-              <a:buNone/>
-            </a:pPr>
-            <a:r>
-              <a:rPr lang="en-US" sz="2600" b="1" spc="60" kern="0" dirty="0">
-                <a:solidFill>
-                  <a:srgbClr val="2B2224"/>
+              <a:t>明日から、まず15分だけ「私」を入れる</a:t>
+            </a:r>
+            <a:endParaRPr lang="en-US" sz="2400" dirty="0"/>
+          </a:p>
+        </p:txBody>
+      </p:sp>
+      <p:sp>
+        <p:nvSpPr>
+          <p:cNvPr id="5" name="Shape 3"/>
+          <p:cNvSpPr/>
+          <p:nvPr/>
+        </p:nvSpPr>
+        <p:spPr>
+          <a:xfrm>
+            <a:off x="640080" y="1609344"/>
+            <a:ext cx="7863840" cy="1042416"/>
+          </a:xfrm>
+          <a:prstGeom prst="roundRect">
+            <a:avLst>
+              <a:gd name="adj" fmla="val 7895"/>
+            </a:avLst>
+          </a:prstGeom>
+          <a:solidFill>
+            <a:srgbClr val="FCEEF2"/>
+          </a:solidFill>
+          <a:ln w="12700">
+            <a:solidFill>
+              <a:srgbClr val="E8A0B4"/>
+            </a:solidFill>
+            <a:prstDash val="solid"/>
+          </a:ln>
+        </p:spPr>
+      </p:sp>
+      <p:sp>
+        <p:nvSpPr>
+          <p:cNvPr id="6" name="Text 4"/>
+          <p:cNvSpPr/>
+          <p:nvPr/>
+        </p:nvSpPr>
+        <p:spPr>
+          <a:xfrm>
+            <a:off x="914400" y="1773936"/>
+            <a:ext cx="4754880" cy="365760"/>
+          </a:xfrm>
+          <a:prstGeom prst="rect">
+            <a:avLst/>
+          </a:prstGeom>
+          <a:noFill/>
+          <a:ln/>
+        </p:spPr>
+        <p:txBody>
+          <a:bodyPr wrap="square" rtlCol="0" anchor="ctr"/>
+          <a:lstStyle/>
+          <a:p>
+            <a:pPr indent="0" marL="0">
+              <a:buNone/>
+            </a:pPr>
+            <a:r>
+              <a:rPr lang="en-US" sz="1800" b="1" spc="80" kern="0" dirty="0">
+                <a:solidFill>
+                  <a:srgbClr val="A42647"/>
                 </a:solidFill>
                 <a:latin typeface="Yu Mincho" pitchFamily="34" charset="0"/>
                 <a:ea typeface="Yu Mincho" pitchFamily="34" charset="-122"/>
                 <a:cs typeface="Yu Mincho" pitchFamily="34" charset="-120"/>
               </a:rPr>
-              <a:t>「私」を入れる</a:t>
-            </a:r>
-            <a:endParaRPr lang="en-US" sz="2600" dirty="0"/>
-          </a:p>
-        </p:txBody>
-      </p:sp>
-      <p:sp>
-        <p:nvSpPr>
-          <p:cNvPr id="5" name="Shape 3"/>
-          <p:cNvSpPr/>
-          <p:nvPr/>
-        </p:nvSpPr>
-        <p:spPr>
-          <a:xfrm>
-            <a:off x="566928" y="2011680"/>
-            <a:ext cx="8010144" cy="987552"/>
+              <a:t>10月19日（月）〜 23日（金）</a:t>
+            </a:r>
+            <a:endParaRPr lang="en-US" sz="1800" dirty="0"/>
+          </a:p>
+        </p:txBody>
+      </p:sp>
+      <p:sp>
+        <p:nvSpPr>
+          <p:cNvPr id="7" name="Text 5"/>
+          <p:cNvSpPr/>
+          <p:nvPr/>
+        </p:nvSpPr>
+        <p:spPr>
+          <a:xfrm>
+            <a:off x="5669280" y="1773936"/>
+            <a:ext cx="2651760" cy="365760"/>
+          </a:xfrm>
+          <a:prstGeom prst="rect">
+            <a:avLst/>
+          </a:prstGeom>
+          <a:noFill/>
+          <a:ln/>
+        </p:spPr>
+        <p:txBody>
+          <a:bodyPr wrap="square" rtlCol="0" anchor="ctr"/>
+          <a:lstStyle/>
+          <a:p>
+            <a:pPr indent="0" marL="0">
+              <a:buNone/>
+            </a:pPr>
+            <a:r>
+              <a:rPr lang="en-US" sz="1800" b="1" spc="80" kern="0" dirty="0">
+                <a:solidFill>
+                  <a:srgbClr val="C9325C"/>
+                </a:solidFill>
+                <a:latin typeface="Yu Mincho" pitchFamily="34" charset="0"/>
+                <a:ea typeface="Yu Mincho" pitchFamily="34" charset="-122"/>
+                <a:cs typeface="Yu Mincho" pitchFamily="34" charset="-120"/>
+              </a:rPr>
+              <a:t>毎朝 6:30 – 6:45</a:t>
+            </a:r>
+            <a:endParaRPr lang="en-US" sz="1800" dirty="0"/>
+          </a:p>
+        </p:txBody>
+      </p:sp>
+      <p:sp>
+        <p:nvSpPr>
+          <p:cNvPr id="8" name="Text 6"/>
+          <p:cNvSpPr/>
+          <p:nvPr/>
+        </p:nvSpPr>
+        <p:spPr>
+          <a:xfrm>
+            <a:off x="914400" y="2231136"/>
+            <a:ext cx="7315200" cy="256032"/>
+          </a:xfrm>
+          <a:prstGeom prst="rect">
+            <a:avLst/>
+          </a:prstGeom>
+          <a:noFill/>
+          <a:ln/>
+        </p:spPr>
+        <p:txBody>
+          <a:bodyPr wrap="square" rtlCol="0" anchor="ctr"/>
+          <a:lstStyle/>
+          <a:p>
+            <a:pPr indent="0" marL="0">
+              <a:buNone/>
+            </a:pPr>
+            <a:r>
+              <a:rPr lang="en-US" sz="1150" spc="40" kern="0" dirty="0">
+                <a:solidFill>
+                  <a:srgbClr val="8C757C"/>
+                </a:solidFill>
+                <a:latin typeface="Yu Gothic" pitchFamily="34" charset="0"/>
+                <a:ea typeface="Yu Gothic" pitchFamily="34" charset="-122"/>
+                <a:cs typeface="Yu Gothic" pitchFamily="34" charset="-120"/>
+              </a:rPr>
+              <a:t>Zoomのリンクは、前日の夜までにお送りします。</a:t>
+            </a:r>
+            <a:endParaRPr lang="en-US" sz="1150" dirty="0"/>
+          </a:p>
+        </p:txBody>
+      </p:sp>
+      <p:sp>
+        <p:nvSpPr>
+          <p:cNvPr id="9" name="Shape 7"/>
+          <p:cNvSpPr/>
+          <p:nvPr/>
+        </p:nvSpPr>
+        <p:spPr>
+          <a:xfrm>
+            <a:off x="640080" y="2889504"/>
+            <a:ext cx="6309360" cy="420624"/>
           </a:xfrm>
           <a:prstGeom prst="roundRect">
             <a:avLst>
-              <a:gd name="adj" fmla="val 5556"/>
+              <a:gd name="adj" fmla="val 108696"/>
             </a:avLst>
           </a:prstGeom>
           <a:solidFill>
-            <a:srgbClr val="FBEFEF"/>
+            <a:srgbClr val="F7DCE3"/>
           </a:solidFill>
-          <a:ln w="10160">
+          <a:ln w="12700">
             <a:solidFill>
-              <a:srgbClr val="F0DCDC"/>
+              <a:srgbClr val="F7DCE3"/>
             </a:solidFill>
             <a:prstDash val="solid"/>
           </a:ln>
@@ -3750,266 +4348,228 @@
       </p:sp>
       <p:sp>
         <p:nvSpPr>
-          <p:cNvPr id="6" name="Text 4"/>
-          <p:cNvSpPr/>
-          <p:nvPr/>
-        </p:nvSpPr>
-        <p:spPr>
-          <a:xfrm>
-            <a:off x="841248" y="2212848"/>
-            <a:ext cx="7498080" cy="402336"/>
-          </a:xfrm>
-          <a:prstGeom prst="rect">
-            <a:avLst/>
-          </a:prstGeom>
-          <a:noFill/>
-          <a:ln/>
-        </p:spPr>
-        <p:txBody>
-          <a:bodyPr wrap="square" rtlCol="0" anchor="ctr"/>
-          <a:lstStyle/>
-          <a:p>
-            <a:pPr indent="0" marL="0">
-              <a:buNone/>
-            </a:pPr>
-            <a:r>
-              <a:rPr lang="en-US" sz="2100" b="1" spc="60" kern="0" dirty="0">
-                <a:solidFill>
-                  <a:srgbClr val="7A1524"/>
+          <p:cNvPr id="10" name="Text 8"/>
+          <p:cNvSpPr/>
+          <p:nvPr/>
+        </p:nvSpPr>
+        <p:spPr>
+          <a:xfrm>
+            <a:off x="640080" y="2871216"/>
+            <a:ext cx="7863840" cy="438912"/>
+          </a:xfrm>
+          <a:prstGeom prst="rect">
+            <a:avLst/>
+          </a:prstGeom>
+          <a:noFill/>
+          <a:ln/>
+        </p:spPr>
+        <p:txBody>
+          <a:bodyPr wrap="square" rtlCol="0" anchor="ctr"/>
+          <a:lstStyle/>
+          <a:p>
+            <a:pPr indent="0" marL="0">
+              <a:buNone/>
+            </a:pPr>
+            <a:r>
+              <a:rPr lang="en-US" sz="1900" b="1" spc="80" kern="0" dirty="0">
+                <a:solidFill>
+                  <a:srgbClr val="3F2E33"/>
                 </a:solidFill>
                 <a:latin typeface="Yu Mincho" pitchFamily="34" charset="0"/>
                 <a:ea typeface="Yu Mincho" pitchFamily="34" charset="-122"/>
                 <a:cs typeface="Yu Mincho" pitchFamily="34" charset="-120"/>
               </a:rPr>
-              <a:t>10月19日（月）〜 23日（金）　　毎朝 6:30 – 6:45</a:t>
-            </a:r>
-            <a:endParaRPr lang="en-US" sz="2100" dirty="0"/>
-          </a:p>
-        </p:txBody>
-      </p:sp>
-      <p:sp>
-        <p:nvSpPr>
-          <p:cNvPr id="7" name="Text 5"/>
-          <p:cNvSpPr/>
-          <p:nvPr/>
-        </p:nvSpPr>
-        <p:spPr>
-          <a:xfrm>
-            <a:off x="841248" y="2633472"/>
-            <a:ext cx="7498080" cy="256032"/>
-          </a:xfrm>
-          <a:prstGeom prst="rect">
-            <a:avLst/>
-          </a:prstGeom>
-          <a:noFill/>
-          <a:ln/>
-        </p:spPr>
-        <p:txBody>
-          <a:bodyPr wrap="square" rtlCol="0" anchor="ctr"/>
-          <a:lstStyle/>
-          <a:p>
-            <a:pPr indent="0" marL="0">
-              <a:buNone/>
-            </a:pPr>
-            <a:r>
-              <a:rPr lang="en-US" sz="1200" spc="40" kern="0" dirty="0">
-                <a:solidFill>
-                  <a:srgbClr val="7A6E6B"/>
+              <a:t>寝坊した日があっても、次の朝また来れば大丈夫です。</a:t>
+            </a:r>
+            <a:endParaRPr lang="en-US" sz="1900" dirty="0"/>
+          </a:p>
+        </p:txBody>
+      </p:sp>
+      <p:sp>
+        <p:nvSpPr>
+          <p:cNvPr id="11" name="Shape 9"/>
+          <p:cNvSpPr/>
+          <p:nvPr/>
+        </p:nvSpPr>
+        <p:spPr>
+          <a:xfrm>
+            <a:off x="640080" y="3584448"/>
+            <a:ext cx="7863840" cy="10973"/>
+          </a:xfrm>
+          <a:prstGeom prst="rect">
+            <a:avLst/>
+          </a:prstGeom>
+          <a:solidFill>
+            <a:srgbClr val="E8D8BC"/>
+          </a:solidFill>
+          <a:ln/>
+        </p:spPr>
+      </p:sp>
+      <p:sp>
+        <p:nvSpPr>
+          <p:cNvPr id="12" name="Text 10"/>
+          <p:cNvSpPr/>
+          <p:nvPr/>
+        </p:nvSpPr>
+        <p:spPr>
+          <a:xfrm>
+            <a:off x="640080" y="3749040"/>
+            <a:ext cx="7863840" cy="256032"/>
+          </a:xfrm>
+          <a:prstGeom prst="rect">
+            <a:avLst/>
+          </a:prstGeom>
+          <a:noFill/>
+          <a:ln/>
+        </p:spPr>
+        <p:txBody>
+          <a:bodyPr wrap="square" rtlCol="0" anchor="ctr"/>
+          <a:lstStyle/>
+          <a:p>
+            <a:pPr indent="0" marL="0">
+              <a:buNone/>
+            </a:pPr>
+            <a:r>
+              <a:rPr lang="en-US" sz="1050" b="1" spc="220" kern="0" dirty="0">
+                <a:solidFill>
+                  <a:srgbClr val="C4A06A"/>
                 </a:solidFill>
                 <a:latin typeface="Yu Gothic" pitchFamily="34" charset="0"/>
                 <a:ea typeface="Yu Gothic" pitchFamily="34" charset="-122"/>
                 <a:cs typeface="Yu Gothic" pitchFamily="34" charset="-120"/>
               </a:rPr>
-              <a:t>Zoomのリンクは、前日の夜までにお送りします。</a:t>
-            </a:r>
-            <a:endParaRPr lang="en-US" sz="1200" dirty="0"/>
-          </a:p>
-        </p:txBody>
-      </p:sp>
-      <p:sp>
-        <p:nvSpPr>
-          <p:cNvPr id="8" name="Text 6"/>
-          <p:cNvSpPr/>
-          <p:nvPr/>
-        </p:nvSpPr>
-        <p:spPr>
-          <a:xfrm>
-            <a:off x="566928" y="3218688"/>
-            <a:ext cx="8046720" cy="384048"/>
-          </a:xfrm>
-          <a:prstGeom prst="rect">
-            <a:avLst/>
-          </a:prstGeom>
-          <a:noFill/>
-          <a:ln/>
-        </p:spPr>
-        <p:txBody>
-          <a:bodyPr wrap="square" rtlCol="0" anchor="ctr"/>
-          <a:lstStyle/>
-          <a:p>
-            <a:pPr indent="0" marL="0">
-              <a:buNone/>
-            </a:pPr>
-            <a:r>
-              <a:rPr lang="en-US" sz="1900" b="1" spc="60" kern="0" dirty="0">
-                <a:solidFill>
-                  <a:srgbClr val="2B2224"/>
-                </a:solidFill>
-                <a:latin typeface="Yu Mincho" pitchFamily="34" charset="0"/>
-                <a:ea typeface="Yu Mincho" pitchFamily="34" charset="-122"/>
-                <a:cs typeface="Yu Mincho" pitchFamily="34" charset="-120"/>
-              </a:rPr>
-              <a:t>寝坊した日があっても、次の朝また来れば大丈夫です。</a:t>
-            </a:r>
-            <a:endParaRPr lang="en-US" sz="1900" dirty="0"/>
-          </a:p>
-        </p:txBody>
-      </p:sp>
-      <p:sp>
-        <p:nvSpPr>
-          <p:cNvPr id="9" name="Text 7"/>
-          <p:cNvSpPr/>
-          <p:nvPr/>
-        </p:nvSpPr>
-        <p:spPr>
-          <a:xfrm>
-            <a:off x="566928" y="3822192"/>
-            <a:ext cx="8046720" cy="274320"/>
-          </a:xfrm>
-          <a:prstGeom prst="rect">
-            <a:avLst/>
-          </a:prstGeom>
-          <a:noFill/>
-          <a:ln/>
-        </p:spPr>
-        <p:txBody>
-          <a:bodyPr wrap="square" rtlCol="0" anchor="ctr"/>
-          <a:lstStyle/>
-          <a:p>
-            <a:pPr indent="0" marL="0">
-              <a:buNone/>
-            </a:pPr>
-            <a:r>
-              <a:rPr lang="en-US" sz="1100" b="1" spc="200" kern="0" dirty="0">
-                <a:solidFill>
-                  <a:srgbClr val="7A1524"/>
+              <a:t>Q &amp; A</a:t>
+            </a:r>
+            <a:endParaRPr lang="en-US" sz="1050" dirty="0"/>
+          </a:p>
+        </p:txBody>
+      </p:sp>
+      <p:sp>
+        <p:nvSpPr>
+          <p:cNvPr id="13" name="Text 11"/>
+          <p:cNvSpPr/>
+          <p:nvPr/>
+        </p:nvSpPr>
+        <p:spPr>
+          <a:xfrm>
+            <a:off x="640080" y="4023360"/>
+            <a:ext cx="7863840" cy="274320"/>
+          </a:xfrm>
+          <a:prstGeom prst="rect">
+            <a:avLst/>
+          </a:prstGeom>
+          <a:noFill/>
+          <a:ln/>
+        </p:spPr>
+        <p:txBody>
+          <a:bodyPr wrap="square" rtlCol="0" anchor="ctr"/>
+          <a:lstStyle/>
+          <a:p>
+            <a:pPr indent="0" marL="0">
+              <a:buNone/>
+            </a:pPr>
+            <a:r>
+              <a:rPr lang="en-US" sz="1300" spc="40" kern="0" dirty="0">
+                <a:solidFill>
+                  <a:srgbClr val="8C757C"/>
                 </a:solidFill>
                 <a:latin typeface="Yu Gothic" pitchFamily="34" charset="0"/>
                 <a:ea typeface="Yu Gothic" pitchFamily="34" charset="-122"/>
                 <a:cs typeface="Yu Gothic" pitchFamily="34" charset="-120"/>
               </a:rPr>
-              <a:t>Q &amp; A</a:t>
-            </a:r>
-            <a:endParaRPr lang="en-US" sz="1100" dirty="0"/>
-          </a:p>
-        </p:txBody>
-      </p:sp>
-      <p:sp>
-        <p:nvSpPr>
-          <p:cNvPr id="10" name="Text 8"/>
-          <p:cNvSpPr/>
-          <p:nvPr/>
-        </p:nvSpPr>
-        <p:spPr>
-          <a:xfrm>
-            <a:off x="566928" y="4096512"/>
-            <a:ext cx="8046720" cy="274320"/>
-          </a:xfrm>
-          <a:prstGeom prst="rect">
-            <a:avLst/>
-          </a:prstGeom>
-          <a:noFill/>
-          <a:ln/>
-        </p:spPr>
-        <p:txBody>
-          <a:bodyPr wrap="square" rtlCol="0" anchor="ctr"/>
-          <a:lstStyle/>
-          <a:p>
-            <a:pPr indent="0" marL="0">
-              <a:buNone/>
-            </a:pPr>
-            <a:r>
-              <a:rPr lang="en-US" sz="1300" spc="40" kern="0" dirty="0">
-                <a:solidFill>
-                  <a:srgbClr val="7A6E6B"/>
+              <a:t>聞きたいことがあれば、なんでもどうぞ　♡</a:t>
+            </a:r>
+            <a:endParaRPr lang="en-US" sz="1300" dirty="0"/>
+          </a:p>
+        </p:txBody>
+      </p:sp>
+      <p:sp>
+        <p:nvSpPr>
+          <p:cNvPr id="14" name="Shape 12"/>
+          <p:cNvSpPr/>
+          <p:nvPr/>
+        </p:nvSpPr>
+        <p:spPr>
+          <a:xfrm>
+            <a:off x="640080" y="4590288"/>
+            <a:ext cx="7863840" cy="10973"/>
+          </a:xfrm>
+          <a:prstGeom prst="rect">
+            <a:avLst/>
+          </a:prstGeom>
+          <a:solidFill>
+            <a:srgbClr val="E8D8BC"/>
+          </a:solidFill>
+          <a:ln/>
+        </p:spPr>
+      </p:sp>
+      <p:sp>
+        <p:nvSpPr>
+          <p:cNvPr id="15" name="Text 13"/>
+          <p:cNvSpPr/>
+          <p:nvPr/>
+        </p:nvSpPr>
+        <p:spPr>
+          <a:xfrm>
+            <a:off x="640080" y="4681728"/>
+            <a:ext cx="4572000" cy="237744"/>
+          </a:xfrm>
+          <a:prstGeom prst="rect">
+            <a:avLst/>
+          </a:prstGeom>
+          <a:noFill/>
+          <a:ln/>
+        </p:spPr>
+        <p:txBody>
+          <a:bodyPr wrap="square" rtlCol="0" anchor="ctr"/>
+          <a:lstStyle/>
+          <a:p>
+            <a:pPr indent="0" marL="0">
+              <a:buNone/>
+            </a:pPr>
+            <a:r>
+              <a:rPr lang="en-US" sz="850" spc="40" kern="0" dirty="0">
+                <a:solidFill>
+                  <a:srgbClr val="8C757C"/>
                 </a:solidFill>
                 <a:latin typeface="Yu Gothic" pitchFamily="34" charset="0"/>
                 <a:ea typeface="Yu Gothic" pitchFamily="34" charset="-122"/>
                 <a:cs typeface="Yu Gothic" pitchFamily="34" charset="-120"/>
               </a:rPr>
-              <a:t>聞きたいことがあれば、なんでもどうぞ。</a:t>
-            </a:r>
-            <a:endParaRPr lang="en-US" sz="1300" dirty="0"/>
-          </a:p>
-        </p:txBody>
-      </p:sp>
-      <p:sp>
-        <p:nvSpPr>
-          <p:cNvPr id="11" name="Text 9"/>
-          <p:cNvSpPr/>
-          <p:nvPr/>
-        </p:nvSpPr>
-        <p:spPr>
-          <a:xfrm>
-            <a:off x="566928" y="4681728"/>
-            <a:ext cx="4114800" cy="237744"/>
-          </a:xfrm>
-          <a:prstGeom prst="rect">
-            <a:avLst/>
-          </a:prstGeom>
-          <a:noFill/>
-          <a:ln/>
-        </p:spPr>
-        <p:txBody>
-          <a:bodyPr wrap="square" rtlCol="0" anchor="ctr"/>
-          <a:lstStyle/>
-          <a:p>
-            <a:pPr indent="0" marL="0">
+              <a:t>私ファーストプログラム 5DAYS</a:t>
+            </a:r>
+            <a:endParaRPr lang="en-US" sz="850" dirty="0"/>
+          </a:p>
+        </p:txBody>
+      </p:sp>
+      <p:sp>
+        <p:nvSpPr>
+          <p:cNvPr id="16" name="Text 14"/>
+          <p:cNvSpPr/>
+          <p:nvPr/>
+        </p:nvSpPr>
+        <p:spPr>
+          <a:xfrm>
+            <a:off x="8046720" y="4681728"/>
+            <a:ext cx="457200" cy="237744"/>
+          </a:xfrm>
+          <a:prstGeom prst="rect">
+            <a:avLst/>
+          </a:prstGeom>
+          <a:noFill/>
+          <a:ln/>
+        </p:spPr>
+        <p:txBody>
+          <a:bodyPr wrap="square" rtlCol="0" anchor="ctr"/>
+          <a:lstStyle/>
+          <a:p>
+            <a:pPr algn="r" indent="0" marL="0">
               <a:buNone/>
             </a:pPr>
             <a:r>
               <a:rPr lang="en-US" sz="850" spc="40" kern="0" dirty="0">
                 <a:solidFill>
-                  <a:srgbClr val="7A6E6B"/>
-                </a:solidFill>
-                <a:latin typeface="Yu Gothic" pitchFamily="34" charset="0"/>
-                <a:ea typeface="Yu Gothic" pitchFamily="34" charset="-122"/>
-                <a:cs typeface="Yu Gothic" pitchFamily="34" charset="-120"/>
-              </a:rPr>
-              <a:t>私ファーストプログラム 5DAYS</a:t>
-            </a:r>
-            <a:endParaRPr lang="en-US" sz="850" dirty="0"/>
-          </a:p>
-        </p:txBody>
-      </p:sp>
-      <p:sp>
-        <p:nvSpPr>
-          <p:cNvPr id="12" name="Text 10"/>
-          <p:cNvSpPr/>
-          <p:nvPr/>
-        </p:nvSpPr>
-        <p:spPr>
-          <a:xfrm>
-            <a:off x="8138160" y="4681728"/>
-            <a:ext cx="457200" cy="237744"/>
-          </a:xfrm>
-          <a:prstGeom prst="rect">
-            <a:avLst/>
-          </a:prstGeom>
-          <a:noFill/>
-          <a:ln/>
-        </p:spPr>
-        <p:txBody>
-          <a:bodyPr wrap="square" rtlCol="0" anchor="ctr"/>
-          <a:lstStyle/>
-          <a:p>
-            <a:pPr algn="r" indent="0" marL="0">
-              <a:buNone/>
-            </a:pPr>
-            <a:r>
-              <a:rPr lang="en-US" sz="850" spc="40" kern="0" dirty="0">
-                <a:solidFill>
-                  <a:srgbClr val="7A6E6B"/>
+                  <a:srgbClr val="8C757C"/>
                 </a:solidFill>
                 <a:latin typeface="Yu Gothic" pitchFamily="34" charset="0"/>
                 <a:ea typeface="Yu Gothic" pitchFamily="34" charset="-122"/>
@@ -4035,7 +4595,7 @@
     <p:bg>
       <p:bgPr>
         <a:solidFill>
-          <a:srgbClr val="FDF7F7"/>
+          <a:srgbClr val="FDF5F6"/>
         </a:solidFill>
       </p:bgPr>
     </p:bg>
@@ -4061,34 +4621,34 @@
         </p:nvSpPr>
         <p:spPr>
           <a:xfrm>
-            <a:off x="566928" y="384048"/>
-            <a:ext cx="8046720" cy="237744"/>
-          </a:xfrm>
-          <a:prstGeom prst="rect">
-            <a:avLst/>
-          </a:prstGeom>
-          <a:noFill/>
-          <a:ln/>
-        </p:spPr>
-        <p:txBody>
-          <a:bodyPr wrap="square" rtlCol="0" anchor="ctr"/>
-          <a:lstStyle/>
-          <a:p>
-            <a:pPr indent="0" marL="0">
-              <a:buNone/>
-            </a:pPr>
-            <a:r>
-              <a:rPr lang="en-US" sz="1000" b="1" spc="160" kern="0" dirty="0">
-                <a:solidFill>
-                  <a:srgbClr val="7A1524"/>
+            <a:off x="640080" y="420624"/>
+            <a:ext cx="7863840" cy="237744"/>
+          </a:xfrm>
+          <a:prstGeom prst="rect">
+            <a:avLst/>
+          </a:prstGeom>
+          <a:noFill/>
+          <a:ln/>
+        </p:spPr>
+        <p:txBody>
+          <a:bodyPr wrap="square" rtlCol="0" anchor="ctr"/>
+          <a:lstStyle/>
+          <a:p>
+            <a:pPr indent="0" marL="0">
+              <a:buNone/>
+            </a:pPr>
+            <a:r>
+              <a:rPr lang="en-US" sz="950" b="1" spc="200" kern="0" dirty="0">
+                <a:solidFill>
+                  <a:srgbClr val="C4A06A"/>
                 </a:solidFill>
                 <a:latin typeface="Yu Gothic" pitchFamily="34" charset="0"/>
                 <a:ea typeface="Yu Gothic" pitchFamily="34" charset="-122"/>
                 <a:cs typeface="Yu Gothic" pitchFamily="34" charset="-120"/>
               </a:rPr>
-              <a:t>SPEAKER 01</a:t>
-            </a:r>
-            <a:endParaRPr lang="en-US" sz="1000" dirty="0"/>
+              <a:t>SPEAKER  01</a:t>
+            </a:r>
+            <a:endParaRPr lang="en-US" sz="950" dirty="0"/>
           </a:p>
         </p:txBody>
       </p:sp>
@@ -4100,16 +4660,23 @@
         </p:nvSpPr>
         <p:spPr>
           <a:xfrm>
-            <a:off x="566928" y="667512"/>
-            <a:ext cx="457200" cy="32004"/>
-          </a:xfrm>
-          <a:prstGeom prst="rect">
-            <a:avLst/>
+            <a:off x="640080" y="822960"/>
+            <a:ext cx="3931920" cy="274320"/>
+          </a:xfrm>
+          <a:prstGeom prst="roundRect">
+            <a:avLst>
+              <a:gd name="adj" fmla="val 166667"/>
+            </a:avLst>
           </a:prstGeom>
           <a:solidFill>
-            <a:srgbClr val="7A1524"/>
+            <a:srgbClr val="F7DCE3"/>
           </a:solidFill>
-          <a:ln/>
+          <a:ln w="12700">
+            <a:solidFill>
+              <a:srgbClr val="F7DCE3"/>
+            </a:solidFill>
+            <a:prstDash val="solid"/>
+          </a:ln>
         </p:spPr>
       </p:sp>
       <p:sp>
@@ -4120,8 +4687,8 @@
         </p:nvSpPr>
         <p:spPr>
           <a:xfrm>
-            <a:off x="566928" y="822960"/>
-            <a:ext cx="8046720" cy="1005840"/>
+            <a:off x="640080" y="676656"/>
+            <a:ext cx="7863840" cy="960120"/>
           </a:xfrm>
           <a:prstGeom prst="rect">
             <a:avLst/>
@@ -4135,14 +4702,14 @@
           <a:p>
             <a:pPr indent="0" marL="0">
               <a:lnSpc>
-                <a:spcPts val="4000"/>
+                <a:spcPts val="3800"/>
               </a:lnSpc>
               <a:buNone/>
             </a:pPr>
             <a:r>
-              <a:rPr lang="en-US" sz="2700" b="1" spc="60" kern="0" dirty="0">
-                <a:solidFill>
-                  <a:srgbClr val="2B2224"/>
+              <a:rPr lang="en-US" sz="2600" b="1" spc="80" kern="0" dirty="0">
+                <a:solidFill>
+                  <a:srgbClr val="A42647"/>
                 </a:solidFill>
                 <a:latin typeface="Yu Mincho" pitchFamily="34" charset="0"/>
                 <a:ea typeface="Yu Mincho" pitchFamily="34" charset="-122"/>
@@ -4150,19 +4717,19 @@
               </a:rPr>
               <a:t>私が、身体を整えることを</a:t>
             </a:r>
-            <a:endParaRPr lang="en-US" sz="2700" dirty="0"/>
+            <a:endParaRPr lang="en-US" sz="2600" dirty="0"/>
           </a:p>
           <a:p>
             <a:pPr indent="0" marL="0">
               <a:lnSpc>
-                <a:spcPts val="4000"/>
+                <a:spcPts val="3800"/>
               </a:lnSpc>
               <a:buNone/>
             </a:pPr>
             <a:r>
-              <a:rPr lang="en-US" sz="2700" b="1" spc="60" kern="0" dirty="0">
-                <a:solidFill>
-                  <a:srgbClr val="2B2224"/>
+              <a:rPr lang="en-US" sz="2600" b="1" spc="80" kern="0" dirty="0">
+                <a:solidFill>
+                  <a:srgbClr val="A42647"/>
                 </a:solidFill>
                 <a:latin typeface="Yu Mincho" pitchFamily="34" charset="0"/>
                 <a:ea typeface="Yu Mincho" pitchFamily="34" charset="-122"/>
@@ -4170,38 +4737,82 @@
               </a:rPr>
               <a:t>伝える理由</a:t>
             </a:r>
-            <a:endParaRPr lang="en-US" sz="2700" dirty="0"/>
-          </a:p>
-        </p:txBody>
-      </p:sp>
-      <p:sp>
-        <p:nvSpPr>
-          <p:cNvPr id="5" name="Text 3"/>
-          <p:cNvSpPr/>
-          <p:nvPr/>
-        </p:nvSpPr>
-        <p:spPr>
-          <a:xfrm>
-            <a:off x="566928" y="1901952"/>
-            <a:ext cx="8046720" cy="274320"/>
-          </a:xfrm>
-          <a:prstGeom prst="rect">
-            <a:avLst/>
-          </a:prstGeom>
-          <a:noFill/>
-          <a:ln/>
-        </p:spPr>
-        <p:txBody>
-          <a:bodyPr wrap="square" rtlCol="0" anchor="ctr"/>
-          <a:lstStyle/>
-          <a:p>
-            <a:pPr indent="0" marL="0">
-              <a:buNone/>
-            </a:pPr>
-            <a:r>
-              <a:rPr lang="en-US" sz="1300" b="1" spc="40" kern="0" dirty="0">
-                <a:solidFill>
-                  <a:srgbClr val="7A1524"/>
+            <a:endParaRPr lang="en-US" sz="2600" dirty="0"/>
+          </a:p>
+        </p:txBody>
+      </p:sp>
+      <p:sp>
+        <p:nvSpPr>
+          <p:cNvPr id="5" name="Shape 3"/>
+          <p:cNvSpPr/>
+          <p:nvPr/>
+        </p:nvSpPr>
+        <p:spPr>
+          <a:xfrm>
+            <a:off x="6862572" y="1696212"/>
+            <a:ext cx="1636776" cy="1636776"/>
+          </a:xfrm>
+          <a:prstGeom prst="ellipse">
+            <a:avLst/>
+          </a:prstGeom>
+          <a:solidFill>
+            <a:srgbClr val="E8D8BC"/>
+          </a:solidFill>
+          <a:ln/>
+        </p:spPr>
+      </p:sp>
+      <p:pic>
+        <p:nvPicPr>
+          <p:cNvPr id="6" name="Image 0" descr="images/shiorin.jpg">    </p:cNvPr>
+          <p:cNvPicPr>
+            <a:picLocks noChangeAspect="1"/>
+          </p:cNvPicPr>
+          <p:nvPr/>
+        </p:nvPicPr>
+        <p:blipFill>
+          <a:blip r:embed="rId1"/>
+          <a:stretch>
+            <a:fillRect/>
+          </a:stretch>
+        </p:blipFill>
+        <p:spPr>
+          <a:xfrm>
+            <a:off x="6903720" y="1737360"/>
+            <a:ext cx="1554480" cy="1554480"/>
+          </a:xfrm>
+          <a:prstGeom prst="ellipse">
+            <a:avLst/>
+          </a:prstGeom>
+        </p:spPr>
+      </p:pic>
+      <p:sp>
+        <p:nvSpPr>
+          <p:cNvPr id="7" name="Text 4"/>
+          <p:cNvSpPr/>
+          <p:nvPr/>
+        </p:nvSpPr>
+        <p:spPr>
+          <a:xfrm>
+            <a:off x="640080" y="1920240"/>
+            <a:ext cx="5943600" cy="274320"/>
+          </a:xfrm>
+          <a:prstGeom prst="rect">
+            <a:avLst/>
+          </a:prstGeom>
+          <a:noFill/>
+          <a:ln/>
+        </p:spPr>
+        <p:txBody>
+          <a:bodyPr wrap="square" rtlCol="0" anchor="ctr"/>
+          <a:lstStyle/>
+          <a:p>
+            <a:pPr indent="0" marL="0">
+              <a:buNone/>
+            </a:pPr>
+            <a:r>
+              <a:rPr lang="en-US" sz="1250" b="1" spc="40" kern="0" dirty="0">
+                <a:solidFill>
+                  <a:srgbClr val="A42647"/>
                 </a:solidFill>
                 <a:latin typeface="Yu Gothic" pitchFamily="34" charset="0"/>
                 <a:ea typeface="Yu Gothic" pitchFamily="34" charset="-122"/>
@@ -4209,38 +4820,38 @@
               </a:rPr>
               <a:t>トレーナー／パワーリフター　しおりん（佐藤 栞）</a:t>
             </a:r>
-            <a:endParaRPr lang="en-US" sz="1300" dirty="0"/>
-          </a:p>
-        </p:txBody>
-      </p:sp>
-      <p:sp>
-        <p:nvSpPr>
-          <p:cNvPr id="6" name="Text 4"/>
-          <p:cNvSpPr/>
-          <p:nvPr/>
-        </p:nvSpPr>
-        <p:spPr>
-          <a:xfrm>
-            <a:off x="566928" y="2249424"/>
-            <a:ext cx="8046720" cy="274320"/>
-          </a:xfrm>
-          <a:prstGeom prst="rect">
-            <a:avLst/>
-          </a:prstGeom>
-          <a:noFill/>
-          <a:ln/>
-        </p:spPr>
-        <p:txBody>
-          <a:bodyPr wrap="square" rtlCol="0" anchor="ctr"/>
-          <a:lstStyle/>
-          <a:p>
-            <a:pPr indent="0" marL="0">
-              <a:buNone/>
-            </a:pPr>
-            <a:r>
-              <a:rPr lang="en-US" sz="1200" spc="40" kern="0" dirty="0">
-                <a:solidFill>
-                  <a:srgbClr val="7A6E6B"/>
+            <a:endParaRPr lang="en-US" sz="1250" dirty="0"/>
+          </a:p>
+        </p:txBody>
+      </p:sp>
+      <p:sp>
+        <p:nvSpPr>
+          <p:cNvPr id="8" name="Text 5"/>
+          <p:cNvSpPr/>
+          <p:nvPr/>
+        </p:nvSpPr>
+        <p:spPr>
+          <a:xfrm>
+            <a:off x="640080" y="2249424"/>
+            <a:ext cx="5943600" cy="256032"/>
+          </a:xfrm>
+          <a:prstGeom prst="rect">
+            <a:avLst/>
+          </a:prstGeom>
+          <a:noFill/>
+          <a:ln/>
+        </p:spPr>
+        <p:txBody>
+          <a:bodyPr wrap="square" rtlCol="0" anchor="ctr"/>
+          <a:lstStyle/>
+          <a:p>
+            <a:pPr indent="0" marL="0">
+              <a:buNone/>
+            </a:pPr>
+            <a:r>
+              <a:rPr lang="en-US" sz="1150" spc="40" kern="0" dirty="0">
+                <a:solidFill>
+                  <a:srgbClr val="8C757C"/>
                 </a:solidFill>
                 <a:latin typeface="Yu Gothic" pitchFamily="34" charset="0"/>
                 <a:ea typeface="Yu Gothic" pitchFamily="34" charset="-122"/>
@@ -4248,40 +4859,40 @@
               </a:rPr>
               <a:t>仕事　／　トレーニング　／　子育て</a:t>
             </a:r>
-            <a:endParaRPr lang="en-US" sz="1200" dirty="0"/>
-          </a:p>
-        </p:txBody>
-      </p:sp>
-      <p:sp>
-        <p:nvSpPr>
-          <p:cNvPr id="7" name="Shape 5"/>
-          <p:cNvSpPr/>
-          <p:nvPr/>
-        </p:nvSpPr>
-        <p:spPr>
-          <a:xfrm>
-            <a:off x="566928" y="2670048"/>
-            <a:ext cx="8010144" cy="10973"/>
+            <a:endParaRPr lang="en-US" sz="1150" dirty="0"/>
+          </a:p>
+        </p:txBody>
+      </p:sp>
+      <p:sp>
+        <p:nvSpPr>
+          <p:cNvPr id="9" name="Shape 6"/>
+          <p:cNvSpPr/>
+          <p:nvPr/>
+        </p:nvSpPr>
+        <p:spPr>
+          <a:xfrm>
+            <a:off x="640080" y="2651760"/>
+            <a:ext cx="5943600" cy="10973"/>
           </a:xfrm>
           <a:prstGeom prst="rect">
             <a:avLst/>
           </a:prstGeom>
           <a:solidFill>
-            <a:srgbClr val="E8DCDB"/>
+            <a:srgbClr val="E8D8BC"/>
           </a:solidFill>
           <a:ln/>
         </p:spPr>
       </p:sp>
       <p:sp>
         <p:nvSpPr>
-          <p:cNvPr id="8" name="Text 6"/>
-          <p:cNvSpPr/>
-          <p:nvPr/>
-        </p:nvSpPr>
-        <p:spPr>
-          <a:xfrm>
-            <a:off x="566928" y="2852928"/>
-            <a:ext cx="8046720" cy="694944"/>
+          <p:cNvPr id="10" name="Text 7"/>
+          <p:cNvSpPr/>
+          <p:nvPr/>
+        </p:nvSpPr>
+        <p:spPr>
+          <a:xfrm>
+            <a:off x="640080" y="2834640"/>
+            <a:ext cx="6035040" cy="768096"/>
           </a:xfrm>
           <a:prstGeom prst="rect">
             <a:avLst/>
@@ -4295,14 +4906,14 @@
           <a:p>
             <a:pPr indent="0" marL="0">
               <a:lnSpc>
-                <a:spcPts val="3200"/>
+                <a:spcPts val="3100"/>
               </a:lnSpc>
               <a:buNone/>
             </a:pPr>
             <a:r>
-              <a:rPr lang="en-US" sz="2100" b="1" spc="60" kern="0" dirty="0">
-                <a:solidFill>
-                  <a:srgbClr val="2B2224"/>
+              <a:rPr lang="en-US" sz="2000" b="1" spc="80" kern="0" dirty="0">
+                <a:solidFill>
+                  <a:srgbClr val="3F2E33"/>
                 </a:solidFill>
                 <a:latin typeface="Yu Mincho" pitchFamily="34" charset="0"/>
                 <a:ea typeface="Yu Mincho" pitchFamily="34" charset="-122"/>
@@ -4310,19 +4921,19 @@
               </a:rPr>
               <a:t>身体を整えることで、</a:t>
             </a:r>
-            <a:endParaRPr lang="en-US" sz="2100" dirty="0"/>
+            <a:endParaRPr lang="en-US" sz="2000" dirty="0"/>
           </a:p>
           <a:p>
             <a:pPr indent="0" marL="0">
               <a:lnSpc>
-                <a:spcPts val="3200"/>
+                <a:spcPts val="3100"/>
               </a:lnSpc>
               <a:buNone/>
             </a:pPr>
             <a:r>
-              <a:rPr lang="en-US" sz="2100" b="1" spc="60" kern="0" dirty="0">
-                <a:solidFill>
-                  <a:srgbClr val="2B2224"/>
+              <a:rPr lang="en-US" sz="2000" b="1" spc="80" kern="0" dirty="0">
+                <a:solidFill>
+                  <a:srgbClr val="3F2E33"/>
                 </a:solidFill>
                 <a:latin typeface="Yu Mincho" pitchFamily="34" charset="0"/>
                 <a:ea typeface="Yu Mincho" pitchFamily="34" charset="-122"/>
@@ -4330,38 +4941,38 @@
               </a:rPr>
               <a:t>外に向いた矢印を、自分に戻す。</a:t>
             </a:r>
-            <a:endParaRPr lang="en-US" sz="2100" dirty="0"/>
-          </a:p>
-        </p:txBody>
-      </p:sp>
-      <p:sp>
-        <p:nvSpPr>
-          <p:cNvPr id="9" name="Text 7"/>
-          <p:cNvSpPr/>
-          <p:nvPr/>
-        </p:nvSpPr>
-        <p:spPr>
-          <a:xfrm>
-            <a:off x="566928" y="3712464"/>
-            <a:ext cx="8046720" cy="292608"/>
-          </a:xfrm>
-          <a:prstGeom prst="rect">
-            <a:avLst/>
-          </a:prstGeom>
-          <a:noFill/>
-          <a:ln/>
-        </p:spPr>
-        <p:txBody>
-          <a:bodyPr wrap="square" rtlCol="0" anchor="ctr"/>
-          <a:lstStyle/>
-          <a:p>
-            <a:pPr indent="0" marL="0">
-              <a:buNone/>
-            </a:pPr>
-            <a:r>
-              <a:rPr lang="en-US" sz="1300" spc="40" kern="0" dirty="0">
-                <a:solidFill>
-                  <a:srgbClr val="7A6E6B"/>
+            <a:endParaRPr lang="en-US" sz="2000" dirty="0"/>
+          </a:p>
+        </p:txBody>
+      </p:sp>
+      <p:sp>
+        <p:nvSpPr>
+          <p:cNvPr id="11" name="Text 8"/>
+          <p:cNvSpPr/>
+          <p:nvPr/>
+        </p:nvSpPr>
+        <p:spPr>
+          <a:xfrm>
+            <a:off x="640080" y="3712464"/>
+            <a:ext cx="6035040" cy="292608"/>
+          </a:xfrm>
+          <a:prstGeom prst="rect">
+            <a:avLst/>
+          </a:prstGeom>
+          <a:noFill/>
+          <a:ln/>
+        </p:spPr>
+        <p:txBody>
+          <a:bodyPr wrap="square" rtlCol="0" anchor="ctr"/>
+          <a:lstStyle/>
+          <a:p>
+            <a:pPr indent="0" marL="0">
+              <a:buNone/>
+            </a:pPr>
+            <a:r>
+              <a:rPr lang="en-US" sz="1200" spc="40" kern="0" dirty="0">
+                <a:solidFill>
+                  <a:srgbClr val="8C757C"/>
                 </a:solidFill>
                 <a:latin typeface="Yu Gothic" pitchFamily="34" charset="0"/>
                 <a:ea typeface="Yu Gothic" pitchFamily="34" charset="-122"/>
@@ -4369,20 +4980,40 @@
               </a:rPr>
               <a:t>正しく立つことは、私にとって、思考を切り替えるスイッチです。</a:t>
             </a:r>
-            <a:endParaRPr lang="en-US" sz="1300" dirty="0"/>
-          </a:p>
-        </p:txBody>
-      </p:sp>
-      <p:sp>
-        <p:nvSpPr>
-          <p:cNvPr id="10" name="Text 8"/>
-          <p:cNvSpPr/>
-          <p:nvPr/>
-        </p:nvSpPr>
-        <p:spPr>
-          <a:xfrm>
-            <a:off x="566928" y="4681728"/>
-            <a:ext cx="4114800" cy="237744"/>
+            <a:endParaRPr lang="en-US" sz="1200" dirty="0"/>
+          </a:p>
+        </p:txBody>
+      </p:sp>
+      <p:sp>
+        <p:nvSpPr>
+          <p:cNvPr id="12" name="Shape 9"/>
+          <p:cNvSpPr/>
+          <p:nvPr/>
+        </p:nvSpPr>
+        <p:spPr>
+          <a:xfrm>
+            <a:off x="640080" y="4590288"/>
+            <a:ext cx="7863840" cy="10973"/>
+          </a:xfrm>
+          <a:prstGeom prst="rect">
+            <a:avLst/>
+          </a:prstGeom>
+          <a:solidFill>
+            <a:srgbClr val="E8D8BC"/>
+          </a:solidFill>
+          <a:ln/>
+        </p:spPr>
+      </p:sp>
+      <p:sp>
+        <p:nvSpPr>
+          <p:cNvPr id="13" name="Text 10"/>
+          <p:cNvSpPr/>
+          <p:nvPr/>
+        </p:nvSpPr>
+        <p:spPr>
+          <a:xfrm>
+            <a:off x="640080" y="4681728"/>
+            <a:ext cx="4572000" cy="237744"/>
           </a:xfrm>
           <a:prstGeom prst="rect">
             <a:avLst/>
@@ -4400,7 +5031,7 @@
             <a:r>
               <a:rPr lang="en-US" sz="850" spc="40" kern="0" dirty="0">
                 <a:solidFill>
-                  <a:srgbClr val="7A6E6B"/>
+                  <a:srgbClr val="8C757C"/>
                 </a:solidFill>
                 <a:latin typeface="Yu Gothic" pitchFamily="34" charset="0"/>
                 <a:ea typeface="Yu Gothic" pitchFamily="34" charset="-122"/>
@@ -4414,13 +5045,13 @@
       </p:sp>
       <p:sp>
         <p:nvSpPr>
-          <p:cNvPr id="11" name="Text 9"/>
-          <p:cNvSpPr/>
-          <p:nvPr/>
-        </p:nvSpPr>
-        <p:spPr>
-          <a:xfrm>
-            <a:off x="8138160" y="4681728"/>
+          <p:cNvPr id="14" name="Text 11"/>
+          <p:cNvSpPr/>
+          <p:nvPr/>
+        </p:nvSpPr>
+        <p:spPr>
+          <a:xfrm>
+            <a:off x="8046720" y="4681728"/>
             <a:ext cx="457200" cy="237744"/>
           </a:xfrm>
           <a:prstGeom prst="rect">
@@ -4439,7 +5070,7 @@
             <a:r>
               <a:rPr lang="en-US" sz="850" spc="40" kern="0" dirty="0">
                 <a:solidFill>
-                  <a:srgbClr val="7A6E6B"/>
+                  <a:srgbClr val="8C757C"/>
                 </a:solidFill>
                 <a:latin typeface="Yu Gothic" pitchFamily="34" charset="0"/>
                 <a:ea typeface="Yu Gothic" pitchFamily="34" charset="-122"/>
@@ -4465,7 +5096,7 @@
     <p:bg>
       <p:bgPr>
         <a:solidFill>
-          <a:srgbClr val="FDF7F7"/>
+          <a:srgbClr val="FDF5F6"/>
         </a:solidFill>
       </p:bgPr>
     </p:bg>
@@ -4491,34 +5122,34 @@
         </p:nvSpPr>
         <p:spPr>
           <a:xfrm>
-            <a:off x="566928" y="384048"/>
-            <a:ext cx="8046720" cy="237744"/>
-          </a:xfrm>
-          <a:prstGeom prst="rect">
-            <a:avLst/>
-          </a:prstGeom>
-          <a:noFill/>
-          <a:ln/>
-        </p:spPr>
-        <p:txBody>
-          <a:bodyPr wrap="square" rtlCol="0" anchor="ctr"/>
-          <a:lstStyle/>
-          <a:p>
-            <a:pPr indent="0" marL="0">
-              <a:buNone/>
-            </a:pPr>
-            <a:r>
-              <a:rPr lang="en-US" sz="1000" b="1" spc="160" kern="0" dirty="0">
-                <a:solidFill>
-                  <a:srgbClr val="7A1524"/>
+            <a:off x="640080" y="420624"/>
+            <a:ext cx="7863840" cy="237744"/>
+          </a:xfrm>
+          <a:prstGeom prst="rect">
+            <a:avLst/>
+          </a:prstGeom>
+          <a:noFill/>
+          <a:ln/>
+        </p:spPr>
+        <p:txBody>
+          <a:bodyPr wrap="square" rtlCol="0" anchor="ctr"/>
+          <a:lstStyle/>
+          <a:p>
+            <a:pPr indent="0" marL="0">
+              <a:buNone/>
+            </a:pPr>
+            <a:r>
+              <a:rPr lang="en-US" sz="950" b="1" spc="200" kern="0" dirty="0">
+                <a:solidFill>
+                  <a:srgbClr val="C4A06A"/>
                 </a:solidFill>
                 <a:latin typeface="Yu Gothic" pitchFamily="34" charset="0"/>
                 <a:ea typeface="Yu Gothic" pitchFamily="34" charset="-122"/>
                 <a:cs typeface="Yu Gothic" pitchFamily="34" charset="-120"/>
               </a:rPr>
-              <a:t>SPEAKER 02</a:t>
-            </a:r>
-            <a:endParaRPr lang="en-US" sz="1000" dirty="0"/>
+              <a:t>SPEAKER  02</a:t>
+            </a:r>
+            <a:endParaRPr lang="en-US" sz="950" dirty="0"/>
           </a:p>
         </p:txBody>
       </p:sp>
@@ -4530,16 +5161,23 @@
         </p:nvSpPr>
         <p:spPr>
           <a:xfrm>
-            <a:off x="566928" y="667512"/>
-            <a:ext cx="457200" cy="32004"/>
-          </a:xfrm>
-          <a:prstGeom prst="rect">
-            <a:avLst/>
+            <a:off x="640080" y="822960"/>
+            <a:ext cx="2286000" cy="274320"/>
+          </a:xfrm>
+          <a:prstGeom prst="roundRect">
+            <a:avLst>
+              <a:gd name="adj" fmla="val 166667"/>
+            </a:avLst>
           </a:prstGeom>
           <a:solidFill>
-            <a:srgbClr val="7A1524"/>
+            <a:srgbClr val="F7DCE3"/>
           </a:solidFill>
-          <a:ln/>
+          <a:ln w="12700">
+            <a:solidFill>
+              <a:srgbClr val="F7DCE3"/>
+            </a:solidFill>
+            <a:prstDash val="solid"/>
+          </a:ln>
         </p:spPr>
       </p:sp>
       <p:sp>
@@ -4550,8 +5188,8 @@
         </p:nvSpPr>
         <p:spPr>
           <a:xfrm>
-            <a:off x="566928" y="822960"/>
-            <a:ext cx="8046720" cy="1005840"/>
+            <a:off x="640080" y="676656"/>
+            <a:ext cx="7863840" cy="960120"/>
           </a:xfrm>
           <a:prstGeom prst="rect">
             <a:avLst/>
@@ -4565,14 +5203,14 @@
           <a:p>
             <a:pPr indent="0" marL="0">
               <a:lnSpc>
-                <a:spcPts val="4000"/>
+                <a:spcPts val="3800"/>
               </a:lnSpc>
               <a:buNone/>
             </a:pPr>
             <a:r>
-              <a:rPr lang="en-US" sz="2700" b="1" spc="60" kern="0" dirty="0">
-                <a:solidFill>
-                  <a:srgbClr val="2B2224"/>
+              <a:rPr lang="en-US" sz="2600" b="1" spc="80" kern="0" dirty="0">
+                <a:solidFill>
+                  <a:srgbClr val="A42647"/>
                 </a:solidFill>
                 <a:latin typeface="Yu Mincho" pitchFamily="34" charset="0"/>
                 <a:ea typeface="Yu Mincho" pitchFamily="34" charset="-122"/>
@@ -4580,19 +5218,19 @@
               </a:rPr>
               <a:t>私が、所作を</a:t>
             </a:r>
-            <a:endParaRPr lang="en-US" sz="2700" dirty="0"/>
+            <a:endParaRPr lang="en-US" sz="2600" dirty="0"/>
           </a:p>
           <a:p>
             <a:pPr indent="0" marL="0">
               <a:lnSpc>
-                <a:spcPts val="4000"/>
+                <a:spcPts val="3800"/>
               </a:lnSpc>
               <a:buNone/>
             </a:pPr>
             <a:r>
-              <a:rPr lang="en-US" sz="2700" b="1" spc="60" kern="0" dirty="0">
-                <a:solidFill>
-                  <a:srgbClr val="2B2224"/>
+              <a:rPr lang="en-US" sz="2600" b="1" spc="80" kern="0" dirty="0">
+                <a:solidFill>
+                  <a:srgbClr val="A42647"/>
                 </a:solidFill>
                 <a:latin typeface="Yu Mincho" pitchFamily="34" charset="0"/>
                 <a:ea typeface="Yu Mincho" pitchFamily="34" charset="-122"/>
@@ -4600,77 +5238,121 @@
               </a:rPr>
               <a:t>伝える理由</a:t>
             </a:r>
-            <a:endParaRPr lang="en-US" sz="2700" dirty="0"/>
-          </a:p>
-        </p:txBody>
-      </p:sp>
-      <p:sp>
-        <p:nvSpPr>
-          <p:cNvPr id="5" name="Text 3"/>
-          <p:cNvSpPr/>
-          <p:nvPr/>
-        </p:nvSpPr>
-        <p:spPr>
-          <a:xfrm>
-            <a:off x="566928" y="1901952"/>
-            <a:ext cx="8046720" cy="274320"/>
-          </a:xfrm>
-          <a:prstGeom prst="rect">
-            <a:avLst/>
-          </a:prstGeom>
-          <a:noFill/>
-          <a:ln/>
-        </p:spPr>
-        <p:txBody>
-          <a:bodyPr wrap="square" rtlCol="0" anchor="ctr"/>
-          <a:lstStyle/>
-          <a:p>
-            <a:pPr indent="0" marL="0">
-              <a:buNone/>
-            </a:pPr>
-            <a:r>
-              <a:rPr lang="en-US" sz="1300" b="1" spc="40" kern="0" dirty="0">
-                <a:solidFill>
-                  <a:srgbClr val="7A1524"/>
+            <a:endParaRPr lang="en-US" sz="2600" dirty="0"/>
+          </a:p>
+        </p:txBody>
+      </p:sp>
+      <p:sp>
+        <p:nvSpPr>
+          <p:cNvPr id="5" name="Shape 3"/>
+          <p:cNvSpPr/>
+          <p:nvPr/>
+        </p:nvSpPr>
+        <p:spPr>
+          <a:xfrm>
+            <a:off x="6862572" y="1696212"/>
+            <a:ext cx="1636776" cy="1636776"/>
+          </a:xfrm>
+          <a:prstGeom prst="ellipse">
+            <a:avLst/>
+          </a:prstGeom>
+          <a:solidFill>
+            <a:srgbClr val="E8D8BC"/>
+          </a:solidFill>
+          <a:ln/>
+        </p:spPr>
+      </p:sp>
+      <p:pic>
+        <p:nvPicPr>
+          <p:cNvPr id="6" name="Image 0" descr="images/miyuki.jpg">    </p:cNvPr>
+          <p:cNvPicPr>
+            <a:picLocks noChangeAspect="1"/>
+          </p:cNvPicPr>
+          <p:nvPr/>
+        </p:nvPicPr>
+        <p:blipFill>
+          <a:blip r:embed="rId1"/>
+          <a:stretch>
+            <a:fillRect/>
+          </a:stretch>
+        </p:blipFill>
+        <p:spPr>
+          <a:xfrm>
+            <a:off x="6903720" y="1737360"/>
+            <a:ext cx="1554480" cy="1554480"/>
+          </a:xfrm>
+          <a:prstGeom prst="ellipse">
+            <a:avLst/>
+          </a:prstGeom>
+        </p:spPr>
+      </p:pic>
+      <p:sp>
+        <p:nvSpPr>
+          <p:cNvPr id="7" name="Text 4"/>
+          <p:cNvSpPr/>
+          <p:nvPr/>
+        </p:nvSpPr>
+        <p:spPr>
+          <a:xfrm>
+            <a:off x="640080" y="1920240"/>
+            <a:ext cx="5943600" cy="274320"/>
+          </a:xfrm>
+          <a:prstGeom prst="rect">
+            <a:avLst/>
+          </a:prstGeom>
+          <a:noFill/>
+          <a:ln/>
+        </p:spPr>
+        <p:txBody>
+          <a:bodyPr wrap="square" rtlCol="0" anchor="ctr"/>
+          <a:lstStyle/>
+          <a:p>
+            <a:pPr indent="0" marL="0">
+              <a:buNone/>
+            </a:pPr>
+            <a:r>
+              <a:rPr lang="en-US" sz="1250" b="1" spc="40" kern="0" dirty="0">
+                <a:solidFill>
+                  <a:srgbClr val="A42647"/>
                 </a:solidFill>
                 <a:latin typeface="Yu Gothic" pitchFamily="34" charset="0"/>
                 <a:ea typeface="Yu Gothic" pitchFamily="34" charset="-122"/>
                 <a:cs typeface="Yu Gothic" pitchFamily="34" charset="-120"/>
               </a:rPr>
-              <a:t>マナー講師　みゆき</a:t>
-            </a:r>
-            <a:endParaRPr lang="en-US" sz="1300" dirty="0"/>
-          </a:p>
-        </p:txBody>
-      </p:sp>
-      <p:sp>
-        <p:nvSpPr>
-          <p:cNvPr id="6" name="Text 4"/>
-          <p:cNvSpPr/>
-          <p:nvPr/>
-        </p:nvSpPr>
-        <p:spPr>
-          <a:xfrm>
-            <a:off x="566928" y="2249424"/>
-            <a:ext cx="8046720" cy="274320"/>
-          </a:xfrm>
-          <a:prstGeom prst="rect">
-            <a:avLst/>
-          </a:prstGeom>
-          <a:noFill/>
-          <a:ln/>
-        </p:spPr>
-        <p:txBody>
-          <a:bodyPr wrap="square" rtlCol="0" anchor="ctr"/>
-          <a:lstStyle/>
-          <a:p>
-            <a:pPr indent="0" marL="0">
-              <a:buNone/>
-            </a:pPr>
-            <a:r>
-              <a:rPr lang="en-US" sz="1200" spc="40" kern="0" dirty="0">
-                <a:solidFill>
-                  <a:srgbClr val="7A6E6B"/>
+              <a:t>マナー講師　三浦みゆき</a:t>
+            </a:r>
+            <a:endParaRPr lang="en-US" sz="1250" dirty="0"/>
+          </a:p>
+        </p:txBody>
+      </p:sp>
+      <p:sp>
+        <p:nvSpPr>
+          <p:cNvPr id="8" name="Text 5"/>
+          <p:cNvSpPr/>
+          <p:nvPr/>
+        </p:nvSpPr>
+        <p:spPr>
+          <a:xfrm>
+            <a:off x="640080" y="2249424"/>
+            <a:ext cx="5943600" cy="256032"/>
+          </a:xfrm>
+          <a:prstGeom prst="rect">
+            <a:avLst/>
+          </a:prstGeom>
+          <a:noFill/>
+          <a:ln/>
+        </p:spPr>
+        <p:txBody>
+          <a:bodyPr wrap="square" rtlCol="0" anchor="ctr"/>
+          <a:lstStyle/>
+          <a:p>
+            <a:pPr indent="0" marL="0">
+              <a:buNone/>
+            </a:pPr>
+            <a:r>
+              <a:rPr lang="en-US" sz="1150" spc="40" kern="0" dirty="0">
+                <a:solidFill>
+                  <a:srgbClr val="8C757C"/>
                 </a:solidFill>
                 <a:latin typeface="Yu Gothic" pitchFamily="34" charset="0"/>
                 <a:ea typeface="Yu Gothic" pitchFamily="34" charset="-122"/>
@@ -4678,40 +5360,40 @@
               </a:rPr>
               <a:t>家族や仕事を優先して、自分はいつも後回しだった</a:t>
             </a:r>
-            <a:endParaRPr lang="en-US" sz="1200" dirty="0"/>
-          </a:p>
-        </p:txBody>
-      </p:sp>
-      <p:sp>
-        <p:nvSpPr>
-          <p:cNvPr id="7" name="Shape 5"/>
-          <p:cNvSpPr/>
-          <p:nvPr/>
-        </p:nvSpPr>
-        <p:spPr>
-          <a:xfrm>
-            <a:off x="566928" y="2670048"/>
-            <a:ext cx="8010144" cy="10973"/>
+            <a:endParaRPr lang="en-US" sz="1150" dirty="0"/>
+          </a:p>
+        </p:txBody>
+      </p:sp>
+      <p:sp>
+        <p:nvSpPr>
+          <p:cNvPr id="9" name="Shape 6"/>
+          <p:cNvSpPr/>
+          <p:nvPr/>
+        </p:nvSpPr>
+        <p:spPr>
+          <a:xfrm>
+            <a:off x="640080" y="2651760"/>
+            <a:ext cx="5943600" cy="10973"/>
           </a:xfrm>
           <a:prstGeom prst="rect">
             <a:avLst/>
           </a:prstGeom>
           <a:solidFill>
-            <a:srgbClr val="E8DCDB"/>
+            <a:srgbClr val="E8D8BC"/>
           </a:solidFill>
           <a:ln/>
         </p:spPr>
       </p:sp>
       <p:sp>
         <p:nvSpPr>
-          <p:cNvPr id="8" name="Text 6"/>
-          <p:cNvSpPr/>
-          <p:nvPr/>
-        </p:nvSpPr>
-        <p:spPr>
-          <a:xfrm>
-            <a:off x="566928" y="2852928"/>
-            <a:ext cx="8046720" cy="694944"/>
+          <p:cNvPr id="10" name="Text 7"/>
+          <p:cNvSpPr/>
+          <p:nvPr/>
+        </p:nvSpPr>
+        <p:spPr>
+          <a:xfrm>
+            <a:off x="640080" y="2834640"/>
+            <a:ext cx="6035040" cy="768096"/>
           </a:xfrm>
           <a:prstGeom prst="rect">
             <a:avLst/>
@@ -4725,14 +5407,14 @@
           <a:p>
             <a:pPr indent="0" marL="0">
               <a:lnSpc>
-                <a:spcPts val="3200"/>
+                <a:spcPts val="3100"/>
               </a:lnSpc>
               <a:buNone/>
             </a:pPr>
             <a:r>
-              <a:rPr lang="en-US" sz="2100" b="1" spc="60" kern="0" dirty="0">
-                <a:solidFill>
-                  <a:srgbClr val="2B2224"/>
+              <a:rPr lang="en-US" sz="2000" b="1" spc="80" kern="0" dirty="0">
+                <a:solidFill>
+                  <a:srgbClr val="3F2E33"/>
                 </a:solidFill>
                 <a:latin typeface="Yu Mincho" pitchFamily="34" charset="0"/>
                 <a:ea typeface="Yu Mincho" pitchFamily="34" charset="-122"/>
@@ -4740,19 +5422,19 @@
               </a:rPr>
               <a:t>所作を整えることは、</a:t>
             </a:r>
-            <a:endParaRPr lang="en-US" sz="2100" dirty="0"/>
+            <a:endParaRPr lang="en-US" sz="2000" dirty="0"/>
           </a:p>
           <a:p>
             <a:pPr indent="0" marL="0">
               <a:lnSpc>
-                <a:spcPts val="3200"/>
+                <a:spcPts val="3100"/>
               </a:lnSpc>
               <a:buNone/>
             </a:pPr>
             <a:r>
-              <a:rPr lang="en-US" sz="2100" b="1" spc="60" kern="0" dirty="0">
-                <a:solidFill>
-                  <a:srgbClr val="2B2224"/>
+              <a:rPr lang="en-US" sz="2000" b="1" spc="80" kern="0" dirty="0">
+                <a:solidFill>
+                  <a:srgbClr val="3F2E33"/>
                 </a:solidFill>
                 <a:latin typeface="Yu Mincho" pitchFamily="34" charset="0"/>
                 <a:ea typeface="Yu Mincho" pitchFamily="34" charset="-122"/>
@@ -4760,38 +5442,38 @@
               </a:rPr>
               <a:t>自分を丁寧に扱うこと。</a:t>
             </a:r>
-            <a:endParaRPr lang="en-US" sz="2100" dirty="0"/>
-          </a:p>
-        </p:txBody>
-      </p:sp>
-      <p:sp>
-        <p:nvSpPr>
-          <p:cNvPr id="9" name="Text 7"/>
-          <p:cNvSpPr/>
-          <p:nvPr/>
-        </p:nvSpPr>
-        <p:spPr>
-          <a:xfrm>
-            <a:off x="566928" y="3712464"/>
-            <a:ext cx="8046720" cy="292608"/>
-          </a:xfrm>
-          <a:prstGeom prst="rect">
-            <a:avLst/>
-          </a:prstGeom>
-          <a:noFill/>
-          <a:ln/>
-        </p:spPr>
-        <p:txBody>
-          <a:bodyPr wrap="square" rtlCol="0" anchor="ctr"/>
-          <a:lstStyle/>
-          <a:p>
-            <a:pPr indent="0" marL="0">
-              <a:buNone/>
-            </a:pPr>
-            <a:r>
-              <a:rPr lang="en-US" sz="1300" spc="40" kern="0" dirty="0">
-                <a:solidFill>
-                  <a:srgbClr val="7A6E6B"/>
+            <a:endParaRPr lang="en-US" sz="2000" dirty="0"/>
+          </a:p>
+        </p:txBody>
+      </p:sp>
+      <p:sp>
+        <p:nvSpPr>
+          <p:cNvPr id="11" name="Text 8"/>
+          <p:cNvSpPr/>
+          <p:nvPr/>
+        </p:nvSpPr>
+        <p:spPr>
+          <a:xfrm>
+            <a:off x="640080" y="3712464"/>
+            <a:ext cx="6035040" cy="292608"/>
+          </a:xfrm>
+          <a:prstGeom prst="rect">
+            <a:avLst/>
+          </a:prstGeom>
+          <a:noFill/>
+          <a:ln/>
+        </p:spPr>
+        <p:txBody>
+          <a:bodyPr wrap="square" rtlCol="0" anchor="ctr"/>
+          <a:lstStyle/>
+          <a:p>
+            <a:pPr indent="0" marL="0">
+              <a:buNone/>
+            </a:pPr>
+            <a:r>
+              <a:rPr lang="en-US" sz="1200" spc="40" kern="0" dirty="0">
+                <a:solidFill>
+                  <a:srgbClr val="8C757C"/>
                 </a:solidFill>
                 <a:latin typeface="Yu Gothic" pitchFamily="34" charset="0"/>
                 <a:ea typeface="Yu Gothic" pitchFamily="34" charset="-122"/>
@@ -4799,20 +5481,40 @@
               </a:rPr>
               <a:t>マナーは、正しく見せるためだけのものではありません。</a:t>
             </a:r>
-            <a:endParaRPr lang="en-US" sz="1300" dirty="0"/>
-          </a:p>
-        </p:txBody>
-      </p:sp>
-      <p:sp>
-        <p:nvSpPr>
-          <p:cNvPr id="10" name="Text 8"/>
-          <p:cNvSpPr/>
-          <p:nvPr/>
-        </p:nvSpPr>
-        <p:spPr>
-          <a:xfrm>
-            <a:off x="566928" y="4681728"/>
-            <a:ext cx="4114800" cy="237744"/>
+            <a:endParaRPr lang="en-US" sz="1200" dirty="0"/>
+          </a:p>
+        </p:txBody>
+      </p:sp>
+      <p:sp>
+        <p:nvSpPr>
+          <p:cNvPr id="12" name="Shape 9"/>
+          <p:cNvSpPr/>
+          <p:nvPr/>
+        </p:nvSpPr>
+        <p:spPr>
+          <a:xfrm>
+            <a:off x="640080" y="4590288"/>
+            <a:ext cx="7863840" cy="10973"/>
+          </a:xfrm>
+          <a:prstGeom prst="rect">
+            <a:avLst/>
+          </a:prstGeom>
+          <a:solidFill>
+            <a:srgbClr val="E8D8BC"/>
+          </a:solidFill>
+          <a:ln/>
+        </p:spPr>
+      </p:sp>
+      <p:sp>
+        <p:nvSpPr>
+          <p:cNvPr id="13" name="Text 10"/>
+          <p:cNvSpPr/>
+          <p:nvPr/>
+        </p:nvSpPr>
+        <p:spPr>
+          <a:xfrm>
+            <a:off x="640080" y="4681728"/>
+            <a:ext cx="4572000" cy="237744"/>
           </a:xfrm>
           <a:prstGeom prst="rect">
             <a:avLst/>
@@ -4830,7 +5532,7 @@
             <a:r>
               <a:rPr lang="en-US" sz="850" spc="40" kern="0" dirty="0">
                 <a:solidFill>
-                  <a:srgbClr val="7A6E6B"/>
+                  <a:srgbClr val="8C757C"/>
                 </a:solidFill>
                 <a:latin typeface="Yu Gothic" pitchFamily="34" charset="0"/>
                 <a:ea typeface="Yu Gothic" pitchFamily="34" charset="-122"/>
@@ -4844,13 +5546,13 @@
       </p:sp>
       <p:sp>
         <p:nvSpPr>
-          <p:cNvPr id="11" name="Text 9"/>
-          <p:cNvSpPr/>
-          <p:nvPr/>
-        </p:nvSpPr>
-        <p:spPr>
-          <a:xfrm>
-            <a:off x="8138160" y="4681728"/>
+          <p:cNvPr id="14" name="Text 11"/>
+          <p:cNvSpPr/>
+          <p:nvPr/>
+        </p:nvSpPr>
+        <p:spPr>
+          <a:xfrm>
+            <a:off x="8046720" y="4681728"/>
             <a:ext cx="457200" cy="237744"/>
           </a:xfrm>
           <a:prstGeom prst="rect">
@@ -4869,7 +5571,7 @@
             <a:r>
               <a:rPr lang="en-US" sz="850" spc="40" kern="0" dirty="0">
                 <a:solidFill>
-                  <a:srgbClr val="7A6E6B"/>
+                  <a:srgbClr val="8C757C"/>
                 </a:solidFill>
                 <a:latin typeface="Yu Gothic" pitchFamily="34" charset="0"/>
                 <a:ea typeface="Yu Gothic" pitchFamily="34" charset="-122"/>
@@ -4895,7 +5597,7 @@
     <p:bg>
       <p:bgPr>
         <a:solidFill>
-          <a:srgbClr val="FDF7F7"/>
+          <a:srgbClr val="FDF5F6"/>
         </a:solidFill>
       </p:bgPr>
     </p:bg>
@@ -4921,26 +5623,26 @@
         </p:nvSpPr>
         <p:spPr>
           <a:xfrm>
-            <a:off x="566928" y="384048"/>
-            <a:ext cx="8046720" cy="237744"/>
-          </a:xfrm>
-          <a:prstGeom prst="rect">
-            <a:avLst/>
-          </a:prstGeom>
-          <a:noFill/>
-          <a:ln/>
-        </p:spPr>
-        <p:txBody>
-          <a:bodyPr wrap="square" rtlCol="0" anchor="ctr"/>
-          <a:lstStyle/>
-          <a:p>
-            <a:pPr indent="0" marL="0">
-              <a:buNone/>
-            </a:pPr>
-            <a:r>
-              <a:rPr lang="en-US" sz="1000" b="1" spc="160" kern="0" dirty="0">
-                <a:solidFill>
-                  <a:srgbClr val="7A1524"/>
+            <a:off x="640080" y="420624"/>
+            <a:ext cx="7863840" cy="237744"/>
+          </a:xfrm>
+          <a:prstGeom prst="rect">
+            <a:avLst/>
+          </a:prstGeom>
+          <a:noFill/>
+          <a:ln/>
+        </p:spPr>
+        <p:txBody>
+          <a:bodyPr wrap="square" rtlCol="0" anchor="ctr"/>
+          <a:lstStyle/>
+          <a:p>
+            <a:pPr indent="0" marL="0">
+              <a:buNone/>
+            </a:pPr>
+            <a:r>
+              <a:rPr lang="en-US" sz="950" b="1" spc="200" kern="0" dirty="0">
+                <a:solidFill>
+                  <a:srgbClr val="C4A06A"/>
                 </a:solidFill>
                 <a:latin typeface="Yu Gothic" pitchFamily="34" charset="0"/>
                 <a:ea typeface="Yu Gothic" pitchFamily="34" charset="-122"/>
@@ -4948,7 +5650,7 @@
               </a:rPr>
               <a:t>HELLO</a:t>
             </a:r>
-            <a:endParaRPr lang="en-US" sz="1000" dirty="0"/>
+            <a:endParaRPr lang="en-US" sz="950" dirty="0"/>
           </a:p>
         </p:txBody>
       </p:sp>
@@ -4960,16 +5662,23 @@
         </p:nvSpPr>
         <p:spPr>
           <a:xfrm>
-            <a:off x="566928" y="667512"/>
-            <a:ext cx="457200" cy="32004"/>
-          </a:xfrm>
-          <a:prstGeom prst="rect">
-            <a:avLst/>
+            <a:off x="640080" y="822960"/>
+            <a:ext cx="3657600" cy="274320"/>
+          </a:xfrm>
+          <a:prstGeom prst="roundRect">
+            <a:avLst>
+              <a:gd name="adj" fmla="val 166667"/>
+            </a:avLst>
           </a:prstGeom>
           <a:solidFill>
-            <a:srgbClr val="7A1524"/>
+            <a:srgbClr val="F7DCE3"/>
           </a:solidFill>
-          <a:ln/>
+          <a:ln w="12700">
+            <a:solidFill>
+              <a:srgbClr val="F7DCE3"/>
+            </a:solidFill>
+            <a:prstDash val="solid"/>
+          </a:ln>
         </p:spPr>
       </p:sp>
       <p:sp>
@@ -4980,8 +5689,8 @@
         </p:nvSpPr>
         <p:spPr>
           <a:xfrm>
-            <a:off x="566928" y="822960"/>
-            <a:ext cx="8046720" cy="1005840"/>
+            <a:off x="640080" y="676656"/>
+            <a:ext cx="7863840" cy="960120"/>
           </a:xfrm>
           <a:prstGeom prst="rect">
             <a:avLst/>
@@ -4995,14 +5704,14 @@
           <a:p>
             <a:pPr indent="0" marL="0">
               <a:lnSpc>
-                <a:spcPts val="4000"/>
+                <a:spcPts val="3800"/>
               </a:lnSpc>
               <a:buNone/>
             </a:pPr>
             <a:r>
-              <a:rPr lang="en-US" sz="2700" b="1" spc="60" kern="0" dirty="0">
-                <a:solidFill>
-                  <a:srgbClr val="2B2224"/>
+              <a:rPr lang="en-US" sz="2600" b="1" spc="80" kern="0" dirty="0">
+                <a:solidFill>
+                  <a:srgbClr val="A42647"/>
                 </a:solidFill>
                 <a:latin typeface="Yu Mincho" pitchFamily="34" charset="0"/>
                 <a:ea typeface="Yu Mincho" pitchFamily="34" charset="-122"/>
@@ -5010,27 +5719,27 @@
               </a:rPr>
               <a:t>まず、少しだけ</a:t>
             </a:r>
-            <a:endParaRPr lang="en-US" sz="2700" dirty="0"/>
+            <a:endParaRPr lang="en-US" sz="2600" dirty="0"/>
           </a:p>
           <a:p>
             <a:pPr indent="0" marL="0">
               <a:lnSpc>
-                <a:spcPts val="4000"/>
+                <a:spcPts val="3800"/>
               </a:lnSpc>
               <a:buNone/>
             </a:pPr>
             <a:r>
-              <a:rPr lang="en-US" sz="2700" b="1" spc="60" kern="0" dirty="0">
-                <a:solidFill>
-                  <a:srgbClr val="2B2224"/>
+              <a:rPr lang="en-US" sz="2600" b="1" spc="80" kern="0" dirty="0">
+                <a:solidFill>
+                  <a:srgbClr val="A42647"/>
                 </a:solidFill>
                 <a:latin typeface="Yu Mincho" pitchFamily="34" charset="0"/>
                 <a:ea typeface="Yu Mincho" pitchFamily="34" charset="-122"/>
                 <a:cs typeface="Yu Mincho" pitchFamily="34" charset="-120"/>
               </a:rPr>
-              <a:t>お互いを知りましょう</a:t>
-            </a:r>
-            <a:endParaRPr lang="en-US" sz="2700" dirty="0"/>
+              <a:t>お互いを知りましょう　♡</a:t>
+            </a:r>
+            <a:endParaRPr lang="en-US" sz="2600" dirty="0"/>
           </a:p>
         </p:txBody>
       </p:sp>
@@ -5042,14 +5751,14 @@
         </p:nvSpPr>
         <p:spPr>
           <a:xfrm>
-            <a:off x="640080" y="2203704"/>
-            <a:ext cx="82296" cy="82296"/>
+            <a:off x="713232" y="2167128"/>
+            <a:ext cx="192024" cy="192024"/>
           </a:xfrm>
           <a:prstGeom prst="ellipse">
             <a:avLst/>
           </a:prstGeom>
           <a:solidFill>
-            <a:srgbClr val="7A1524"/>
+            <a:srgbClr val="C9325C"/>
           </a:solidFill>
           <a:ln/>
         </p:spPr>
@@ -5062,70 +5771,47 @@
         </p:nvSpPr>
         <p:spPr>
           <a:xfrm>
-            <a:off x="896112" y="2084832"/>
-            <a:ext cx="7589520" cy="530352"/>
-          </a:xfrm>
-          <a:prstGeom prst="rect">
-            <a:avLst/>
-          </a:prstGeom>
-          <a:noFill/>
-          <a:ln/>
-        </p:spPr>
-        <p:txBody>
-          <a:bodyPr wrap="square" rtlCol="0" anchor="ctr"/>
-          <a:lstStyle/>
-          <a:p>
-            <a:pPr indent="0" marL="0">
-              <a:lnSpc>
-                <a:spcPts val="2400"/>
-              </a:lnSpc>
-              <a:buNone/>
-            </a:pPr>
-            <a:r>
-              <a:rPr lang="en-US" sz="1600" spc="40" kern="0" dirty="0">
-                <a:solidFill>
-                  <a:srgbClr val="2B2224"/>
+            <a:off x="713232" y="2167128"/>
+            <a:ext cx="192024" cy="192024"/>
+          </a:xfrm>
+          <a:prstGeom prst="rect">
+            <a:avLst/>
+          </a:prstGeom>
+          <a:noFill/>
+          <a:ln/>
+        </p:spPr>
+        <p:txBody>
+          <a:bodyPr wrap="square" rtlCol="0" anchor="ctr"/>
+          <a:lstStyle/>
+          <a:p>
+            <a:pPr algn="ctr" indent="0" marL="0">
+              <a:buNone/>
+            </a:pPr>
+            <a:r>
+              <a:rPr lang="en-US" sz="900" b="1" spc="40" kern="0" dirty="0">
+                <a:solidFill>
+                  <a:srgbClr val="FFFFFF"/>
                 </a:solidFill>
                 <a:latin typeface="Yu Gothic" pitchFamily="34" charset="0"/>
                 <a:ea typeface="Yu Gothic" pitchFamily="34" charset="-122"/>
                 <a:cs typeface="Yu Gothic" pitchFamily="34" charset="-120"/>
               </a:rPr>
-              <a:t>お名前</a:t>
-            </a:r>
-            <a:endParaRPr lang="en-US" sz="1600" dirty="0"/>
-          </a:p>
-        </p:txBody>
-      </p:sp>
-      <p:sp>
-        <p:nvSpPr>
-          <p:cNvPr id="7" name="Shape 5"/>
-          <p:cNvSpPr/>
-          <p:nvPr/>
-        </p:nvSpPr>
-        <p:spPr>
-          <a:xfrm>
-            <a:off x="640080" y="2734056"/>
-            <a:ext cx="82296" cy="82296"/>
-          </a:xfrm>
-          <a:prstGeom prst="ellipse">
-            <a:avLst/>
-          </a:prstGeom>
-          <a:solidFill>
-            <a:srgbClr val="7A1524"/>
-          </a:solidFill>
-          <a:ln/>
-        </p:spPr>
-      </p:sp>
-      <p:sp>
-        <p:nvSpPr>
-          <p:cNvPr id="8" name="Text 6"/>
-          <p:cNvSpPr/>
-          <p:nvPr/>
-        </p:nvSpPr>
-        <p:spPr>
-          <a:xfrm>
-            <a:off x="896112" y="2615184"/>
-            <a:ext cx="7589520" cy="530352"/>
+              <a:t>✓</a:t>
+            </a:r>
+            <a:endParaRPr lang="en-US" sz="900" dirty="0"/>
+          </a:p>
+        </p:txBody>
+      </p:sp>
+      <p:sp>
+        <p:nvSpPr>
+          <p:cNvPr id="7" name="Text 5"/>
+          <p:cNvSpPr/>
+          <p:nvPr/>
+        </p:nvSpPr>
+        <p:spPr>
+          <a:xfrm>
+            <a:off x="1024128" y="2103120"/>
+            <a:ext cx="7406640" cy="512064"/>
           </a:xfrm>
           <a:prstGeom prst="rect">
             <a:avLst/>
@@ -5139,109 +5825,249 @@
           <a:p>
             <a:pPr indent="0" marL="0">
               <a:lnSpc>
-                <a:spcPts val="2400"/>
+                <a:spcPts val="2200"/>
               </a:lnSpc>
               <a:buNone/>
             </a:pPr>
             <a:r>
-              <a:rPr lang="en-US" sz="1600" spc="40" kern="0" dirty="0">
-                <a:solidFill>
-                  <a:srgbClr val="2B2224"/>
+              <a:rPr lang="en-US" sz="1550" spc="40" kern="0" dirty="0">
+                <a:solidFill>
+                  <a:srgbClr val="3F2E33"/>
                 </a:solidFill>
                 <a:latin typeface="Yu Gothic" pitchFamily="34" charset="0"/>
                 <a:ea typeface="Yu Gothic" pitchFamily="34" charset="-122"/>
                 <a:cs typeface="Yu Gothic" pitchFamily="34" charset="-120"/>
               </a:rPr>
-              <a:t>普段、どんなことをしていますか？</a:t>
-            </a:r>
-            <a:endParaRPr lang="en-US" sz="1600" dirty="0"/>
-          </a:p>
-        </p:txBody>
-      </p:sp>
-      <p:sp>
-        <p:nvSpPr>
-          <p:cNvPr id="9" name="Shape 7"/>
-          <p:cNvSpPr/>
-          <p:nvPr/>
-        </p:nvSpPr>
-        <p:spPr>
-          <a:xfrm>
-            <a:off x="640080" y="3264408"/>
-            <a:ext cx="82296" cy="82296"/>
+              <a:t>お名前</a:t>
+            </a:r>
+            <a:endParaRPr lang="en-US" sz="1550" dirty="0"/>
+          </a:p>
+        </p:txBody>
+      </p:sp>
+      <p:sp>
+        <p:nvSpPr>
+          <p:cNvPr id="8" name="Shape 6"/>
+          <p:cNvSpPr/>
+          <p:nvPr/>
+        </p:nvSpPr>
+        <p:spPr>
+          <a:xfrm>
+            <a:off x="713232" y="2679192"/>
+            <a:ext cx="192024" cy="192024"/>
           </a:xfrm>
           <a:prstGeom prst="ellipse">
             <a:avLst/>
           </a:prstGeom>
           <a:solidFill>
-            <a:srgbClr val="7A1524"/>
+            <a:srgbClr val="C4A06A"/>
           </a:solidFill>
           <a:ln/>
         </p:spPr>
       </p:sp>
       <p:sp>
         <p:nvSpPr>
-          <p:cNvPr id="10" name="Text 8"/>
-          <p:cNvSpPr/>
-          <p:nvPr/>
-        </p:nvSpPr>
-        <p:spPr>
-          <a:xfrm>
-            <a:off x="896112" y="3145536"/>
-            <a:ext cx="7589520" cy="530352"/>
-          </a:xfrm>
-          <a:prstGeom prst="rect">
-            <a:avLst/>
-          </a:prstGeom>
-          <a:noFill/>
-          <a:ln/>
-        </p:spPr>
-        <p:txBody>
-          <a:bodyPr wrap="square" rtlCol="0" anchor="ctr"/>
-          <a:lstStyle/>
-          <a:p>
-            <a:pPr indent="0" marL="0">
-              <a:lnSpc>
-                <a:spcPts val="2400"/>
-              </a:lnSpc>
-              <a:buNone/>
-            </a:pPr>
-            <a:r>
-              <a:rPr lang="en-US" sz="1600" spc="40" kern="0" dirty="0">
-                <a:solidFill>
-                  <a:srgbClr val="2B2224"/>
+          <p:cNvPr id="9" name="Text 7"/>
+          <p:cNvSpPr/>
+          <p:nvPr/>
+        </p:nvSpPr>
+        <p:spPr>
+          <a:xfrm>
+            <a:off x="713232" y="2679192"/>
+            <a:ext cx="192024" cy="192024"/>
+          </a:xfrm>
+          <a:prstGeom prst="rect">
+            <a:avLst/>
+          </a:prstGeom>
+          <a:noFill/>
+          <a:ln/>
+        </p:spPr>
+        <p:txBody>
+          <a:bodyPr wrap="square" rtlCol="0" anchor="ctr"/>
+          <a:lstStyle/>
+          <a:p>
+            <a:pPr algn="ctr" indent="0" marL="0">
+              <a:buNone/>
+            </a:pPr>
+            <a:r>
+              <a:rPr lang="en-US" sz="900" b="1" spc="40" kern="0" dirty="0">
+                <a:solidFill>
+                  <a:srgbClr val="FFFFFF"/>
                 </a:solidFill>
                 <a:latin typeface="Yu Gothic" pitchFamily="34" charset="0"/>
                 <a:ea typeface="Yu Gothic" pitchFamily="34" charset="-122"/>
                 <a:cs typeface="Yu Gothic" pitchFamily="34" charset="-120"/>
               </a:rPr>
+              <a:t>✓</a:t>
+            </a:r>
+            <a:endParaRPr lang="en-US" sz="900" dirty="0"/>
+          </a:p>
+        </p:txBody>
+      </p:sp>
+      <p:sp>
+        <p:nvSpPr>
+          <p:cNvPr id="10" name="Text 8"/>
+          <p:cNvSpPr/>
+          <p:nvPr/>
+        </p:nvSpPr>
+        <p:spPr>
+          <a:xfrm>
+            <a:off x="1024128" y="2615184"/>
+            <a:ext cx="7406640" cy="512064"/>
+          </a:xfrm>
+          <a:prstGeom prst="rect">
+            <a:avLst/>
+          </a:prstGeom>
+          <a:noFill/>
+          <a:ln/>
+        </p:spPr>
+        <p:txBody>
+          <a:bodyPr wrap="square" rtlCol="0" anchor="ctr"/>
+          <a:lstStyle/>
+          <a:p>
+            <a:pPr indent="0" marL="0">
+              <a:lnSpc>
+                <a:spcPts val="2200"/>
+              </a:lnSpc>
+              <a:buNone/>
+            </a:pPr>
+            <a:r>
+              <a:rPr lang="en-US" sz="1550" spc="40" kern="0" dirty="0">
+                <a:solidFill>
+                  <a:srgbClr val="3F2E33"/>
+                </a:solidFill>
+                <a:latin typeface="Yu Gothic" pitchFamily="34" charset="0"/>
+                <a:ea typeface="Yu Gothic" pitchFamily="34" charset="-122"/>
+                <a:cs typeface="Yu Gothic" pitchFamily="34" charset="-120"/>
+              </a:rPr>
+              <a:t>普段、どんなことをしていますか？</a:t>
+            </a:r>
+            <a:endParaRPr lang="en-US" sz="1550" dirty="0"/>
+          </a:p>
+        </p:txBody>
+      </p:sp>
+      <p:sp>
+        <p:nvSpPr>
+          <p:cNvPr id="11" name="Shape 9"/>
+          <p:cNvSpPr/>
+          <p:nvPr/>
+        </p:nvSpPr>
+        <p:spPr>
+          <a:xfrm>
+            <a:off x="713232" y="3191256"/>
+            <a:ext cx="192024" cy="192024"/>
+          </a:xfrm>
+          <a:prstGeom prst="ellipse">
+            <a:avLst/>
+          </a:prstGeom>
+          <a:solidFill>
+            <a:srgbClr val="C9325C"/>
+          </a:solidFill>
+          <a:ln/>
+        </p:spPr>
+      </p:sp>
+      <p:sp>
+        <p:nvSpPr>
+          <p:cNvPr id="12" name="Text 10"/>
+          <p:cNvSpPr/>
+          <p:nvPr/>
+        </p:nvSpPr>
+        <p:spPr>
+          <a:xfrm>
+            <a:off x="713232" y="3191256"/>
+            <a:ext cx="192024" cy="192024"/>
+          </a:xfrm>
+          <a:prstGeom prst="rect">
+            <a:avLst/>
+          </a:prstGeom>
+          <a:noFill/>
+          <a:ln/>
+        </p:spPr>
+        <p:txBody>
+          <a:bodyPr wrap="square" rtlCol="0" anchor="ctr"/>
+          <a:lstStyle/>
+          <a:p>
+            <a:pPr algn="ctr" indent="0" marL="0">
+              <a:buNone/>
+            </a:pPr>
+            <a:r>
+              <a:rPr lang="en-US" sz="900" b="1" spc="40" kern="0" dirty="0">
+                <a:solidFill>
+                  <a:srgbClr val="FFFFFF"/>
+                </a:solidFill>
+                <a:latin typeface="Yu Gothic" pitchFamily="34" charset="0"/>
+                <a:ea typeface="Yu Gothic" pitchFamily="34" charset="-122"/>
+                <a:cs typeface="Yu Gothic" pitchFamily="34" charset="-120"/>
+              </a:rPr>
+              <a:t>✓</a:t>
+            </a:r>
+            <a:endParaRPr lang="en-US" sz="900" dirty="0"/>
+          </a:p>
+        </p:txBody>
+      </p:sp>
+      <p:sp>
+        <p:nvSpPr>
+          <p:cNvPr id="13" name="Text 11"/>
+          <p:cNvSpPr/>
+          <p:nvPr/>
+        </p:nvSpPr>
+        <p:spPr>
+          <a:xfrm>
+            <a:off x="1024128" y="3127248"/>
+            <a:ext cx="7406640" cy="512064"/>
+          </a:xfrm>
+          <a:prstGeom prst="rect">
+            <a:avLst/>
+          </a:prstGeom>
+          <a:noFill/>
+          <a:ln/>
+        </p:spPr>
+        <p:txBody>
+          <a:bodyPr wrap="square" rtlCol="0" anchor="ctr"/>
+          <a:lstStyle/>
+          <a:p>
+            <a:pPr indent="0" marL="0">
+              <a:lnSpc>
+                <a:spcPts val="2200"/>
+              </a:lnSpc>
+              <a:buNone/>
+            </a:pPr>
+            <a:r>
+              <a:rPr lang="en-US" sz="1550" spc="40" kern="0" dirty="0">
+                <a:solidFill>
+                  <a:srgbClr val="3F2E33"/>
+                </a:solidFill>
+                <a:latin typeface="Yu Gothic" pitchFamily="34" charset="0"/>
+                <a:ea typeface="Yu Gothic" pitchFamily="34" charset="-122"/>
+                <a:cs typeface="Yu Gothic" pitchFamily="34" charset="-120"/>
+              </a:rPr>
               <a:t>この5DAYSで、ちょっと楽しみにしていること</a:t>
             </a:r>
-            <a:endParaRPr lang="en-US" sz="1600" dirty="0"/>
-          </a:p>
-        </p:txBody>
-      </p:sp>
-      <p:sp>
-        <p:nvSpPr>
-          <p:cNvPr id="11" name="Shape 9"/>
-          <p:cNvSpPr/>
-          <p:nvPr/>
-        </p:nvSpPr>
-        <p:spPr>
-          <a:xfrm>
-            <a:off x="566928" y="3785616"/>
-            <a:ext cx="8010144" cy="676656"/>
+            <a:endParaRPr lang="en-US" sz="1550" dirty="0"/>
+          </a:p>
+        </p:txBody>
+      </p:sp>
+      <p:sp>
+        <p:nvSpPr>
+          <p:cNvPr id="14" name="Shape 12"/>
+          <p:cNvSpPr/>
+          <p:nvPr/>
+        </p:nvSpPr>
+        <p:spPr>
+          <a:xfrm>
+            <a:off x="640080" y="3785616"/>
+            <a:ext cx="7863840" cy="640080"/>
           </a:xfrm>
           <a:prstGeom prst="roundRect">
             <a:avLst>
-              <a:gd name="adj" fmla="val 8108"/>
+              <a:gd name="adj" fmla="val 12857"/>
             </a:avLst>
           </a:prstGeom>
           <a:solidFill>
-            <a:srgbClr val="FBEFEF"/>
+            <a:srgbClr val="FCEEF2"/>
           </a:solidFill>
           <a:ln w="10160">
             <a:solidFill>
-              <a:srgbClr val="F0DCDC"/>
+              <a:srgbClr val="E8A0B4"/>
             </a:solidFill>
             <a:prstDash val="solid"/>
           </a:ln>
@@ -5249,32 +6075,32 @@
       </p:sp>
       <p:sp>
         <p:nvSpPr>
-          <p:cNvPr id="12" name="Text 10"/>
-          <p:cNvSpPr/>
-          <p:nvPr/>
-        </p:nvSpPr>
-        <p:spPr>
-          <a:xfrm>
-            <a:off x="822960" y="3931920"/>
-            <a:ext cx="7498080" cy="384048"/>
-          </a:xfrm>
-          <a:prstGeom prst="rect">
-            <a:avLst/>
-          </a:prstGeom>
-          <a:noFill/>
-          <a:ln/>
-        </p:spPr>
-        <p:txBody>
-          <a:bodyPr wrap="square" rtlCol="0" anchor="ctr"/>
-          <a:lstStyle/>
-          <a:p>
-            <a:pPr indent="0" marL="0">
-              <a:buNone/>
-            </a:pPr>
-            <a:r>
-              <a:rPr lang="en-US" sz="1300" b="1" spc="40" kern="0" dirty="0">
-                <a:solidFill>
-                  <a:srgbClr val="7A1524"/>
+          <p:cNvPr id="15" name="Text 13"/>
+          <p:cNvSpPr/>
+          <p:nvPr/>
+        </p:nvSpPr>
+        <p:spPr>
+          <a:xfrm>
+            <a:off x="868680" y="3785616"/>
+            <a:ext cx="7406640" cy="640080"/>
+          </a:xfrm>
+          <a:prstGeom prst="rect">
+            <a:avLst/>
+          </a:prstGeom>
+          <a:noFill/>
+          <a:ln/>
+        </p:spPr>
+        <p:txBody>
+          <a:bodyPr wrap="square" rtlCol="0" anchor="ctr"/>
+          <a:lstStyle/>
+          <a:p>
+            <a:pPr indent="0" marL="0">
+              <a:buNone/>
+            </a:pPr>
+            <a:r>
+              <a:rPr lang="en-US" sz="1250" b="1" spc="40" kern="0" dirty="0">
+                <a:solidFill>
+                  <a:srgbClr val="A42647"/>
                 </a:solidFill>
                 <a:latin typeface="Yu Gothic" pitchFamily="34" charset="0"/>
                 <a:ea typeface="Yu Gothic" pitchFamily="34" charset="-122"/>
@@ -5282,20 +6108,40 @@
               </a:rPr>
               <a:t>30秒くらいで大丈夫です。　話したくないことは、話さなくて大丈夫です。</a:t>
             </a:r>
-            <a:endParaRPr lang="en-US" sz="1300" dirty="0"/>
-          </a:p>
-        </p:txBody>
-      </p:sp>
-      <p:sp>
-        <p:nvSpPr>
-          <p:cNvPr id="13" name="Text 11"/>
-          <p:cNvSpPr/>
-          <p:nvPr/>
-        </p:nvSpPr>
-        <p:spPr>
-          <a:xfrm>
-            <a:off x="566928" y="4681728"/>
-            <a:ext cx="4114800" cy="237744"/>
+            <a:endParaRPr lang="en-US" sz="1250" dirty="0"/>
+          </a:p>
+        </p:txBody>
+      </p:sp>
+      <p:sp>
+        <p:nvSpPr>
+          <p:cNvPr id="16" name="Shape 14"/>
+          <p:cNvSpPr/>
+          <p:nvPr/>
+        </p:nvSpPr>
+        <p:spPr>
+          <a:xfrm>
+            <a:off x="640080" y="4590288"/>
+            <a:ext cx="7863840" cy="10973"/>
+          </a:xfrm>
+          <a:prstGeom prst="rect">
+            <a:avLst/>
+          </a:prstGeom>
+          <a:solidFill>
+            <a:srgbClr val="E8D8BC"/>
+          </a:solidFill>
+          <a:ln/>
+        </p:spPr>
+      </p:sp>
+      <p:sp>
+        <p:nvSpPr>
+          <p:cNvPr id="17" name="Text 15"/>
+          <p:cNvSpPr/>
+          <p:nvPr/>
+        </p:nvSpPr>
+        <p:spPr>
+          <a:xfrm>
+            <a:off x="640080" y="4681728"/>
+            <a:ext cx="4572000" cy="237744"/>
           </a:xfrm>
           <a:prstGeom prst="rect">
             <a:avLst/>
@@ -5313,7 +6159,7 @@
             <a:r>
               <a:rPr lang="en-US" sz="850" spc="40" kern="0" dirty="0">
                 <a:solidFill>
-                  <a:srgbClr val="7A6E6B"/>
+                  <a:srgbClr val="8C757C"/>
                 </a:solidFill>
                 <a:latin typeface="Yu Gothic" pitchFamily="34" charset="0"/>
                 <a:ea typeface="Yu Gothic" pitchFamily="34" charset="-122"/>
@@ -5327,13 +6173,13 @@
       </p:sp>
       <p:sp>
         <p:nvSpPr>
-          <p:cNvPr id="14" name="Text 12"/>
-          <p:cNvSpPr/>
-          <p:nvPr/>
-        </p:nvSpPr>
-        <p:spPr>
-          <a:xfrm>
-            <a:off x="8138160" y="4681728"/>
+          <p:cNvPr id="18" name="Text 16"/>
+          <p:cNvSpPr/>
+          <p:nvPr/>
+        </p:nvSpPr>
+        <p:spPr>
+          <a:xfrm>
+            <a:off x="8046720" y="4681728"/>
             <a:ext cx="457200" cy="237744"/>
           </a:xfrm>
           <a:prstGeom prst="rect">
@@ -5352,7 +6198,7 @@
             <a:r>
               <a:rPr lang="en-US" sz="850" spc="40" kern="0" dirty="0">
                 <a:solidFill>
-                  <a:srgbClr val="7A6E6B"/>
+                  <a:srgbClr val="8C757C"/>
                 </a:solidFill>
                 <a:latin typeface="Yu Gothic" pitchFamily="34" charset="0"/>
                 <a:ea typeface="Yu Gothic" pitchFamily="34" charset="-122"/>
@@ -5378,7 +6224,7 @@
     <p:bg>
       <p:bgPr>
         <a:solidFill>
-          <a:srgbClr val="FDF7F7"/>
+          <a:srgbClr val="FDF5F6"/>
         </a:solidFill>
       </p:bgPr>
     </p:bg>
@@ -5404,34 +6250,34 @@
         </p:nvSpPr>
         <p:spPr>
           <a:xfrm>
-            <a:off x="566928" y="384048"/>
-            <a:ext cx="8046720" cy="237744"/>
-          </a:xfrm>
-          <a:prstGeom prst="rect">
-            <a:avLst/>
-          </a:prstGeom>
-          <a:noFill/>
-          <a:ln/>
-        </p:spPr>
-        <p:txBody>
-          <a:bodyPr wrap="square" rtlCol="0" anchor="ctr"/>
-          <a:lstStyle/>
-          <a:p>
-            <a:pPr indent="0" marL="0">
-              <a:buNone/>
-            </a:pPr>
-            <a:r>
-              <a:rPr lang="en-US" sz="1000" b="1" spc="160" kern="0" dirty="0">
-                <a:solidFill>
-                  <a:srgbClr val="7A1524"/>
+            <a:off x="640080" y="420624"/>
+            <a:ext cx="7863840" cy="237744"/>
+          </a:xfrm>
+          <a:prstGeom prst="rect">
+            <a:avLst/>
+          </a:prstGeom>
+          <a:noFill/>
+          <a:ln/>
+        </p:spPr>
+        <p:txBody>
+          <a:bodyPr wrap="square" rtlCol="0" anchor="ctr"/>
+          <a:lstStyle/>
+          <a:p>
+            <a:pPr indent="0" marL="0">
+              <a:buNone/>
+            </a:pPr>
+            <a:r>
+              <a:rPr lang="en-US" sz="950" b="1" spc="200" kern="0" dirty="0">
+                <a:solidFill>
+                  <a:srgbClr val="C4A06A"/>
                 </a:solidFill>
                 <a:latin typeface="Yu Gothic" pitchFamily="34" charset="0"/>
                 <a:ea typeface="Yu Gothic" pitchFamily="34" charset="-122"/>
                 <a:cs typeface="Yu Gothic" pitchFamily="34" charset="-120"/>
               </a:rPr>
-              <a:t>QUESTION 01</a:t>
-            </a:r>
-            <a:endParaRPr lang="en-US" sz="1000" dirty="0"/>
+              <a:t>QUESTION  01</a:t>
+            </a:r>
+            <a:endParaRPr lang="en-US" sz="950" dirty="0"/>
           </a:p>
         </p:txBody>
       </p:sp>
@@ -5443,16 +6289,23 @@
         </p:nvSpPr>
         <p:spPr>
           <a:xfrm>
-            <a:off x="566928" y="667512"/>
-            <a:ext cx="457200" cy="32004"/>
-          </a:xfrm>
-          <a:prstGeom prst="rect">
-            <a:avLst/>
+            <a:off x="640080" y="822960"/>
+            <a:ext cx="4023360" cy="274320"/>
+          </a:xfrm>
+          <a:prstGeom prst="roundRect">
+            <a:avLst>
+              <a:gd name="adj" fmla="val 166667"/>
+            </a:avLst>
           </a:prstGeom>
           <a:solidFill>
-            <a:srgbClr val="7A1524"/>
+            <a:srgbClr val="F7DCE3"/>
           </a:solidFill>
-          <a:ln/>
+          <a:ln w="12700">
+            <a:solidFill>
+              <a:srgbClr val="F7DCE3"/>
+            </a:solidFill>
+            <a:prstDash val="solid"/>
+          </a:ln>
         </p:spPr>
       </p:sp>
       <p:sp>
@@ -5463,8 +6316,8 @@
         </p:nvSpPr>
         <p:spPr>
           <a:xfrm>
-            <a:off x="566928" y="822960"/>
-            <a:ext cx="8046720" cy="1005840"/>
+            <a:off x="640080" y="676656"/>
+            <a:ext cx="7863840" cy="960120"/>
           </a:xfrm>
           <a:prstGeom prst="rect">
             <a:avLst/>
@@ -5478,14 +6331,14 @@
           <a:p>
             <a:pPr indent="0" marL="0">
               <a:lnSpc>
-                <a:spcPts val="4000"/>
+                <a:spcPts val="3800"/>
               </a:lnSpc>
               <a:buNone/>
             </a:pPr>
             <a:r>
-              <a:rPr lang="en-US" sz="2600" b="1" spc="60" kern="0" dirty="0">
-                <a:solidFill>
-                  <a:srgbClr val="2B2224"/>
+              <a:rPr lang="en-US" sz="2500" b="1" spc="80" kern="0" dirty="0">
+                <a:solidFill>
+                  <a:srgbClr val="A42647"/>
                 </a:solidFill>
                 <a:latin typeface="Yu Mincho" pitchFamily="34" charset="0"/>
                 <a:ea typeface="Yu Mincho" pitchFamily="34" charset="-122"/>
@@ -5493,19 +6346,19 @@
               </a:rPr>
               <a:t>なぜ、この5DAYSに</a:t>
             </a:r>
-            <a:endParaRPr lang="en-US" sz="2600" dirty="0"/>
+            <a:endParaRPr lang="en-US" sz="2500" dirty="0"/>
           </a:p>
           <a:p>
             <a:pPr indent="0" marL="0">
               <a:lnSpc>
-                <a:spcPts val="4000"/>
+                <a:spcPts val="3800"/>
               </a:lnSpc>
               <a:buNone/>
             </a:pPr>
             <a:r>
-              <a:rPr lang="en-US" sz="2600" b="1" spc="60" kern="0" dirty="0">
-                <a:solidFill>
-                  <a:srgbClr val="2B2224"/>
+              <a:rPr lang="en-US" sz="2500" b="1" spc="80" kern="0" dirty="0">
+                <a:solidFill>
+                  <a:srgbClr val="A42647"/>
                 </a:solidFill>
                 <a:latin typeface="Yu Mincho" pitchFamily="34" charset="0"/>
                 <a:ea typeface="Yu Mincho" pitchFamily="34" charset="-122"/>
@@ -5513,7 +6366,7 @@
               </a:rPr>
               <a:t>参加しようと思いましたか？</a:t>
             </a:r>
-            <a:endParaRPr lang="en-US" sz="2600" dirty="0"/>
+            <a:endParaRPr lang="en-US" sz="2500" dirty="0"/>
           </a:p>
         </p:txBody>
       </p:sp>
@@ -5525,26 +6378,26 @@
         </p:nvSpPr>
         <p:spPr>
           <a:xfrm>
-            <a:off x="566928" y="2066544"/>
-            <a:ext cx="8046720" cy="274320"/>
-          </a:xfrm>
-          <a:prstGeom prst="rect">
-            <a:avLst/>
-          </a:prstGeom>
-          <a:noFill/>
-          <a:ln/>
-        </p:spPr>
-        <p:txBody>
-          <a:bodyPr wrap="square" rtlCol="0" anchor="ctr"/>
-          <a:lstStyle/>
-          <a:p>
-            <a:pPr indent="0" marL="0">
-              <a:buNone/>
-            </a:pPr>
-            <a:r>
-              <a:rPr lang="en-US" sz="1400" spc="40" kern="0" dirty="0">
-                <a:solidFill>
-                  <a:srgbClr val="7A6E6B"/>
+            <a:off x="640080" y="2066544"/>
+            <a:ext cx="7863840" cy="274320"/>
+          </a:xfrm>
+          <a:prstGeom prst="rect">
+            <a:avLst/>
+          </a:prstGeom>
+          <a:noFill/>
+          <a:ln/>
+        </p:spPr>
+        <p:txBody>
+          <a:bodyPr wrap="square" rtlCol="0" anchor="ctr"/>
+          <a:lstStyle/>
+          <a:p>
+            <a:pPr indent="0" marL="0">
+              <a:buNone/>
+            </a:pPr>
+            <a:r>
+              <a:rPr lang="en-US" sz="1350" spc="40" kern="0" dirty="0">
+                <a:solidFill>
+                  <a:srgbClr val="8C757C"/>
                 </a:solidFill>
                 <a:latin typeface="Yu Gothic" pitchFamily="34" charset="0"/>
                 <a:ea typeface="Yu Gothic" pitchFamily="34" charset="-122"/>
@@ -5552,7 +6405,7 @@
               </a:rPr>
               <a:t>うまく言葉にできなくても大丈夫です。</a:t>
             </a:r>
-            <a:endParaRPr lang="en-US" sz="1400" dirty="0"/>
+            <a:endParaRPr lang="en-US" sz="1350" dirty="0"/>
           </a:p>
         </p:txBody>
       </p:sp>
@@ -5564,28 +6417,55 @@
         </p:nvSpPr>
         <p:spPr>
           <a:xfrm>
-            <a:off x="566928" y="2560320"/>
-            <a:ext cx="8010144" cy="10973"/>
+            <a:off x="640080" y="2542032"/>
+            <a:ext cx="7863840" cy="10973"/>
           </a:xfrm>
           <a:prstGeom prst="rect">
             <a:avLst/>
           </a:prstGeom>
           <a:solidFill>
-            <a:srgbClr val="E8DCDB"/>
+            <a:srgbClr val="E8D8BC"/>
           </a:solidFill>
           <a:ln/>
         </p:spPr>
       </p:sp>
       <p:sp>
         <p:nvSpPr>
-          <p:cNvPr id="7" name="Text 5"/>
-          <p:cNvSpPr/>
-          <p:nvPr/>
-        </p:nvSpPr>
-        <p:spPr>
-          <a:xfrm>
-            <a:off x="566928" y="2798064"/>
-            <a:ext cx="8046720" cy="731520"/>
+          <p:cNvPr id="7" name="Shape 5"/>
+          <p:cNvSpPr/>
+          <p:nvPr/>
+        </p:nvSpPr>
+        <p:spPr>
+          <a:xfrm>
+            <a:off x="640080" y="2761488"/>
+            <a:ext cx="5120640" cy="402336"/>
+          </a:xfrm>
+          <a:prstGeom prst="roundRect">
+            <a:avLst>
+              <a:gd name="adj" fmla="val 113636"/>
+            </a:avLst>
+          </a:prstGeom>
+          <a:solidFill>
+            <a:srgbClr val="F7DCE3"/>
+          </a:solidFill>
+          <a:ln w="12700">
+            <a:solidFill>
+              <a:srgbClr val="F7DCE3"/>
+            </a:solidFill>
+            <a:prstDash val="solid"/>
+          </a:ln>
+        </p:spPr>
+      </p:sp>
+      <p:sp>
+        <p:nvSpPr>
+          <p:cNvPr id="8" name="Text 6"/>
+          <p:cNvSpPr/>
+          <p:nvPr/>
+        </p:nvSpPr>
+        <p:spPr>
+          <a:xfrm>
+            <a:off x="640080" y="2743200"/>
+            <a:ext cx="7863840" cy="768096"/>
           </a:xfrm>
           <a:prstGeom prst="rect">
             <a:avLst/>
@@ -5599,14 +6479,14 @@
           <a:p>
             <a:pPr indent="0" marL="0">
               <a:lnSpc>
-                <a:spcPts val="3400"/>
+                <a:spcPts val="3300"/>
               </a:lnSpc>
               <a:buNone/>
             </a:pPr>
             <a:r>
-              <a:rPr lang="en-US" sz="2200" b="1" spc="60" kern="0" dirty="0">
-                <a:solidFill>
-                  <a:srgbClr val="7A1524"/>
+              <a:rPr lang="en-US" sz="2100" b="1" spc="80" kern="0" dirty="0">
+                <a:solidFill>
+                  <a:srgbClr val="A42647"/>
                 </a:solidFill>
                 <a:latin typeface="Yu Mincho" pitchFamily="34" charset="0"/>
                 <a:ea typeface="Yu Mincho" pitchFamily="34" charset="-122"/>
@@ -5614,40 +6494,60 @@
               </a:rPr>
               <a:t>「なんとなく気になった」も、</a:t>
             </a:r>
-            <a:endParaRPr lang="en-US" sz="2200" dirty="0"/>
+            <a:endParaRPr lang="en-US" sz="2100" dirty="0"/>
           </a:p>
           <a:p>
             <a:pPr indent="0" marL="0">
               <a:lnSpc>
-                <a:spcPts val="3400"/>
+                <a:spcPts val="3300"/>
               </a:lnSpc>
               <a:buNone/>
             </a:pPr>
             <a:r>
-              <a:rPr lang="en-US" sz="2200" b="1" spc="60" kern="0" dirty="0">
-                <a:solidFill>
-                  <a:srgbClr val="7A1524"/>
+              <a:rPr lang="en-US" sz="2100" b="1" spc="80" kern="0" dirty="0">
+                <a:solidFill>
+                  <a:srgbClr val="A42647"/>
                 </a:solidFill>
                 <a:latin typeface="Yu Mincho" pitchFamily="34" charset="0"/>
                 <a:ea typeface="Yu Mincho" pitchFamily="34" charset="-122"/>
                 <a:cs typeface="Yu Mincho" pitchFamily="34" charset="-120"/>
               </a:rPr>
-              <a:t>ちゃんとした理由です。</a:t>
-            </a:r>
-            <a:endParaRPr lang="en-US" sz="2200" dirty="0"/>
-          </a:p>
-        </p:txBody>
-      </p:sp>
-      <p:sp>
-        <p:nvSpPr>
-          <p:cNvPr id="8" name="Text 6"/>
-          <p:cNvSpPr/>
-          <p:nvPr/>
-        </p:nvSpPr>
-        <p:spPr>
-          <a:xfrm>
-            <a:off x="566928" y="4681728"/>
-            <a:ext cx="4114800" cy="237744"/>
+              <a:t>りっぱな理由です。</a:t>
+            </a:r>
+            <a:endParaRPr lang="en-US" sz="2100" dirty="0"/>
+          </a:p>
+        </p:txBody>
+      </p:sp>
+      <p:sp>
+        <p:nvSpPr>
+          <p:cNvPr id="9" name="Shape 7"/>
+          <p:cNvSpPr/>
+          <p:nvPr/>
+        </p:nvSpPr>
+        <p:spPr>
+          <a:xfrm>
+            <a:off x="640080" y="4590288"/>
+            <a:ext cx="7863840" cy="10973"/>
+          </a:xfrm>
+          <a:prstGeom prst="rect">
+            <a:avLst/>
+          </a:prstGeom>
+          <a:solidFill>
+            <a:srgbClr val="E8D8BC"/>
+          </a:solidFill>
+          <a:ln/>
+        </p:spPr>
+      </p:sp>
+      <p:sp>
+        <p:nvSpPr>
+          <p:cNvPr id="10" name="Text 8"/>
+          <p:cNvSpPr/>
+          <p:nvPr/>
+        </p:nvSpPr>
+        <p:spPr>
+          <a:xfrm>
+            <a:off x="640080" y="4681728"/>
+            <a:ext cx="4572000" cy="237744"/>
           </a:xfrm>
           <a:prstGeom prst="rect">
             <a:avLst/>
@@ -5665,7 +6565,7 @@
             <a:r>
               <a:rPr lang="en-US" sz="850" spc="40" kern="0" dirty="0">
                 <a:solidFill>
-                  <a:srgbClr val="7A6E6B"/>
+                  <a:srgbClr val="8C757C"/>
                 </a:solidFill>
                 <a:latin typeface="Yu Gothic" pitchFamily="34" charset="0"/>
                 <a:ea typeface="Yu Gothic" pitchFamily="34" charset="-122"/>
@@ -5679,13 +6579,13 @@
       </p:sp>
       <p:sp>
         <p:nvSpPr>
-          <p:cNvPr id="9" name="Text 7"/>
-          <p:cNvSpPr/>
-          <p:nvPr/>
-        </p:nvSpPr>
-        <p:spPr>
-          <a:xfrm>
-            <a:off x="8138160" y="4681728"/>
+          <p:cNvPr id="11" name="Text 9"/>
+          <p:cNvSpPr/>
+          <p:nvPr/>
+        </p:nvSpPr>
+        <p:spPr>
+          <a:xfrm>
+            <a:off x="8046720" y="4681728"/>
             <a:ext cx="457200" cy="237744"/>
           </a:xfrm>
           <a:prstGeom prst="rect">
@@ -5704,7 +6604,7 @@
             <a:r>
               <a:rPr lang="en-US" sz="850" spc="40" kern="0" dirty="0">
                 <a:solidFill>
-                  <a:srgbClr val="7A6E6B"/>
+                  <a:srgbClr val="8C757C"/>
                 </a:solidFill>
                 <a:latin typeface="Yu Gothic" pitchFamily="34" charset="0"/>
                 <a:ea typeface="Yu Gothic" pitchFamily="34" charset="-122"/>
@@ -5730,7 +6630,7 @@
     <p:bg>
       <p:bgPr>
         <a:solidFill>
-          <a:srgbClr val="FDF7F7"/>
+          <a:srgbClr val="FDF5F6"/>
         </a:solidFill>
       </p:bgPr>
     </p:bg>
@@ -5756,34 +6656,34 @@
         </p:nvSpPr>
         <p:spPr>
           <a:xfrm>
-            <a:off x="566928" y="384048"/>
-            <a:ext cx="8046720" cy="237744"/>
-          </a:xfrm>
-          <a:prstGeom prst="rect">
-            <a:avLst/>
-          </a:prstGeom>
-          <a:noFill/>
-          <a:ln/>
-        </p:spPr>
-        <p:txBody>
-          <a:bodyPr wrap="square" rtlCol="0" anchor="ctr"/>
-          <a:lstStyle/>
-          <a:p>
-            <a:pPr indent="0" marL="0">
-              <a:buNone/>
-            </a:pPr>
-            <a:r>
-              <a:rPr lang="en-US" sz="1000" b="1" spc="160" kern="0" dirty="0">
-                <a:solidFill>
-                  <a:srgbClr val="7A1524"/>
+            <a:off x="640080" y="420624"/>
+            <a:ext cx="7863840" cy="237744"/>
+          </a:xfrm>
+          <a:prstGeom prst="rect">
+            <a:avLst/>
+          </a:prstGeom>
+          <a:noFill/>
+          <a:ln/>
+        </p:spPr>
+        <p:txBody>
+          <a:bodyPr wrap="square" rtlCol="0" anchor="ctr"/>
+          <a:lstStyle/>
+          <a:p>
+            <a:pPr indent="0" marL="0">
+              <a:buNone/>
+            </a:pPr>
+            <a:r>
+              <a:rPr lang="en-US" sz="950" b="1" spc="200" kern="0" dirty="0">
+                <a:solidFill>
+                  <a:srgbClr val="C4A06A"/>
                 </a:solidFill>
                 <a:latin typeface="Yu Gothic" pitchFamily="34" charset="0"/>
                 <a:ea typeface="Yu Gothic" pitchFamily="34" charset="-122"/>
                 <a:cs typeface="Yu Gothic" pitchFamily="34" charset="-120"/>
               </a:rPr>
-              <a:t>QUESTION 02</a:t>
-            </a:r>
-            <a:endParaRPr lang="en-US" sz="1000" dirty="0"/>
+              <a:t>QUESTION  02</a:t>
+            </a:r>
+            <a:endParaRPr lang="en-US" sz="950" dirty="0"/>
           </a:p>
         </p:txBody>
       </p:sp>
@@ -5795,16 +6695,23 @@
         </p:nvSpPr>
         <p:spPr>
           <a:xfrm>
-            <a:off x="566928" y="667512"/>
-            <a:ext cx="457200" cy="32004"/>
-          </a:xfrm>
-          <a:prstGeom prst="rect">
-            <a:avLst/>
+            <a:off x="640080" y="822960"/>
+            <a:ext cx="1645920" cy="274320"/>
+          </a:xfrm>
+          <a:prstGeom prst="roundRect">
+            <a:avLst>
+              <a:gd name="adj" fmla="val 166667"/>
+            </a:avLst>
           </a:prstGeom>
           <a:solidFill>
-            <a:srgbClr val="7A1524"/>
+            <a:srgbClr val="F7DCE3"/>
           </a:solidFill>
-          <a:ln/>
+          <a:ln w="12700">
+            <a:solidFill>
+              <a:srgbClr val="F7DCE3"/>
+            </a:solidFill>
+            <a:prstDash val="solid"/>
+          </a:ln>
         </p:spPr>
       </p:sp>
       <p:sp>
@@ -5815,8 +6722,8 @@
         </p:nvSpPr>
         <p:spPr>
           <a:xfrm>
-            <a:off x="566928" y="822960"/>
-            <a:ext cx="8046720" cy="1005840"/>
+            <a:off x="640080" y="676656"/>
+            <a:ext cx="7863840" cy="960120"/>
           </a:xfrm>
           <a:prstGeom prst="rect">
             <a:avLst/>
@@ -5830,14 +6737,14 @@
           <a:p>
             <a:pPr indent="0" marL="0">
               <a:lnSpc>
-                <a:spcPts val="4000"/>
+                <a:spcPts val="3800"/>
               </a:lnSpc>
               <a:buNone/>
             </a:pPr>
             <a:r>
-              <a:rPr lang="en-US" sz="2600" b="1" spc="60" kern="0" dirty="0">
-                <a:solidFill>
-                  <a:srgbClr val="2B2224"/>
+              <a:rPr lang="en-US" sz="2500" b="1" spc="80" kern="0" dirty="0">
+                <a:solidFill>
+                  <a:srgbClr val="A42647"/>
                 </a:solidFill>
                 <a:latin typeface="Yu Mincho" pitchFamily="34" charset="0"/>
                 <a:ea typeface="Yu Mincho" pitchFamily="34" charset="-122"/>
@@ -5845,19 +6752,19 @@
               </a:rPr>
               <a:t>5日後、</a:t>
             </a:r>
-            <a:endParaRPr lang="en-US" sz="2600" dirty="0"/>
+            <a:endParaRPr lang="en-US" sz="2500" dirty="0"/>
           </a:p>
           <a:p>
             <a:pPr indent="0" marL="0">
               <a:lnSpc>
-                <a:spcPts val="4000"/>
+                <a:spcPts val="3800"/>
               </a:lnSpc>
               <a:buNone/>
             </a:pPr>
             <a:r>
-              <a:rPr lang="en-US" sz="2600" b="1" spc="60" kern="0" dirty="0">
-                <a:solidFill>
-                  <a:srgbClr val="2B2224"/>
+              <a:rPr lang="en-US" sz="2500" b="1" spc="80" kern="0" dirty="0">
+                <a:solidFill>
+                  <a:srgbClr val="A42647"/>
                 </a:solidFill>
                 <a:latin typeface="Yu Mincho" pitchFamily="34" charset="0"/>
                 <a:ea typeface="Yu Mincho" pitchFamily="34" charset="-122"/>
@@ -5865,7 +6772,7 @@
               </a:rPr>
               <a:t>どんな自分になっていたい？</a:t>
             </a:r>
-            <a:endParaRPr lang="en-US" sz="2600" dirty="0"/>
+            <a:endParaRPr lang="en-US" sz="2500" dirty="0"/>
           </a:p>
         </p:txBody>
       </p:sp>
@@ -5877,14 +6784,14 @@
         </p:nvSpPr>
         <p:spPr>
           <a:xfrm>
-            <a:off x="640080" y="2148840"/>
-            <a:ext cx="82296" cy="82296"/>
+            <a:off x="713232" y="2112264"/>
+            <a:ext cx="192024" cy="192024"/>
           </a:xfrm>
           <a:prstGeom prst="ellipse">
             <a:avLst/>
           </a:prstGeom>
           <a:solidFill>
-            <a:srgbClr val="7A1524"/>
+            <a:srgbClr val="C9325C"/>
           </a:solidFill>
           <a:ln/>
         </p:spPr>
@@ -5897,70 +6804,47 @@
         </p:nvSpPr>
         <p:spPr>
           <a:xfrm>
-            <a:off x="896112" y="2029968"/>
-            <a:ext cx="7589520" cy="420624"/>
-          </a:xfrm>
-          <a:prstGeom prst="rect">
-            <a:avLst/>
-          </a:prstGeom>
-          <a:noFill/>
-          <a:ln/>
-        </p:spPr>
-        <p:txBody>
-          <a:bodyPr wrap="square" rtlCol="0" anchor="ctr"/>
-          <a:lstStyle/>
-          <a:p>
-            <a:pPr indent="0" marL="0">
-              <a:lnSpc>
-                <a:spcPts val="2400"/>
-              </a:lnSpc>
-              <a:buNone/>
-            </a:pPr>
-            <a:r>
-              <a:rPr lang="en-US" sz="1450" spc="40" kern="0" dirty="0">
-                <a:solidFill>
-                  <a:srgbClr val="2B2224"/>
+            <a:off x="713232" y="2112264"/>
+            <a:ext cx="192024" cy="192024"/>
+          </a:xfrm>
+          <a:prstGeom prst="rect">
+            <a:avLst/>
+          </a:prstGeom>
+          <a:noFill/>
+          <a:ln/>
+        </p:spPr>
+        <p:txBody>
+          <a:bodyPr wrap="square" rtlCol="0" anchor="ctr"/>
+          <a:lstStyle/>
+          <a:p>
+            <a:pPr algn="ctr" indent="0" marL="0">
+              <a:buNone/>
+            </a:pPr>
+            <a:r>
+              <a:rPr lang="en-US" sz="900" b="1" spc="40" kern="0" dirty="0">
+                <a:solidFill>
+                  <a:srgbClr val="FFFFFF"/>
                 </a:solidFill>
                 <a:latin typeface="Yu Gothic" pitchFamily="34" charset="0"/>
                 <a:ea typeface="Yu Gothic" pitchFamily="34" charset="-122"/>
                 <a:cs typeface="Yu Gothic" pitchFamily="34" charset="-120"/>
               </a:rPr>
-              <a:t>朝、自分のための時間がとれている</a:t>
-            </a:r>
-            <a:endParaRPr lang="en-US" sz="1450" dirty="0"/>
-          </a:p>
-        </p:txBody>
-      </p:sp>
-      <p:sp>
-        <p:nvSpPr>
-          <p:cNvPr id="7" name="Shape 5"/>
-          <p:cNvSpPr/>
-          <p:nvPr/>
-        </p:nvSpPr>
-        <p:spPr>
-          <a:xfrm>
-            <a:off x="640080" y="2569464"/>
-            <a:ext cx="82296" cy="82296"/>
-          </a:xfrm>
-          <a:prstGeom prst="ellipse">
-            <a:avLst/>
-          </a:prstGeom>
-          <a:solidFill>
-            <a:srgbClr val="7A1524"/>
-          </a:solidFill>
-          <a:ln/>
-        </p:spPr>
-      </p:sp>
-      <p:sp>
-        <p:nvSpPr>
-          <p:cNvPr id="8" name="Text 6"/>
-          <p:cNvSpPr/>
-          <p:nvPr/>
-        </p:nvSpPr>
-        <p:spPr>
-          <a:xfrm>
-            <a:off x="896112" y="2450592"/>
-            <a:ext cx="7589520" cy="420624"/>
+              <a:t>✓</a:t>
+            </a:r>
+            <a:endParaRPr lang="en-US" sz="900" dirty="0"/>
+          </a:p>
+        </p:txBody>
+      </p:sp>
+      <p:sp>
+        <p:nvSpPr>
+          <p:cNvPr id="7" name="Text 5"/>
+          <p:cNvSpPr/>
+          <p:nvPr/>
+        </p:nvSpPr>
+        <p:spPr>
+          <a:xfrm>
+            <a:off x="1024128" y="2048256"/>
+            <a:ext cx="7406640" cy="429768"/>
           </a:xfrm>
           <a:prstGeom prst="rect">
             <a:avLst/>
@@ -5974,117 +6858,94 @@
           <a:p>
             <a:pPr indent="0" marL="0">
               <a:lnSpc>
-                <a:spcPts val="2400"/>
+                <a:spcPts val="2200"/>
               </a:lnSpc>
               <a:buNone/>
             </a:pPr>
             <a:r>
-              <a:rPr lang="en-US" sz="1450" spc="40" kern="0" dirty="0">
-                <a:solidFill>
-                  <a:srgbClr val="2B2224"/>
+              <a:rPr lang="en-US" sz="1400" spc="40" kern="0" dirty="0">
+                <a:solidFill>
+                  <a:srgbClr val="3F2E33"/>
                 </a:solidFill>
                 <a:latin typeface="Yu Gothic" pitchFamily="34" charset="0"/>
                 <a:ea typeface="Yu Gothic" pitchFamily="34" charset="-122"/>
                 <a:cs typeface="Yu Gothic" pitchFamily="34" charset="-120"/>
               </a:rPr>
-              <a:t>自分の疲れに、気づける</a:t>
-            </a:r>
-            <a:endParaRPr lang="en-US" sz="1450" dirty="0"/>
-          </a:p>
-        </p:txBody>
-      </p:sp>
-      <p:sp>
-        <p:nvSpPr>
-          <p:cNvPr id="9" name="Shape 7"/>
-          <p:cNvSpPr/>
-          <p:nvPr/>
-        </p:nvSpPr>
-        <p:spPr>
-          <a:xfrm>
-            <a:off x="640080" y="2990088"/>
-            <a:ext cx="82296" cy="82296"/>
+              <a:t>朝、自分のための時間がとれている</a:t>
+            </a:r>
+            <a:endParaRPr lang="en-US" sz="1400" dirty="0"/>
+          </a:p>
+        </p:txBody>
+      </p:sp>
+      <p:sp>
+        <p:nvSpPr>
+          <p:cNvPr id="8" name="Shape 6"/>
+          <p:cNvSpPr/>
+          <p:nvPr/>
+        </p:nvSpPr>
+        <p:spPr>
+          <a:xfrm>
+            <a:off x="713232" y="2542032"/>
+            <a:ext cx="192024" cy="192024"/>
           </a:xfrm>
           <a:prstGeom prst="ellipse">
             <a:avLst/>
           </a:prstGeom>
           <a:solidFill>
-            <a:srgbClr val="7A1524"/>
+            <a:srgbClr val="C4A06A"/>
           </a:solidFill>
           <a:ln/>
         </p:spPr>
       </p:sp>
       <p:sp>
         <p:nvSpPr>
-          <p:cNvPr id="10" name="Text 8"/>
-          <p:cNvSpPr/>
-          <p:nvPr/>
-        </p:nvSpPr>
-        <p:spPr>
-          <a:xfrm>
-            <a:off x="896112" y="2871216"/>
-            <a:ext cx="7589520" cy="420624"/>
-          </a:xfrm>
-          <a:prstGeom prst="rect">
-            <a:avLst/>
-          </a:prstGeom>
-          <a:noFill/>
-          <a:ln/>
-        </p:spPr>
-        <p:txBody>
-          <a:bodyPr wrap="square" rtlCol="0" anchor="ctr"/>
-          <a:lstStyle/>
-          <a:p>
-            <a:pPr indent="0" marL="0">
-              <a:lnSpc>
-                <a:spcPts val="2400"/>
-              </a:lnSpc>
-              <a:buNone/>
-            </a:pPr>
-            <a:r>
-              <a:rPr lang="en-US" sz="1450" spc="40" kern="0" dirty="0">
-                <a:solidFill>
-                  <a:srgbClr val="2B2224"/>
+          <p:cNvPr id="9" name="Text 7"/>
+          <p:cNvSpPr/>
+          <p:nvPr/>
+        </p:nvSpPr>
+        <p:spPr>
+          <a:xfrm>
+            <a:off x="713232" y="2542032"/>
+            <a:ext cx="192024" cy="192024"/>
+          </a:xfrm>
+          <a:prstGeom prst="rect">
+            <a:avLst/>
+          </a:prstGeom>
+          <a:noFill/>
+          <a:ln/>
+        </p:spPr>
+        <p:txBody>
+          <a:bodyPr wrap="square" rtlCol="0" anchor="ctr"/>
+          <a:lstStyle/>
+          <a:p>
+            <a:pPr algn="ctr" indent="0" marL="0">
+              <a:buNone/>
+            </a:pPr>
+            <a:r>
+              <a:rPr lang="en-US" sz="900" b="1" spc="40" kern="0" dirty="0">
+                <a:solidFill>
+                  <a:srgbClr val="FFFFFF"/>
                 </a:solidFill>
                 <a:latin typeface="Yu Gothic" pitchFamily="34" charset="0"/>
                 <a:ea typeface="Yu Gothic" pitchFamily="34" charset="-122"/>
                 <a:cs typeface="Yu Gothic" pitchFamily="34" charset="-120"/>
               </a:rPr>
-              <a:t>食事を一度、丁寧に食べられる</a:t>
-            </a:r>
-            <a:endParaRPr lang="en-US" sz="1450" dirty="0"/>
-          </a:p>
-        </p:txBody>
-      </p:sp>
-      <p:sp>
-        <p:nvSpPr>
-          <p:cNvPr id="11" name="Shape 9"/>
-          <p:cNvSpPr/>
-          <p:nvPr/>
-        </p:nvSpPr>
-        <p:spPr>
-          <a:xfrm>
-            <a:off x="640080" y="3410712"/>
-            <a:ext cx="82296" cy="82296"/>
-          </a:xfrm>
-          <a:prstGeom prst="ellipse">
-            <a:avLst/>
-          </a:prstGeom>
-          <a:solidFill>
-            <a:srgbClr val="7A1524"/>
-          </a:solidFill>
-          <a:ln/>
-        </p:spPr>
-      </p:sp>
-      <p:sp>
-        <p:nvSpPr>
-          <p:cNvPr id="12" name="Text 10"/>
-          <p:cNvSpPr/>
-          <p:nvPr/>
-        </p:nvSpPr>
-        <p:spPr>
-          <a:xfrm>
-            <a:off x="896112" y="3291840"/>
-            <a:ext cx="7589520" cy="420624"/>
+              <a:t>✓</a:t>
+            </a:r>
+            <a:endParaRPr lang="en-US" sz="900" dirty="0"/>
+          </a:p>
+        </p:txBody>
+      </p:sp>
+      <p:sp>
+        <p:nvSpPr>
+          <p:cNvPr id="10" name="Text 8"/>
+          <p:cNvSpPr/>
+          <p:nvPr/>
+        </p:nvSpPr>
+        <p:spPr>
+          <a:xfrm>
+            <a:off x="1024128" y="2478024"/>
+            <a:ext cx="7406640" cy="429768"/>
           </a:xfrm>
           <a:prstGeom prst="rect">
             <a:avLst/>
@@ -6098,159 +6959,420 @@
           <a:p>
             <a:pPr indent="0" marL="0">
               <a:lnSpc>
-                <a:spcPts val="2400"/>
+                <a:spcPts val="2200"/>
               </a:lnSpc>
               <a:buNone/>
             </a:pPr>
             <a:r>
-              <a:rPr lang="en-US" sz="1450" spc="40" kern="0" dirty="0">
-                <a:solidFill>
-                  <a:srgbClr val="2B2224"/>
+              <a:rPr lang="en-US" sz="1400" spc="40" kern="0" dirty="0">
+                <a:solidFill>
+                  <a:srgbClr val="3F2E33"/>
                 </a:solidFill>
                 <a:latin typeface="Yu Gothic" pitchFamily="34" charset="0"/>
                 <a:ea typeface="Yu Gothic" pitchFamily="34" charset="-122"/>
                 <a:cs typeface="Yu Gothic" pitchFamily="34" charset="-120"/>
               </a:rPr>
-              <a:t>イライラしたときに、一度止まれる</a:t>
-            </a:r>
-            <a:endParaRPr lang="en-US" sz="1450" dirty="0"/>
-          </a:p>
-        </p:txBody>
-      </p:sp>
-      <p:sp>
-        <p:nvSpPr>
-          <p:cNvPr id="13" name="Shape 11"/>
-          <p:cNvSpPr/>
-          <p:nvPr/>
-        </p:nvSpPr>
-        <p:spPr>
-          <a:xfrm>
-            <a:off x="640080" y="3831336"/>
-            <a:ext cx="82296" cy="82296"/>
+              <a:t>自分の疲れに、気づける</a:t>
+            </a:r>
+            <a:endParaRPr lang="en-US" sz="1400" dirty="0"/>
+          </a:p>
+        </p:txBody>
+      </p:sp>
+      <p:sp>
+        <p:nvSpPr>
+          <p:cNvPr id="11" name="Shape 9"/>
+          <p:cNvSpPr/>
+          <p:nvPr/>
+        </p:nvSpPr>
+        <p:spPr>
+          <a:xfrm>
+            <a:off x="713232" y="2971800"/>
+            <a:ext cx="192024" cy="192024"/>
           </a:xfrm>
           <a:prstGeom prst="ellipse">
             <a:avLst/>
           </a:prstGeom>
           <a:solidFill>
-            <a:srgbClr val="7A1524"/>
+            <a:srgbClr val="C9325C"/>
           </a:solidFill>
           <a:ln/>
         </p:spPr>
       </p:sp>
       <p:sp>
         <p:nvSpPr>
-          <p:cNvPr id="14" name="Text 12"/>
-          <p:cNvSpPr/>
-          <p:nvPr/>
-        </p:nvSpPr>
-        <p:spPr>
-          <a:xfrm>
-            <a:off x="896112" y="3712464"/>
-            <a:ext cx="7589520" cy="420624"/>
-          </a:xfrm>
-          <a:prstGeom prst="rect">
-            <a:avLst/>
-          </a:prstGeom>
-          <a:noFill/>
-          <a:ln/>
-        </p:spPr>
-        <p:txBody>
-          <a:bodyPr wrap="square" rtlCol="0" anchor="ctr"/>
-          <a:lstStyle/>
-          <a:p>
-            <a:pPr indent="0" marL="0">
-              <a:lnSpc>
-                <a:spcPts val="2400"/>
-              </a:lnSpc>
-              <a:buNone/>
-            </a:pPr>
-            <a:r>
-              <a:rPr lang="en-US" sz="1450" spc="40" kern="0" dirty="0">
-                <a:solidFill>
-                  <a:srgbClr val="2B2224"/>
+          <p:cNvPr id="12" name="Text 10"/>
+          <p:cNvSpPr/>
+          <p:nvPr/>
+        </p:nvSpPr>
+        <p:spPr>
+          <a:xfrm>
+            <a:off x="713232" y="2971800"/>
+            <a:ext cx="192024" cy="192024"/>
+          </a:xfrm>
+          <a:prstGeom prst="rect">
+            <a:avLst/>
+          </a:prstGeom>
+          <a:noFill/>
+          <a:ln/>
+        </p:spPr>
+        <p:txBody>
+          <a:bodyPr wrap="square" rtlCol="0" anchor="ctr"/>
+          <a:lstStyle/>
+          <a:p>
+            <a:pPr algn="ctr" indent="0" marL="0">
+              <a:buNone/>
+            </a:pPr>
+            <a:r>
+              <a:rPr lang="en-US" sz="900" b="1" spc="40" kern="0" dirty="0">
+                <a:solidFill>
+                  <a:srgbClr val="FFFFFF"/>
                 </a:solidFill>
                 <a:latin typeface="Yu Gothic" pitchFamily="34" charset="0"/>
                 <a:ea typeface="Yu Gothic" pitchFamily="34" charset="-122"/>
                 <a:cs typeface="Yu Gothic" pitchFamily="34" charset="-120"/>
               </a:rPr>
-              <a:t>「今日の私、どうしたい？」が聞けている</a:t>
-            </a:r>
-            <a:endParaRPr lang="en-US" sz="1450" dirty="0"/>
-          </a:p>
-        </p:txBody>
-      </p:sp>
-      <p:sp>
-        <p:nvSpPr>
-          <p:cNvPr id="15" name="Text 13"/>
-          <p:cNvSpPr/>
-          <p:nvPr/>
-        </p:nvSpPr>
-        <p:spPr>
-          <a:xfrm>
-            <a:off x="566928" y="4315968"/>
-            <a:ext cx="8046720" cy="274320"/>
-          </a:xfrm>
-          <a:prstGeom prst="rect">
-            <a:avLst/>
-          </a:prstGeom>
-          <a:noFill/>
-          <a:ln/>
-        </p:spPr>
-        <p:txBody>
-          <a:bodyPr wrap="square" rtlCol="0" anchor="ctr"/>
-          <a:lstStyle/>
-          <a:p>
-            <a:pPr indent="0" marL="0">
-              <a:buNone/>
-            </a:pPr>
-            <a:r>
-              <a:rPr lang="en-US" sz="1150" spc="40" kern="0" dirty="0">
-                <a:solidFill>
-                  <a:srgbClr val="7A6E6B"/>
+              <a:t>✓</a:t>
+            </a:r>
+            <a:endParaRPr lang="en-US" sz="900" dirty="0"/>
+          </a:p>
+        </p:txBody>
+      </p:sp>
+      <p:sp>
+        <p:nvSpPr>
+          <p:cNvPr id="13" name="Text 11"/>
+          <p:cNvSpPr/>
+          <p:nvPr/>
+        </p:nvSpPr>
+        <p:spPr>
+          <a:xfrm>
+            <a:off x="1024128" y="2907792"/>
+            <a:ext cx="7406640" cy="429768"/>
+          </a:xfrm>
+          <a:prstGeom prst="rect">
+            <a:avLst/>
+          </a:prstGeom>
+          <a:noFill/>
+          <a:ln/>
+        </p:spPr>
+        <p:txBody>
+          <a:bodyPr wrap="square" rtlCol="0" anchor="ctr"/>
+          <a:lstStyle/>
+          <a:p>
+            <a:pPr indent="0" marL="0">
+              <a:lnSpc>
+                <a:spcPts val="2200"/>
+              </a:lnSpc>
+              <a:buNone/>
+            </a:pPr>
+            <a:r>
+              <a:rPr lang="en-US" sz="1400" spc="40" kern="0" dirty="0">
+                <a:solidFill>
+                  <a:srgbClr val="3F2E33"/>
                 </a:solidFill>
                 <a:latin typeface="Yu Gothic" pitchFamily="34" charset="0"/>
                 <a:ea typeface="Yu Gothic" pitchFamily="34" charset="-122"/>
                 <a:cs typeface="Yu Gothic" pitchFamily="34" charset="-120"/>
               </a:rPr>
-              <a:t>近いものを、1つ選んでみてください。ほかにあれば、それでも大丈夫です。</a:t>
-            </a:r>
-            <a:endParaRPr lang="en-US" sz="1150" dirty="0"/>
-          </a:p>
-        </p:txBody>
-      </p:sp>
-      <p:sp>
-        <p:nvSpPr>
-          <p:cNvPr id="16" name="Text 14"/>
-          <p:cNvSpPr/>
-          <p:nvPr/>
-        </p:nvSpPr>
-        <p:spPr>
-          <a:xfrm>
-            <a:off x="566928" y="4681728"/>
-            <a:ext cx="4114800" cy="237744"/>
-          </a:xfrm>
-          <a:prstGeom prst="rect">
-            <a:avLst/>
-          </a:prstGeom>
-          <a:noFill/>
-          <a:ln/>
-        </p:spPr>
-        <p:txBody>
-          <a:bodyPr wrap="square" rtlCol="0" anchor="ctr"/>
-          <a:lstStyle/>
-          <a:p>
-            <a:pPr indent="0" marL="0">
-              <a:buNone/>
-            </a:pPr>
-            <a:r>
-              <a:rPr lang="en-US" sz="850" spc="40" kern="0" dirty="0">
-                <a:solidFill>
-                  <a:srgbClr val="7A6E6B"/>
+              <a:t>食事を一度、丁寧に食べられる</a:t>
+            </a:r>
+            <a:endParaRPr lang="en-US" sz="1400" dirty="0"/>
+          </a:p>
+        </p:txBody>
+      </p:sp>
+      <p:sp>
+        <p:nvSpPr>
+          <p:cNvPr id="14" name="Shape 12"/>
+          <p:cNvSpPr/>
+          <p:nvPr/>
+        </p:nvSpPr>
+        <p:spPr>
+          <a:xfrm>
+            <a:off x="713232" y="3401568"/>
+            <a:ext cx="192024" cy="192024"/>
+          </a:xfrm>
+          <a:prstGeom prst="ellipse">
+            <a:avLst/>
+          </a:prstGeom>
+          <a:solidFill>
+            <a:srgbClr val="C4A06A"/>
+          </a:solidFill>
+          <a:ln/>
+        </p:spPr>
+      </p:sp>
+      <p:sp>
+        <p:nvSpPr>
+          <p:cNvPr id="15" name="Text 13"/>
+          <p:cNvSpPr/>
+          <p:nvPr/>
+        </p:nvSpPr>
+        <p:spPr>
+          <a:xfrm>
+            <a:off x="713232" y="3401568"/>
+            <a:ext cx="192024" cy="192024"/>
+          </a:xfrm>
+          <a:prstGeom prst="rect">
+            <a:avLst/>
+          </a:prstGeom>
+          <a:noFill/>
+          <a:ln/>
+        </p:spPr>
+        <p:txBody>
+          <a:bodyPr wrap="square" rtlCol="0" anchor="ctr"/>
+          <a:lstStyle/>
+          <a:p>
+            <a:pPr algn="ctr" indent="0" marL="0">
+              <a:buNone/>
+            </a:pPr>
+            <a:r>
+              <a:rPr lang="en-US" sz="900" b="1" spc="40" kern="0" dirty="0">
+                <a:solidFill>
+                  <a:srgbClr val="FFFFFF"/>
                 </a:solidFill>
                 <a:latin typeface="Yu Gothic" pitchFamily="34" charset="0"/>
                 <a:ea typeface="Yu Gothic" pitchFamily="34" charset="-122"/>
                 <a:cs typeface="Yu Gothic" pitchFamily="34" charset="-120"/>
               </a:rPr>
+              <a:t>✓</a:t>
+            </a:r>
+            <a:endParaRPr lang="en-US" sz="900" dirty="0"/>
+          </a:p>
+        </p:txBody>
+      </p:sp>
+      <p:sp>
+        <p:nvSpPr>
+          <p:cNvPr id="16" name="Text 14"/>
+          <p:cNvSpPr/>
+          <p:nvPr/>
+        </p:nvSpPr>
+        <p:spPr>
+          <a:xfrm>
+            <a:off x="1024128" y="3337560"/>
+            <a:ext cx="7406640" cy="429768"/>
+          </a:xfrm>
+          <a:prstGeom prst="rect">
+            <a:avLst/>
+          </a:prstGeom>
+          <a:noFill/>
+          <a:ln/>
+        </p:spPr>
+        <p:txBody>
+          <a:bodyPr wrap="square" rtlCol="0" anchor="ctr"/>
+          <a:lstStyle/>
+          <a:p>
+            <a:pPr indent="0" marL="0">
+              <a:lnSpc>
+                <a:spcPts val="2200"/>
+              </a:lnSpc>
+              <a:buNone/>
+            </a:pPr>
+            <a:r>
+              <a:rPr lang="en-US" sz="1400" spc="40" kern="0" dirty="0">
+                <a:solidFill>
+                  <a:srgbClr val="3F2E33"/>
+                </a:solidFill>
+                <a:latin typeface="Yu Gothic" pitchFamily="34" charset="0"/>
+                <a:ea typeface="Yu Gothic" pitchFamily="34" charset="-122"/>
+                <a:cs typeface="Yu Gothic" pitchFamily="34" charset="-120"/>
+              </a:rPr>
+              <a:t>イライラしたときに、一度止まれる</a:t>
+            </a:r>
+            <a:endParaRPr lang="en-US" sz="1400" dirty="0"/>
+          </a:p>
+        </p:txBody>
+      </p:sp>
+      <p:sp>
+        <p:nvSpPr>
+          <p:cNvPr id="17" name="Shape 15"/>
+          <p:cNvSpPr/>
+          <p:nvPr/>
+        </p:nvSpPr>
+        <p:spPr>
+          <a:xfrm>
+            <a:off x="713232" y="3831336"/>
+            <a:ext cx="192024" cy="192024"/>
+          </a:xfrm>
+          <a:prstGeom prst="ellipse">
+            <a:avLst/>
+          </a:prstGeom>
+          <a:solidFill>
+            <a:srgbClr val="C9325C"/>
+          </a:solidFill>
+          <a:ln/>
+        </p:spPr>
+      </p:sp>
+      <p:sp>
+        <p:nvSpPr>
+          <p:cNvPr id="18" name="Text 16"/>
+          <p:cNvSpPr/>
+          <p:nvPr/>
+        </p:nvSpPr>
+        <p:spPr>
+          <a:xfrm>
+            <a:off x="713232" y="3831336"/>
+            <a:ext cx="192024" cy="192024"/>
+          </a:xfrm>
+          <a:prstGeom prst="rect">
+            <a:avLst/>
+          </a:prstGeom>
+          <a:noFill/>
+          <a:ln/>
+        </p:spPr>
+        <p:txBody>
+          <a:bodyPr wrap="square" rtlCol="0" anchor="ctr"/>
+          <a:lstStyle/>
+          <a:p>
+            <a:pPr algn="ctr" indent="0" marL="0">
+              <a:buNone/>
+            </a:pPr>
+            <a:r>
+              <a:rPr lang="en-US" sz="900" b="1" spc="40" kern="0" dirty="0">
+                <a:solidFill>
+                  <a:srgbClr val="FFFFFF"/>
+                </a:solidFill>
+                <a:latin typeface="Yu Gothic" pitchFamily="34" charset="0"/>
+                <a:ea typeface="Yu Gothic" pitchFamily="34" charset="-122"/>
+                <a:cs typeface="Yu Gothic" pitchFamily="34" charset="-120"/>
+              </a:rPr>
+              <a:t>✓</a:t>
+            </a:r>
+            <a:endParaRPr lang="en-US" sz="900" dirty="0"/>
+          </a:p>
+        </p:txBody>
+      </p:sp>
+      <p:sp>
+        <p:nvSpPr>
+          <p:cNvPr id="19" name="Text 17"/>
+          <p:cNvSpPr/>
+          <p:nvPr/>
+        </p:nvSpPr>
+        <p:spPr>
+          <a:xfrm>
+            <a:off x="1024128" y="3767328"/>
+            <a:ext cx="7406640" cy="429768"/>
+          </a:xfrm>
+          <a:prstGeom prst="rect">
+            <a:avLst/>
+          </a:prstGeom>
+          <a:noFill/>
+          <a:ln/>
+        </p:spPr>
+        <p:txBody>
+          <a:bodyPr wrap="square" rtlCol="0" anchor="ctr"/>
+          <a:lstStyle/>
+          <a:p>
+            <a:pPr indent="0" marL="0">
+              <a:lnSpc>
+                <a:spcPts val="2200"/>
+              </a:lnSpc>
+              <a:buNone/>
+            </a:pPr>
+            <a:r>
+              <a:rPr lang="en-US" sz="1400" spc="40" kern="0" dirty="0">
+                <a:solidFill>
+                  <a:srgbClr val="3F2E33"/>
+                </a:solidFill>
+                <a:latin typeface="Yu Gothic" pitchFamily="34" charset="0"/>
+                <a:ea typeface="Yu Gothic" pitchFamily="34" charset="-122"/>
+                <a:cs typeface="Yu Gothic" pitchFamily="34" charset="-120"/>
+              </a:rPr>
+              <a:t>「今日の私、どうしたい？」が聞けている</a:t>
+            </a:r>
+            <a:endParaRPr lang="en-US" sz="1400" dirty="0"/>
+          </a:p>
+        </p:txBody>
+      </p:sp>
+      <p:sp>
+        <p:nvSpPr>
+          <p:cNvPr id="20" name="Text 18"/>
+          <p:cNvSpPr/>
+          <p:nvPr/>
+        </p:nvSpPr>
+        <p:spPr>
+          <a:xfrm>
+            <a:off x="640080" y="4297680"/>
+            <a:ext cx="7863840" cy="256032"/>
+          </a:xfrm>
+          <a:prstGeom prst="rect">
+            <a:avLst/>
+          </a:prstGeom>
+          <a:noFill/>
+          <a:ln/>
+        </p:spPr>
+        <p:txBody>
+          <a:bodyPr wrap="square" rtlCol="0" anchor="ctr"/>
+          <a:lstStyle/>
+          <a:p>
+            <a:pPr indent="0" marL="0">
+              <a:buNone/>
+            </a:pPr>
+            <a:r>
+              <a:rPr lang="en-US" sz="1100" spc="40" kern="0" dirty="0">
+                <a:solidFill>
+                  <a:srgbClr val="8C757C"/>
+                </a:solidFill>
+                <a:latin typeface="Yu Gothic" pitchFamily="34" charset="0"/>
+                <a:ea typeface="Yu Gothic" pitchFamily="34" charset="-122"/>
+                <a:cs typeface="Yu Gothic" pitchFamily="34" charset="-120"/>
+              </a:rPr>
+              <a:t>近いものを1つ選んでみてください。ほかにあれば、それでも大丈夫です。</a:t>
+            </a:r>
+            <a:endParaRPr lang="en-US" sz="1100" dirty="0"/>
+          </a:p>
+        </p:txBody>
+      </p:sp>
+      <p:sp>
+        <p:nvSpPr>
+          <p:cNvPr id="21" name="Shape 19"/>
+          <p:cNvSpPr/>
+          <p:nvPr/>
+        </p:nvSpPr>
+        <p:spPr>
+          <a:xfrm>
+            <a:off x="640080" y="4590288"/>
+            <a:ext cx="7863840" cy="10973"/>
+          </a:xfrm>
+          <a:prstGeom prst="rect">
+            <a:avLst/>
+          </a:prstGeom>
+          <a:solidFill>
+            <a:srgbClr val="E8D8BC"/>
+          </a:solidFill>
+          <a:ln/>
+        </p:spPr>
+      </p:sp>
+      <p:sp>
+        <p:nvSpPr>
+          <p:cNvPr id="22" name="Text 20"/>
+          <p:cNvSpPr/>
+          <p:nvPr/>
+        </p:nvSpPr>
+        <p:spPr>
+          <a:xfrm>
+            <a:off x="640080" y="4681728"/>
+            <a:ext cx="4572000" cy="237744"/>
+          </a:xfrm>
+          <a:prstGeom prst="rect">
+            <a:avLst/>
+          </a:prstGeom>
+          <a:noFill/>
+          <a:ln/>
+        </p:spPr>
+        <p:txBody>
+          <a:bodyPr wrap="square" rtlCol="0" anchor="ctr"/>
+          <a:lstStyle/>
+          <a:p>
+            <a:pPr indent="0" marL="0">
+              <a:buNone/>
+            </a:pPr>
+            <a:r>
+              <a:rPr lang="en-US" sz="850" spc="40" kern="0" dirty="0">
+                <a:solidFill>
+                  <a:srgbClr val="8C757C"/>
+                </a:solidFill>
+                <a:latin typeface="Yu Gothic" pitchFamily="34" charset="0"/>
+                <a:ea typeface="Yu Gothic" pitchFamily="34" charset="-122"/>
+                <a:cs typeface="Yu Gothic" pitchFamily="34" charset="-120"/>
+              </a:rPr>
               <a:t>私ファーストプログラム 5DAYS</a:t>
             </a:r>
             <a:endParaRPr lang="en-US" sz="850" dirty="0"/>
@@ -6259,13 +7381,13 @@
       </p:sp>
       <p:sp>
         <p:nvSpPr>
-          <p:cNvPr id="17" name="Text 15"/>
-          <p:cNvSpPr/>
-          <p:nvPr/>
-        </p:nvSpPr>
-        <p:spPr>
-          <a:xfrm>
-            <a:off x="8138160" y="4681728"/>
+          <p:cNvPr id="23" name="Text 21"/>
+          <p:cNvSpPr/>
+          <p:nvPr/>
+        </p:nvSpPr>
+        <p:spPr>
+          <a:xfrm>
+            <a:off x="8046720" y="4681728"/>
             <a:ext cx="457200" cy="237744"/>
           </a:xfrm>
           <a:prstGeom prst="rect">
@@ -6284,7 +7406,7 @@
             <a:r>
               <a:rPr lang="en-US" sz="850" spc="40" kern="0" dirty="0">
                 <a:solidFill>
-                  <a:srgbClr val="7A6E6B"/>
+                  <a:srgbClr val="8C757C"/>
                 </a:solidFill>
                 <a:latin typeface="Yu Gothic" pitchFamily="34" charset="0"/>
                 <a:ea typeface="Yu Gothic" pitchFamily="34" charset="-122"/>
@@ -6310,7 +7432,7 @@
     <p:bg>
       <p:bgPr>
         <a:solidFill>
-          <a:srgbClr val="FDF7F7"/>
+          <a:srgbClr val="FDF5F6"/>
         </a:solidFill>
       </p:bgPr>
     </p:bg>
@@ -6336,26 +7458,26 @@
         </p:nvSpPr>
         <p:spPr>
           <a:xfrm>
-            <a:off x="566928" y="384048"/>
-            <a:ext cx="8046720" cy="237744"/>
-          </a:xfrm>
-          <a:prstGeom prst="rect">
-            <a:avLst/>
-          </a:prstGeom>
-          <a:noFill/>
-          <a:ln/>
-        </p:spPr>
-        <p:txBody>
-          <a:bodyPr wrap="square" rtlCol="0" anchor="ctr"/>
-          <a:lstStyle/>
-          <a:p>
-            <a:pPr indent="0" marL="0">
-              <a:buNone/>
-            </a:pPr>
-            <a:r>
-              <a:rPr lang="en-US" sz="1000" b="1" spc="160" kern="0" dirty="0">
-                <a:solidFill>
-                  <a:srgbClr val="7A1524"/>
+            <a:off x="640080" y="420624"/>
+            <a:ext cx="7863840" cy="237744"/>
+          </a:xfrm>
+          <a:prstGeom prst="rect">
+            <a:avLst/>
+          </a:prstGeom>
+          <a:noFill/>
+          <a:ln/>
+        </p:spPr>
+        <p:txBody>
+          <a:bodyPr wrap="square" rtlCol="0" anchor="ctr"/>
+          <a:lstStyle/>
+          <a:p>
+            <a:pPr indent="0" marL="0">
+              <a:buNone/>
+            </a:pPr>
+            <a:r>
+              <a:rPr lang="en-US" sz="950" b="1" spc="200" kern="0" dirty="0">
+                <a:solidFill>
+                  <a:srgbClr val="C4A06A"/>
                 </a:solidFill>
                 <a:latin typeface="Yu Gothic" pitchFamily="34" charset="0"/>
                 <a:ea typeface="Yu Gothic" pitchFamily="34" charset="-122"/>
@@ -6363,7 +7485,7 @@
               </a:rPr>
               <a:t>CONCEPT</a:t>
             </a:r>
-            <a:endParaRPr lang="en-US" sz="1000" dirty="0"/>
+            <a:endParaRPr lang="en-US" sz="950" dirty="0"/>
           </a:p>
         </p:txBody>
       </p:sp>
@@ -6375,16 +7497,23 @@
         </p:nvSpPr>
         <p:spPr>
           <a:xfrm>
-            <a:off x="566928" y="667512"/>
-            <a:ext cx="457200" cy="32004"/>
-          </a:xfrm>
-          <a:prstGeom prst="rect">
-            <a:avLst/>
+            <a:off x="640080" y="822960"/>
+            <a:ext cx="4206240" cy="274320"/>
+          </a:xfrm>
+          <a:prstGeom prst="roundRect">
+            <a:avLst>
+              <a:gd name="adj" fmla="val 166667"/>
+            </a:avLst>
           </a:prstGeom>
           <a:solidFill>
-            <a:srgbClr val="7A1524"/>
+            <a:srgbClr val="F7DCE3"/>
           </a:solidFill>
-          <a:ln/>
+          <a:ln w="12700">
+            <a:solidFill>
+              <a:srgbClr val="F7DCE3"/>
+            </a:solidFill>
+            <a:prstDash val="solid"/>
+          </a:ln>
         </p:spPr>
       </p:sp>
       <p:sp>
@@ -6395,8 +7524,8 @@
         </p:nvSpPr>
         <p:spPr>
           <a:xfrm>
-            <a:off x="566928" y="822960"/>
-            <a:ext cx="8046720" cy="1005840"/>
+            <a:off x="640080" y="676656"/>
+            <a:ext cx="7863840" cy="960120"/>
           </a:xfrm>
           <a:prstGeom prst="rect">
             <a:avLst/>
@@ -6410,14 +7539,14 @@
           <a:p>
             <a:pPr indent="0" marL="0">
               <a:lnSpc>
-                <a:spcPts val="4000"/>
+                <a:spcPts val="3800"/>
               </a:lnSpc>
               <a:buNone/>
             </a:pPr>
             <a:r>
-              <a:rPr lang="en-US" sz="2500" b="1" spc="60" kern="0" dirty="0">
-                <a:solidFill>
-                  <a:srgbClr val="2B2224"/>
+              <a:rPr lang="en-US" sz="2400" b="1" spc="80" kern="0" dirty="0">
+                <a:solidFill>
+                  <a:srgbClr val="A42647"/>
                 </a:solidFill>
                 <a:latin typeface="Yu Mincho" pitchFamily="34" charset="0"/>
                 <a:ea typeface="Yu Mincho" pitchFamily="34" charset="-122"/>
@@ -6425,19 +7554,19 @@
               </a:rPr>
               <a:t>私ファーストは、</a:t>
             </a:r>
-            <a:endParaRPr lang="en-US" sz="2500" dirty="0"/>
+            <a:endParaRPr lang="en-US" sz="2400" dirty="0"/>
           </a:p>
           <a:p>
             <a:pPr indent="0" marL="0">
               <a:lnSpc>
-                <a:spcPts val="4000"/>
+                <a:spcPts val="3800"/>
               </a:lnSpc>
               <a:buNone/>
             </a:pPr>
             <a:r>
-              <a:rPr lang="en-US" sz="2500" b="1" spc="60" kern="0" dirty="0">
-                <a:solidFill>
-                  <a:srgbClr val="2B2224"/>
+              <a:rPr lang="en-US" sz="2400" b="1" spc="80" kern="0" dirty="0">
+                <a:solidFill>
+                  <a:srgbClr val="A42647"/>
                 </a:solidFill>
                 <a:latin typeface="Yu Mincho" pitchFamily="34" charset="0"/>
                 <a:ea typeface="Yu Mincho" pitchFamily="34" charset="-122"/>
@@ -6445,7 +7574,7 @@
               </a:rPr>
               <a:t>「自分だけ優先」ではありません</a:t>
             </a:r>
-            <a:endParaRPr lang="en-US" sz="2500" dirty="0"/>
+            <a:endParaRPr lang="en-US" sz="2400" dirty="0"/>
           </a:p>
         </p:txBody>
       </p:sp>
@@ -6457,12 +7586,12 @@
         </p:nvSpPr>
         <p:spPr>
           <a:xfrm>
-            <a:off x="566928" y="2029968"/>
-            <a:ext cx="3895344" cy="1152144"/>
+            <a:off x="640080" y="2066544"/>
+            <a:ext cx="3803904" cy="1152144"/>
           </a:xfrm>
           <a:prstGeom prst="roundRect">
             <a:avLst>
-              <a:gd name="adj" fmla="val 4762"/>
+              <a:gd name="adj" fmla="val 7143"/>
             </a:avLst>
           </a:prstGeom>
           <a:solidFill>
@@ -6470,7 +7599,7 @@
           </a:solidFill>
           <a:ln w="10160">
             <a:solidFill>
-              <a:srgbClr val="E8DCDB"/>
+              <a:srgbClr val="E8D8BC"/>
             </a:solidFill>
             <a:prstDash val="solid"/>
           </a:ln>
@@ -6478,63 +7607,110 @@
       </p:sp>
       <p:sp>
         <p:nvSpPr>
-          <p:cNvPr id="6" name="Text 4"/>
-          <p:cNvSpPr/>
-          <p:nvPr/>
-        </p:nvSpPr>
-        <p:spPr>
-          <a:xfrm>
-            <a:off x="804672" y="2231136"/>
-            <a:ext cx="3419856" cy="310896"/>
-          </a:xfrm>
-          <a:prstGeom prst="rect">
-            <a:avLst/>
-          </a:prstGeom>
-          <a:noFill/>
-          <a:ln/>
-        </p:spPr>
-        <p:txBody>
-          <a:bodyPr wrap="square" rtlCol="0" anchor="ctr"/>
-          <a:lstStyle/>
-          <a:p>
-            <a:pPr indent="0" marL="0">
-              <a:buNone/>
-            </a:pPr>
-            <a:r>
-              <a:rPr lang="en-US" sz="1350" b="1" spc="40" kern="0" dirty="0">
-                <a:solidFill>
-                  <a:srgbClr val="7A1524"/>
+          <p:cNvPr id="6" name="Shape 4"/>
+          <p:cNvSpPr/>
+          <p:nvPr/>
+        </p:nvSpPr>
+        <p:spPr>
+          <a:xfrm>
+            <a:off x="841248" y="2249424"/>
+            <a:ext cx="1252728" cy="274320"/>
+          </a:xfrm>
+          <a:prstGeom prst="roundRect">
+            <a:avLst>
+              <a:gd name="adj" fmla="val 166667"/>
+            </a:avLst>
+          </a:prstGeom>
+          <a:solidFill>
+            <a:srgbClr val="F7DCE3"/>
+          </a:solidFill>
+          <a:ln w="12700">
+            <a:solidFill>
+              <a:srgbClr val="F7DCE3"/>
+            </a:solidFill>
+            <a:prstDash val="solid"/>
+          </a:ln>
+        </p:spPr>
+      </p:sp>
+      <p:sp>
+        <p:nvSpPr>
+          <p:cNvPr id="7" name="Text 5"/>
+          <p:cNvSpPr/>
+          <p:nvPr/>
+        </p:nvSpPr>
+        <p:spPr>
+          <a:xfrm>
+            <a:off x="914400" y="2221992"/>
+            <a:ext cx="3255264" cy="310896"/>
+          </a:xfrm>
+          <a:prstGeom prst="rect">
+            <a:avLst/>
+          </a:prstGeom>
+          <a:noFill/>
+          <a:ln/>
+        </p:spPr>
+        <p:txBody>
+          <a:bodyPr wrap="square" rtlCol="0" anchor="ctr"/>
+          <a:lstStyle/>
+          <a:p>
+            <a:pPr indent="0" marL="0">
+              <a:buNone/>
+            </a:pPr>
+            <a:r>
+              <a:rPr lang="en-US" sz="1300" b="1" spc="80" kern="0" dirty="0">
+                <a:solidFill>
+                  <a:srgbClr val="A42647"/>
+                </a:solidFill>
+                <a:latin typeface="Yu Mincho" pitchFamily="34" charset="0"/>
+                <a:ea typeface="Yu Mincho" pitchFamily="34" charset="-122"/>
+                <a:cs typeface="Yu Mincho" pitchFamily="34" charset="-120"/>
+              </a:rPr>
+              <a:t>ちがうもの</a:t>
+            </a:r>
+            <a:endParaRPr lang="en-US" sz="1300" dirty="0"/>
+          </a:p>
+        </p:txBody>
+      </p:sp>
+      <p:sp>
+        <p:nvSpPr>
+          <p:cNvPr id="8" name="Text 6"/>
+          <p:cNvSpPr/>
+          <p:nvPr/>
+        </p:nvSpPr>
+        <p:spPr>
+          <a:xfrm>
+            <a:off x="914400" y="2633472"/>
+            <a:ext cx="3255264" cy="420624"/>
+          </a:xfrm>
+          <a:prstGeom prst="rect">
+            <a:avLst/>
+          </a:prstGeom>
+          <a:noFill/>
+          <a:ln/>
+        </p:spPr>
+        <p:txBody>
+          <a:bodyPr wrap="square" rtlCol="0" anchor="t"/>
+          <a:lstStyle/>
+          <a:p>
+            <a:pPr indent="0" marL="0">
+              <a:lnSpc>
+                <a:spcPts val="1700"/>
+              </a:lnSpc>
+              <a:buNone/>
+            </a:pPr>
+            <a:r>
+              <a:rPr lang="en-US" sz="1150" spc="40" kern="0" dirty="0">
+                <a:solidFill>
+                  <a:srgbClr val="3F2E33"/>
                 </a:solidFill>
                 <a:latin typeface="Yu Gothic" pitchFamily="34" charset="0"/>
                 <a:ea typeface="Yu Gothic" pitchFamily="34" charset="-122"/>
                 <a:cs typeface="Yu Gothic" pitchFamily="34" charset="-120"/>
               </a:rPr>
-              <a:t>✗　ちがうもの</a:t>
-            </a:r>
-            <a:endParaRPr lang="en-US" sz="1350" dirty="0"/>
-          </a:p>
-        </p:txBody>
-      </p:sp>
-      <p:sp>
-        <p:nvSpPr>
-          <p:cNvPr id="7" name="Text 5"/>
-          <p:cNvSpPr/>
-          <p:nvPr/>
-        </p:nvSpPr>
-        <p:spPr>
-          <a:xfrm>
-            <a:off x="804672" y="2596896"/>
-            <a:ext cx="3419856" cy="384048"/>
-          </a:xfrm>
-          <a:prstGeom prst="rect">
-            <a:avLst/>
-          </a:prstGeom>
-          <a:noFill/>
-          <a:ln/>
-        </p:spPr>
-        <p:txBody>
-          <a:bodyPr wrap="square" rtlCol="0" anchor="t"/>
-          <a:lstStyle/>
+              <a:t>自分のことだけを優先する</a:t>
+            </a:r>
+            <a:endParaRPr lang="en-US" sz="1150" dirty="0"/>
+          </a:p>
           <a:p>
             <a:pPr indent="0" marL="0">
               <a:lnSpc>
@@ -6545,16 +7721,131 @@
             <a:r>
               <a:rPr lang="en-US" sz="1150" spc="40" kern="0" dirty="0">
                 <a:solidFill>
-                  <a:srgbClr val="2B2224"/>
+                  <a:srgbClr val="3F2E33"/>
                 </a:solidFill>
                 <a:latin typeface="Yu Gothic" pitchFamily="34" charset="0"/>
                 <a:ea typeface="Yu Gothic" pitchFamily="34" charset="-122"/>
                 <a:cs typeface="Yu Gothic" pitchFamily="34" charset="-120"/>
               </a:rPr>
-              <a:t>自分のことだけを優先する</a:t>
+              <a:t>誰かを後回しにする</a:t>
             </a:r>
             <a:endParaRPr lang="en-US" sz="1150" dirty="0"/>
           </a:p>
+        </p:txBody>
+      </p:sp>
+      <p:sp>
+        <p:nvSpPr>
+          <p:cNvPr id="9" name="Shape 7"/>
+          <p:cNvSpPr/>
+          <p:nvPr/>
+        </p:nvSpPr>
+        <p:spPr>
+          <a:xfrm>
+            <a:off x="4700016" y="2066544"/>
+            <a:ext cx="3803904" cy="1152144"/>
+          </a:xfrm>
+          <a:prstGeom prst="roundRect">
+            <a:avLst>
+              <a:gd name="adj" fmla="val 7143"/>
+            </a:avLst>
+          </a:prstGeom>
+          <a:solidFill>
+            <a:srgbClr val="FFFFFF"/>
+          </a:solidFill>
+          <a:ln w="16510">
+            <a:solidFill>
+              <a:srgbClr val="E8A0B4"/>
+            </a:solidFill>
+            <a:prstDash val="solid"/>
+          </a:ln>
+        </p:spPr>
+      </p:sp>
+      <p:sp>
+        <p:nvSpPr>
+          <p:cNvPr id="10" name="Shape 8"/>
+          <p:cNvSpPr/>
+          <p:nvPr/>
+        </p:nvSpPr>
+        <p:spPr>
+          <a:xfrm>
+            <a:off x="4901184" y="2249424"/>
+            <a:ext cx="1252728" cy="274320"/>
+          </a:xfrm>
+          <a:prstGeom prst="roundRect">
+            <a:avLst>
+              <a:gd name="adj" fmla="val 166667"/>
+            </a:avLst>
+          </a:prstGeom>
+          <a:solidFill>
+            <a:srgbClr val="F7DCE3"/>
+          </a:solidFill>
+          <a:ln w="12700">
+            <a:solidFill>
+              <a:srgbClr val="F7DCE3"/>
+            </a:solidFill>
+            <a:prstDash val="solid"/>
+          </a:ln>
+        </p:spPr>
+      </p:sp>
+      <p:sp>
+        <p:nvSpPr>
+          <p:cNvPr id="11" name="Text 9"/>
+          <p:cNvSpPr/>
+          <p:nvPr/>
+        </p:nvSpPr>
+        <p:spPr>
+          <a:xfrm>
+            <a:off x="4974336" y="2221992"/>
+            <a:ext cx="3255264" cy="310896"/>
+          </a:xfrm>
+          <a:prstGeom prst="rect">
+            <a:avLst/>
+          </a:prstGeom>
+          <a:noFill/>
+          <a:ln/>
+        </p:spPr>
+        <p:txBody>
+          <a:bodyPr wrap="square" rtlCol="0" anchor="ctr"/>
+          <a:lstStyle/>
+          <a:p>
+            <a:pPr indent="0" marL="0">
+              <a:buNone/>
+            </a:pPr>
+            <a:r>
+              <a:rPr lang="en-US" sz="1300" b="1" spc="80" kern="0" dirty="0">
+                <a:solidFill>
+                  <a:srgbClr val="A42647"/>
+                </a:solidFill>
+                <a:latin typeface="Yu Mincho" pitchFamily="34" charset="0"/>
+                <a:ea typeface="Yu Mincho" pitchFamily="34" charset="-122"/>
+                <a:cs typeface="Yu Mincho" pitchFamily="34" charset="-120"/>
+              </a:rPr>
+              <a:t>こちらです</a:t>
+            </a:r>
+            <a:endParaRPr lang="en-US" sz="1300" dirty="0"/>
+          </a:p>
+        </p:txBody>
+      </p:sp>
+      <p:sp>
+        <p:nvSpPr>
+          <p:cNvPr id="12" name="Text 10"/>
+          <p:cNvSpPr/>
+          <p:nvPr/>
+        </p:nvSpPr>
+        <p:spPr>
+          <a:xfrm>
+            <a:off x="4974336" y="2633472"/>
+            <a:ext cx="3255264" cy="420624"/>
+          </a:xfrm>
+          <a:prstGeom prst="rect">
+            <a:avLst/>
+          </a:prstGeom>
+          <a:noFill/>
+          <a:ln/>
+        </p:spPr>
+        <p:txBody>
+          <a:bodyPr wrap="square" rtlCol="0" anchor="t"/>
+          <a:lstStyle/>
           <a:p>
             <a:pPr indent="0" marL="0">
               <a:lnSpc>
@@ -6565,13 +7856,13 @@
             <a:r>
               <a:rPr lang="en-US" sz="1150" spc="40" kern="0" dirty="0">
                 <a:solidFill>
-                  <a:srgbClr val="2B2224"/>
+                  <a:srgbClr val="3F2E33"/>
                 </a:solidFill>
                 <a:latin typeface="Yu Gothic" pitchFamily="34" charset="0"/>
                 <a:ea typeface="Yu Gothic" pitchFamily="34" charset="-122"/>
                 <a:cs typeface="Yu Gothic" pitchFamily="34" charset="-120"/>
               </a:rPr>
-              <a:t>誰かを後回しにする</a:t>
+              <a:t>自分を、置いていかない</a:t>
             </a:r>
             <a:endParaRPr lang="en-US" sz="1150" dirty="0"/>
           </a:p>
@@ -6579,261 +7870,173 @@
       </p:sp>
       <p:sp>
         <p:nvSpPr>
-          <p:cNvPr id="8" name="Shape 6"/>
-          <p:cNvSpPr/>
-          <p:nvPr/>
-        </p:nvSpPr>
-        <p:spPr>
-          <a:xfrm>
-            <a:off x="4681728" y="2029968"/>
-            <a:ext cx="3895344" cy="1152144"/>
-          </a:xfrm>
-          <a:prstGeom prst="roundRect">
-            <a:avLst>
-              <a:gd name="adj" fmla="val 4762"/>
-            </a:avLst>
+          <p:cNvPr id="13" name="Shape 11"/>
+          <p:cNvSpPr/>
+          <p:nvPr/>
+        </p:nvSpPr>
+        <p:spPr>
+          <a:xfrm>
+            <a:off x="640080" y="3456432"/>
+            <a:ext cx="7863840" cy="10973"/>
+          </a:xfrm>
+          <a:prstGeom prst="rect">
+            <a:avLst/>
           </a:prstGeom>
           <a:solidFill>
-            <a:srgbClr val="FFFFFF"/>
+            <a:srgbClr val="E8D8BC"/>
           </a:solidFill>
-          <a:ln w="17780">
-            <a:solidFill>
-              <a:srgbClr val="7A1524"/>
-            </a:solidFill>
-            <a:prstDash val="solid"/>
-          </a:ln>
-        </p:spPr>
-      </p:sp>
-      <p:sp>
-        <p:nvSpPr>
-          <p:cNvPr id="9" name="Text 7"/>
-          <p:cNvSpPr/>
-          <p:nvPr/>
-        </p:nvSpPr>
-        <p:spPr>
-          <a:xfrm>
-            <a:off x="4919472" y="2231136"/>
-            <a:ext cx="3419856" cy="310896"/>
-          </a:xfrm>
-          <a:prstGeom prst="rect">
-            <a:avLst/>
-          </a:prstGeom>
-          <a:noFill/>
-          <a:ln/>
-        </p:spPr>
-        <p:txBody>
-          <a:bodyPr wrap="square" rtlCol="0" anchor="ctr"/>
-          <a:lstStyle/>
-          <a:p>
-            <a:pPr indent="0" marL="0">
-              <a:buNone/>
-            </a:pPr>
-            <a:r>
-              <a:rPr lang="en-US" sz="1350" b="1" spc="40" kern="0" dirty="0">
-                <a:solidFill>
-                  <a:srgbClr val="7A1524"/>
+          <a:ln/>
+        </p:spPr>
+      </p:sp>
+      <p:sp>
+        <p:nvSpPr>
+          <p:cNvPr id="14" name="Text 12"/>
+          <p:cNvSpPr/>
+          <p:nvPr/>
+        </p:nvSpPr>
+        <p:spPr>
+          <a:xfrm>
+            <a:off x="640080" y="3621024"/>
+            <a:ext cx="7863840" cy="768096"/>
+          </a:xfrm>
+          <a:prstGeom prst="rect">
+            <a:avLst/>
+          </a:prstGeom>
+          <a:noFill/>
+          <a:ln/>
+        </p:spPr>
+        <p:txBody>
+          <a:bodyPr wrap="square" rtlCol="0" anchor="ctr"/>
+          <a:lstStyle/>
+          <a:p>
+            <a:pPr indent="0" marL="0">
+              <a:lnSpc>
+                <a:spcPts val="3000"/>
+              </a:lnSpc>
+              <a:buNone/>
+            </a:pPr>
+            <a:r>
+              <a:rPr lang="en-US" sz="1850" b="1" spc="80" kern="0" dirty="0">
+                <a:solidFill>
+                  <a:srgbClr val="3F2E33"/>
+                </a:solidFill>
+                <a:latin typeface="Yu Mincho" pitchFamily="34" charset="0"/>
+                <a:ea typeface="Yu Mincho" pitchFamily="34" charset="-122"/>
+                <a:cs typeface="Yu Mincho" pitchFamily="34" charset="-120"/>
+              </a:rPr>
+              <a:t>誰かのために動くことは、変えなくていい。</a:t>
+            </a:r>
+            <a:endParaRPr lang="en-US" sz="1850" dirty="0"/>
+          </a:p>
+          <a:p>
+            <a:pPr indent="0" marL="0">
+              <a:lnSpc>
+                <a:spcPts val="3000"/>
+              </a:lnSpc>
+              <a:buNone/>
+            </a:pPr>
+            <a:r>
+              <a:rPr lang="en-US" sz="1850" b="1" spc="80" kern="0" dirty="0">
+                <a:solidFill>
+                  <a:srgbClr val="3F2E33"/>
+                </a:solidFill>
+                <a:latin typeface="Yu Mincho" pitchFamily="34" charset="0"/>
+                <a:ea typeface="Yu Mincho" pitchFamily="34" charset="-122"/>
+                <a:cs typeface="Yu Mincho" pitchFamily="34" charset="-120"/>
+              </a:rPr>
+              <a:t>その順番の中に、自分を入れるだけです。</a:t>
+            </a:r>
+            <a:endParaRPr lang="en-US" sz="1850" dirty="0"/>
+          </a:p>
+        </p:txBody>
+      </p:sp>
+      <p:sp>
+        <p:nvSpPr>
+          <p:cNvPr id="15" name="Shape 13"/>
+          <p:cNvSpPr/>
+          <p:nvPr/>
+        </p:nvSpPr>
+        <p:spPr>
+          <a:xfrm>
+            <a:off x="640080" y="4590288"/>
+            <a:ext cx="7863840" cy="10973"/>
+          </a:xfrm>
+          <a:prstGeom prst="rect">
+            <a:avLst/>
+          </a:prstGeom>
+          <a:solidFill>
+            <a:srgbClr val="E8D8BC"/>
+          </a:solidFill>
+          <a:ln/>
+        </p:spPr>
+      </p:sp>
+      <p:sp>
+        <p:nvSpPr>
+          <p:cNvPr id="16" name="Text 14"/>
+          <p:cNvSpPr/>
+          <p:nvPr/>
+        </p:nvSpPr>
+        <p:spPr>
+          <a:xfrm>
+            <a:off x="640080" y="4681728"/>
+            <a:ext cx="4572000" cy="237744"/>
+          </a:xfrm>
+          <a:prstGeom prst="rect">
+            <a:avLst/>
+          </a:prstGeom>
+          <a:noFill/>
+          <a:ln/>
+        </p:spPr>
+        <p:txBody>
+          <a:bodyPr wrap="square" rtlCol="0" anchor="ctr"/>
+          <a:lstStyle/>
+          <a:p>
+            <a:pPr indent="0" marL="0">
+              <a:buNone/>
+            </a:pPr>
+            <a:r>
+              <a:rPr lang="en-US" sz="850" spc="40" kern="0" dirty="0">
+                <a:solidFill>
+                  <a:srgbClr val="8C757C"/>
                 </a:solidFill>
                 <a:latin typeface="Yu Gothic" pitchFamily="34" charset="0"/>
                 <a:ea typeface="Yu Gothic" pitchFamily="34" charset="-122"/>
                 <a:cs typeface="Yu Gothic" pitchFamily="34" charset="-120"/>
               </a:rPr>
-              <a:t>◯　こちらです</a:t>
-            </a:r>
-            <a:endParaRPr lang="en-US" sz="1350" dirty="0"/>
-          </a:p>
-        </p:txBody>
-      </p:sp>
-      <p:sp>
-        <p:nvSpPr>
-          <p:cNvPr id="10" name="Text 8"/>
-          <p:cNvSpPr/>
-          <p:nvPr/>
-        </p:nvSpPr>
-        <p:spPr>
-          <a:xfrm>
-            <a:off x="4919472" y="2596896"/>
-            <a:ext cx="3419856" cy="384048"/>
-          </a:xfrm>
-          <a:prstGeom prst="rect">
-            <a:avLst/>
-          </a:prstGeom>
-          <a:noFill/>
-          <a:ln/>
-        </p:spPr>
-        <p:txBody>
-          <a:bodyPr wrap="square" rtlCol="0" anchor="t"/>
-          <a:lstStyle/>
-          <a:p>
-            <a:pPr indent="0" marL="0">
-              <a:lnSpc>
-                <a:spcPts val="1700"/>
-              </a:lnSpc>
-              <a:buNone/>
-            </a:pPr>
-            <a:r>
-              <a:rPr lang="en-US" sz="1150" spc="40" kern="0" dirty="0">
-                <a:solidFill>
-                  <a:srgbClr val="2B2224"/>
-                </a:solidFill>
-                <a:latin typeface="Yu Gothic" pitchFamily="34" charset="0"/>
-                <a:ea typeface="Yu Gothic" pitchFamily="34" charset="-122"/>
-                <a:cs typeface="Yu Gothic" pitchFamily="34" charset="-120"/>
-              </a:rPr>
-              <a:t>自分を、置いていかない</a:t>
-            </a:r>
-            <a:endParaRPr lang="en-US" sz="1150" dirty="0"/>
-          </a:p>
-        </p:txBody>
-      </p:sp>
-      <p:sp>
-        <p:nvSpPr>
-          <p:cNvPr id="11" name="Shape 9"/>
-          <p:cNvSpPr/>
-          <p:nvPr/>
-        </p:nvSpPr>
-        <p:spPr>
-          <a:xfrm>
-            <a:off x="566928" y="3456432"/>
-            <a:ext cx="8010144" cy="10973"/>
-          </a:xfrm>
-          <a:prstGeom prst="rect">
-            <a:avLst/>
-          </a:prstGeom>
-          <a:solidFill>
-            <a:srgbClr val="E8DCDB"/>
-          </a:solidFill>
-          <a:ln/>
-        </p:spPr>
-      </p:sp>
-      <p:sp>
-        <p:nvSpPr>
-          <p:cNvPr id="12" name="Text 10"/>
-          <p:cNvSpPr/>
-          <p:nvPr/>
-        </p:nvSpPr>
-        <p:spPr>
-          <a:xfrm>
-            <a:off x="566928" y="3639312"/>
-            <a:ext cx="8046720" cy="731520"/>
-          </a:xfrm>
-          <a:prstGeom prst="rect">
-            <a:avLst/>
-          </a:prstGeom>
-          <a:noFill/>
-          <a:ln/>
-        </p:spPr>
-        <p:txBody>
-          <a:bodyPr wrap="square" rtlCol="0" anchor="ctr"/>
-          <a:lstStyle/>
-          <a:p>
-            <a:pPr indent="0" marL="0">
-              <a:lnSpc>
-                <a:spcPts val="3000"/>
-              </a:lnSpc>
-              <a:buNone/>
-            </a:pPr>
-            <a:r>
-              <a:rPr lang="en-US" sz="1900" b="1" spc="60" kern="0" dirty="0">
-                <a:solidFill>
-                  <a:srgbClr val="2B2224"/>
-                </a:solidFill>
-                <a:latin typeface="Yu Mincho" pitchFamily="34" charset="0"/>
-                <a:ea typeface="Yu Mincho" pitchFamily="34" charset="-122"/>
-                <a:cs typeface="Yu Mincho" pitchFamily="34" charset="-120"/>
-              </a:rPr>
-              <a:t>誰かのために動くことは、変えなくていい。</a:t>
-            </a:r>
-            <a:endParaRPr lang="en-US" sz="1900" dirty="0"/>
-          </a:p>
-          <a:p>
-            <a:pPr indent="0" marL="0">
-              <a:lnSpc>
-                <a:spcPts val="3000"/>
-              </a:lnSpc>
-              <a:buNone/>
-            </a:pPr>
-            <a:r>
-              <a:rPr lang="en-US" sz="1900" b="1" spc="60" kern="0" dirty="0">
-                <a:solidFill>
-                  <a:srgbClr val="2B2224"/>
-                </a:solidFill>
-                <a:latin typeface="Yu Mincho" pitchFamily="34" charset="0"/>
-                <a:ea typeface="Yu Mincho" pitchFamily="34" charset="-122"/>
-                <a:cs typeface="Yu Mincho" pitchFamily="34" charset="-120"/>
-              </a:rPr>
-              <a:t>その順番の中に、自分を入れるだけです。</a:t>
-            </a:r>
-            <a:endParaRPr lang="en-US" sz="1900" dirty="0"/>
-          </a:p>
-        </p:txBody>
-      </p:sp>
-      <p:sp>
-        <p:nvSpPr>
-          <p:cNvPr id="13" name="Text 11"/>
-          <p:cNvSpPr/>
-          <p:nvPr/>
-        </p:nvSpPr>
-        <p:spPr>
-          <a:xfrm>
-            <a:off x="566928" y="4681728"/>
-            <a:ext cx="4114800" cy="237744"/>
-          </a:xfrm>
-          <a:prstGeom prst="rect">
-            <a:avLst/>
-          </a:prstGeom>
-          <a:noFill/>
-          <a:ln/>
-        </p:spPr>
-        <p:txBody>
-          <a:bodyPr wrap="square" rtlCol="0" anchor="ctr"/>
-          <a:lstStyle/>
-          <a:p>
-            <a:pPr indent="0" marL="0">
+              <a:t>私ファーストプログラム 5DAYS</a:t>
+            </a:r>
+            <a:endParaRPr lang="en-US" sz="850" dirty="0"/>
+          </a:p>
+        </p:txBody>
+      </p:sp>
+      <p:sp>
+        <p:nvSpPr>
+          <p:cNvPr id="17" name="Text 15"/>
+          <p:cNvSpPr/>
+          <p:nvPr/>
+        </p:nvSpPr>
+        <p:spPr>
+          <a:xfrm>
+            <a:off x="8046720" y="4681728"/>
+            <a:ext cx="457200" cy="237744"/>
+          </a:xfrm>
+          <a:prstGeom prst="rect">
+            <a:avLst/>
+          </a:prstGeom>
+          <a:noFill/>
+          <a:ln/>
+        </p:spPr>
+        <p:txBody>
+          <a:bodyPr wrap="square" rtlCol="0" anchor="ctr"/>
+          <a:lstStyle/>
+          <a:p>
+            <a:pPr algn="r" indent="0" marL="0">
               <a:buNone/>
             </a:pPr>
             <a:r>
               <a:rPr lang="en-US" sz="850" spc="40" kern="0" dirty="0">
                 <a:solidFill>
-                  <a:srgbClr val="7A6E6B"/>
-                </a:solidFill>
-                <a:latin typeface="Yu Gothic" pitchFamily="34" charset="0"/>
-                <a:ea typeface="Yu Gothic" pitchFamily="34" charset="-122"/>
-                <a:cs typeface="Yu Gothic" pitchFamily="34" charset="-120"/>
-              </a:rPr>
-              <a:t>私ファーストプログラム 5DAYS</a:t>
-            </a:r>
-            <a:endParaRPr lang="en-US" sz="850" dirty="0"/>
-          </a:p>
-        </p:txBody>
-      </p:sp>
-      <p:sp>
-        <p:nvSpPr>
-          <p:cNvPr id="14" name="Text 12"/>
-          <p:cNvSpPr/>
-          <p:nvPr/>
-        </p:nvSpPr>
-        <p:spPr>
-          <a:xfrm>
-            <a:off x="8138160" y="4681728"/>
-            <a:ext cx="457200" cy="237744"/>
-          </a:xfrm>
-          <a:prstGeom prst="rect">
-            <a:avLst/>
-          </a:prstGeom>
-          <a:noFill/>
-          <a:ln/>
-        </p:spPr>
-        <p:txBody>
-          <a:bodyPr wrap="square" rtlCol="0" anchor="ctr"/>
-          <a:lstStyle/>
-          <a:p>
-            <a:pPr algn="r" indent="0" marL="0">
-              <a:buNone/>
-            </a:pPr>
-            <a:r>
-              <a:rPr lang="en-US" sz="850" spc="40" kern="0" dirty="0">
-                <a:solidFill>
-                  <a:srgbClr val="7A6E6B"/>
+                  <a:srgbClr val="8C757C"/>
                 </a:solidFill>
                 <a:latin typeface="Yu Gothic" pitchFamily="34" charset="0"/>
                 <a:ea typeface="Yu Gothic" pitchFamily="34" charset="-122"/>
@@ -6859,7 +8062,7 @@
     <p:bg>
       <p:bgPr>
         <a:solidFill>
-          <a:srgbClr val="FDF7F7"/>
+          <a:srgbClr val="FDF5F6"/>
         </a:solidFill>
       </p:bgPr>
     </p:bg>
@@ -6885,26 +8088,26 @@
         </p:nvSpPr>
         <p:spPr>
           <a:xfrm>
-            <a:off x="566928" y="384048"/>
-            <a:ext cx="8046720" cy="237744"/>
-          </a:xfrm>
-          <a:prstGeom prst="rect">
-            <a:avLst/>
-          </a:prstGeom>
-          <a:noFill/>
-          <a:ln/>
-        </p:spPr>
-        <p:txBody>
-          <a:bodyPr wrap="square" rtlCol="0" anchor="ctr"/>
-          <a:lstStyle/>
-          <a:p>
-            <a:pPr indent="0" marL="0">
-              <a:buNone/>
-            </a:pPr>
-            <a:r>
-              <a:rPr lang="en-US" sz="1000" b="1" spc="160" kern="0" dirty="0">
-                <a:solidFill>
-                  <a:srgbClr val="7A1524"/>
+            <a:off x="640080" y="420624"/>
+            <a:ext cx="7863840" cy="237744"/>
+          </a:xfrm>
+          <a:prstGeom prst="rect">
+            <a:avLst/>
+          </a:prstGeom>
+          <a:noFill/>
+          <a:ln/>
+        </p:spPr>
+        <p:txBody>
+          <a:bodyPr wrap="square" rtlCol="0" anchor="ctr"/>
+          <a:lstStyle/>
+          <a:p>
+            <a:pPr indent="0" marL="0">
+              <a:buNone/>
+            </a:pPr>
+            <a:r>
+              <a:rPr lang="en-US" sz="950" b="1" spc="200" kern="0" dirty="0">
+                <a:solidFill>
+                  <a:srgbClr val="C4A06A"/>
                 </a:solidFill>
                 <a:latin typeface="Yu Gothic" pitchFamily="34" charset="0"/>
                 <a:ea typeface="Yu Gothic" pitchFamily="34" charset="-122"/>
@@ -6912,7 +8115,7 @@
               </a:rPr>
               <a:t>MINDSET</a:t>
             </a:r>
-            <a:endParaRPr lang="en-US" sz="1000" dirty="0"/>
+            <a:endParaRPr lang="en-US" sz="950" dirty="0"/>
           </a:p>
         </p:txBody>
       </p:sp>
@@ -6924,16 +8127,23 @@
         </p:nvSpPr>
         <p:spPr>
           <a:xfrm>
-            <a:off x="566928" y="667512"/>
-            <a:ext cx="457200" cy="32004"/>
-          </a:xfrm>
-          <a:prstGeom prst="rect">
-            <a:avLst/>
+            <a:off x="640080" y="822960"/>
+            <a:ext cx="4114800" cy="274320"/>
+          </a:xfrm>
+          <a:prstGeom prst="roundRect">
+            <a:avLst>
+              <a:gd name="adj" fmla="val 166667"/>
+            </a:avLst>
           </a:prstGeom>
           <a:solidFill>
-            <a:srgbClr val="7A1524"/>
+            <a:srgbClr val="F7DCE3"/>
           </a:solidFill>
-          <a:ln/>
+          <a:ln w="12700">
+            <a:solidFill>
+              <a:srgbClr val="F7DCE3"/>
+            </a:solidFill>
+            <a:prstDash val="solid"/>
+          </a:ln>
         </p:spPr>
       </p:sp>
       <p:sp>
@@ -6944,8 +8154,8 @@
         </p:nvSpPr>
         <p:spPr>
           <a:xfrm>
-            <a:off x="566928" y="822960"/>
-            <a:ext cx="8046720" cy="640080"/>
+            <a:off x="640080" y="676656"/>
+            <a:ext cx="7863840" cy="566928"/>
           </a:xfrm>
           <a:prstGeom prst="rect">
             <a:avLst/>
@@ -6964,9 +8174,9 @@
               <a:buNone/>
             </a:pPr>
             <a:r>
-              <a:rPr lang="en-US" sz="2600" b="1" spc="60" kern="0" dirty="0">
-                <a:solidFill>
-                  <a:srgbClr val="2B2224"/>
+              <a:rPr lang="en-US" sz="2500" b="1" spc="80" kern="0" dirty="0">
+                <a:solidFill>
+                  <a:srgbClr val="A42647"/>
                 </a:solidFill>
                 <a:latin typeface="Yu Mincho" pitchFamily="34" charset="0"/>
                 <a:ea typeface="Yu Mincho" pitchFamily="34" charset="-122"/>
@@ -6974,7 +8184,7 @@
               </a:rPr>
               <a:t>3つの思い込みを、外します</a:t>
             </a:r>
-            <a:endParaRPr lang="en-US" sz="2600" dirty="0"/>
+            <a:endParaRPr lang="en-US" sz="2500" dirty="0"/>
           </a:p>
         </p:txBody>
       </p:sp>
@@ -6986,12 +8196,12 @@
         </p:nvSpPr>
         <p:spPr>
           <a:xfrm>
-            <a:off x="566928" y="1591056"/>
-            <a:ext cx="8010144" cy="822960"/>
+            <a:off x="640080" y="1572768"/>
+            <a:ext cx="7863840" cy="822960"/>
           </a:xfrm>
           <a:prstGeom prst="roundRect">
             <a:avLst>
-              <a:gd name="adj" fmla="val 6667"/>
+              <a:gd name="adj" fmla="val 10000"/>
             </a:avLst>
           </a:prstGeom>
           <a:solidFill>
@@ -6999,7 +8209,7 @@
           </a:solidFill>
           <a:ln w="10160">
             <a:solidFill>
-              <a:srgbClr val="E8DCDB"/>
+              <a:srgbClr val="E8D8BC"/>
             </a:solidFill>
             <a:prstDash val="solid"/>
           </a:ln>
@@ -7013,26 +8223,26 @@
         </p:nvSpPr>
         <p:spPr>
           <a:xfrm>
-            <a:off x="841248" y="1728216"/>
-            <a:ext cx="7498080" cy="274320"/>
-          </a:xfrm>
-          <a:prstGeom prst="rect">
-            <a:avLst/>
-          </a:prstGeom>
-          <a:noFill/>
-          <a:ln/>
-        </p:spPr>
-        <p:txBody>
-          <a:bodyPr wrap="square" rtlCol="0" anchor="ctr"/>
-          <a:lstStyle/>
-          <a:p>
-            <a:pPr indent="0" marL="0">
-              <a:buNone/>
-            </a:pPr>
-            <a:r>
-              <a:rPr lang="en-US" sz="1400" b="1" spc="40" kern="0" dirty="0">
-                <a:solidFill>
-                  <a:srgbClr val="7A6E6B"/>
+            <a:off x="914400" y="1709928"/>
+            <a:ext cx="7223760" cy="274320"/>
+          </a:xfrm>
+          <a:prstGeom prst="rect">
+            <a:avLst/>
+          </a:prstGeom>
+          <a:noFill/>
+          <a:ln/>
+        </p:spPr>
+        <p:txBody>
+          <a:bodyPr wrap="square" rtlCol="0" anchor="ctr"/>
+          <a:lstStyle/>
+          <a:p>
+            <a:pPr indent="0" marL="0">
+              <a:buNone/>
+            </a:pPr>
+            <a:r>
+              <a:rPr lang="en-US" sz="1350" b="1" spc="40" kern="0" dirty="0">
+                <a:solidFill>
+                  <a:srgbClr val="8C757C"/>
                 </a:solidFill>
                 <a:latin typeface="Yu Gothic" pitchFamily="34" charset="0"/>
                 <a:ea typeface="Yu Gothic" pitchFamily="34" charset="-122"/>
@@ -7040,7 +8250,7 @@
               </a:rPr>
               <a:t>「時間がないから無理」</a:t>
             </a:r>
-            <a:endParaRPr lang="en-US" sz="1400" dirty="0"/>
+            <a:endParaRPr lang="en-US" sz="1350" dirty="0"/>
           </a:p>
         </p:txBody>
       </p:sp>
@@ -7052,8 +8262,8 @@
         </p:nvSpPr>
         <p:spPr>
           <a:xfrm>
-            <a:off x="841248" y="2029968"/>
-            <a:ext cx="7498080" cy="292608"/>
+            <a:off x="914400" y="2011680"/>
+            <a:ext cx="7223760" cy="292608"/>
           </a:xfrm>
           <a:prstGeom prst="rect">
             <a:avLst/>
@@ -7072,9 +8282,9 @@
               <a:buNone/>
             </a:pPr>
             <a:r>
-              <a:rPr lang="en-US" sz="1350" b="1" spc="40" kern="0" dirty="0">
-                <a:solidFill>
-                  <a:srgbClr val="7A1524"/>
+              <a:rPr lang="en-US" sz="1300" b="1" spc="40" kern="0" dirty="0">
+                <a:solidFill>
+                  <a:srgbClr val="A42647"/>
                 </a:solidFill>
                 <a:latin typeface="Yu Gothic" pitchFamily="34" charset="0"/>
                 <a:ea typeface="Yu Gothic" pitchFamily="34" charset="-122"/>
@@ -7082,7 +8292,7 @@
               </a:rPr>
               <a:t>→　朝15分だけでも、一度自分に意識を戻す体験はできます</a:t>
             </a:r>
-            <a:endParaRPr lang="en-US" sz="1350" dirty="0"/>
+            <a:endParaRPr lang="en-US" sz="1300" dirty="0"/>
           </a:p>
         </p:txBody>
       </p:sp>
@@ -7094,12 +8304,12 @@
         </p:nvSpPr>
         <p:spPr>
           <a:xfrm>
-            <a:off x="566928" y="2523744"/>
-            <a:ext cx="8010144" cy="822960"/>
+            <a:off x="640080" y="2505456"/>
+            <a:ext cx="7863840" cy="822960"/>
           </a:xfrm>
           <a:prstGeom prst="roundRect">
             <a:avLst>
-              <a:gd name="adj" fmla="val 6667"/>
+              <a:gd name="adj" fmla="val 10000"/>
             </a:avLst>
           </a:prstGeom>
           <a:solidFill>
@@ -7107,7 +8317,7 @@
           </a:solidFill>
           <a:ln w="10160">
             <a:solidFill>
-              <a:srgbClr val="E8DCDB"/>
+              <a:srgbClr val="E8D8BC"/>
             </a:solidFill>
             <a:prstDash val="solid"/>
           </a:ln>
@@ -7121,26 +8331,26 @@
         </p:nvSpPr>
         <p:spPr>
           <a:xfrm>
-            <a:off x="841248" y="2660904"/>
-            <a:ext cx="7498080" cy="274320"/>
-          </a:xfrm>
-          <a:prstGeom prst="rect">
-            <a:avLst/>
-          </a:prstGeom>
-          <a:noFill/>
-          <a:ln/>
-        </p:spPr>
-        <p:txBody>
-          <a:bodyPr wrap="square" rtlCol="0" anchor="ctr"/>
-          <a:lstStyle/>
-          <a:p>
-            <a:pPr indent="0" marL="0">
-              <a:buNone/>
-            </a:pPr>
-            <a:r>
-              <a:rPr lang="en-US" sz="1400" b="1" spc="40" kern="0" dirty="0">
-                <a:solidFill>
-                  <a:srgbClr val="7A6E6B"/>
+            <a:off x="914400" y="2642616"/>
+            <a:ext cx="7223760" cy="274320"/>
+          </a:xfrm>
+          <a:prstGeom prst="rect">
+            <a:avLst/>
+          </a:prstGeom>
+          <a:noFill/>
+          <a:ln/>
+        </p:spPr>
+        <p:txBody>
+          <a:bodyPr wrap="square" rtlCol="0" anchor="ctr"/>
+          <a:lstStyle/>
+          <a:p>
+            <a:pPr indent="0" marL="0">
+              <a:buNone/>
+            </a:pPr>
+            <a:r>
+              <a:rPr lang="en-US" sz="1350" b="1" spc="40" kern="0" dirty="0">
+                <a:solidFill>
+                  <a:srgbClr val="8C757C"/>
                 </a:solidFill>
                 <a:latin typeface="Yu Gothic" pitchFamily="34" charset="0"/>
                 <a:ea typeface="Yu Gothic" pitchFamily="34" charset="-122"/>
@@ -7148,7 +8358,7 @@
               </a:rPr>
               <a:t>「自己流でやってきたから、今さら聞けない」</a:t>
             </a:r>
-            <a:endParaRPr lang="en-US" sz="1400" dirty="0"/>
+            <a:endParaRPr lang="en-US" sz="1350" dirty="0"/>
           </a:p>
         </p:txBody>
       </p:sp>
@@ -7160,8 +8370,8 @@
         </p:nvSpPr>
         <p:spPr>
           <a:xfrm>
-            <a:off x="841248" y="2962656"/>
-            <a:ext cx="7498080" cy="292608"/>
+            <a:off x="914400" y="2944368"/>
+            <a:ext cx="7223760" cy="292608"/>
           </a:xfrm>
           <a:prstGeom prst="rect">
             <a:avLst/>
@@ -7180,9 +8390,9 @@
               <a:buNone/>
             </a:pPr>
             <a:r>
-              <a:rPr lang="en-US" sz="1350" b="1" spc="40" kern="0" dirty="0">
-                <a:solidFill>
-                  <a:srgbClr val="7A1524"/>
+              <a:rPr lang="en-US" sz="1300" b="1" spc="40" kern="0" dirty="0">
+                <a:solidFill>
+                  <a:srgbClr val="A42647"/>
                 </a:solidFill>
                 <a:latin typeface="Yu Gothic" pitchFamily="34" charset="0"/>
                 <a:ea typeface="Yu Gothic" pitchFamily="34" charset="-122"/>
@@ -7190,7 +8400,7 @@
               </a:rPr>
               <a:t>→　身体も所作も、一度プロから習うと新しい気づきが生まれます</a:t>
             </a:r>
-            <a:endParaRPr lang="en-US" sz="1350" dirty="0"/>
+            <a:endParaRPr lang="en-US" sz="1300" dirty="0"/>
           </a:p>
         </p:txBody>
       </p:sp>
@@ -7202,12 +8412,12 @@
         </p:nvSpPr>
         <p:spPr>
           <a:xfrm>
-            <a:off x="566928" y="3456432"/>
-            <a:ext cx="8010144" cy="1078992"/>
+            <a:off x="640080" y="3438144"/>
+            <a:ext cx="7863840" cy="1078992"/>
           </a:xfrm>
           <a:prstGeom prst="roundRect">
             <a:avLst>
-              <a:gd name="adj" fmla="val 5085"/>
+              <a:gd name="adj" fmla="val 7627"/>
             </a:avLst>
           </a:prstGeom>
           <a:solidFill>
@@ -7215,7 +8425,7 @@
           </a:solidFill>
           <a:ln w="10160">
             <a:solidFill>
-              <a:srgbClr val="E8DCDB"/>
+              <a:srgbClr val="E8D8BC"/>
             </a:solidFill>
             <a:prstDash val="solid"/>
           </a:ln>
@@ -7229,26 +8439,26 @@
         </p:nvSpPr>
         <p:spPr>
           <a:xfrm>
-            <a:off x="841248" y="3593592"/>
-            <a:ext cx="7498080" cy="274320"/>
-          </a:xfrm>
-          <a:prstGeom prst="rect">
-            <a:avLst/>
-          </a:prstGeom>
-          <a:noFill/>
-          <a:ln/>
-        </p:spPr>
-        <p:txBody>
-          <a:bodyPr wrap="square" rtlCol="0" anchor="ctr"/>
-          <a:lstStyle/>
-          <a:p>
-            <a:pPr indent="0" marL="0">
-              <a:buNone/>
-            </a:pPr>
-            <a:r>
-              <a:rPr lang="en-US" sz="1400" b="1" spc="40" kern="0" dirty="0">
-                <a:solidFill>
-                  <a:srgbClr val="7A6E6B"/>
+            <a:off x="914400" y="3575304"/>
+            <a:ext cx="7223760" cy="274320"/>
+          </a:xfrm>
+          <a:prstGeom prst="rect">
+            <a:avLst/>
+          </a:prstGeom>
+          <a:noFill/>
+          <a:ln/>
+        </p:spPr>
+        <p:txBody>
+          <a:bodyPr wrap="square" rtlCol="0" anchor="ctr"/>
+          <a:lstStyle/>
+          <a:p>
+            <a:pPr indent="0" marL="0">
+              <a:buNone/>
+            </a:pPr>
+            <a:r>
+              <a:rPr lang="en-US" sz="1350" b="1" spc="40" kern="0" dirty="0">
+                <a:solidFill>
+                  <a:srgbClr val="8C757C"/>
                 </a:solidFill>
                 <a:latin typeface="Yu Gothic" pitchFamily="34" charset="0"/>
                 <a:ea typeface="Yu Gothic" pitchFamily="34" charset="-122"/>
@@ -7256,7 +8466,7 @@
               </a:rPr>
               <a:t>「5日間やっても、変われないかも」</a:t>
             </a:r>
-            <a:endParaRPr lang="en-US" sz="1400" dirty="0"/>
+            <a:endParaRPr lang="en-US" sz="1350" dirty="0"/>
           </a:p>
         </p:txBody>
       </p:sp>
@@ -7268,8 +8478,8 @@
         </p:nvSpPr>
         <p:spPr>
           <a:xfrm>
-            <a:off x="841248" y="3895344"/>
-            <a:ext cx="7498080" cy="548640"/>
+            <a:off x="914400" y="3877056"/>
+            <a:ext cx="7223760" cy="548640"/>
           </a:xfrm>
           <a:prstGeom prst="rect">
             <a:avLst/>
@@ -7288,9 +8498,9 @@
               <a:buNone/>
             </a:pPr>
             <a:r>
-              <a:rPr lang="en-US" sz="1350" b="1" spc="40" kern="0" dirty="0">
-                <a:solidFill>
-                  <a:srgbClr val="7A1524"/>
+              <a:rPr lang="en-US" sz="1300" b="1" spc="40" kern="0" dirty="0">
+                <a:solidFill>
+                  <a:srgbClr val="A42647"/>
                 </a:solidFill>
                 <a:latin typeface="Yu Gothic" pitchFamily="34" charset="0"/>
                 <a:ea typeface="Yu Gothic" pitchFamily="34" charset="-122"/>
@@ -7298,7 +8508,7 @@
               </a:rPr>
               <a:t>→　5日で人生を変えるのではなく、</a:t>
             </a:r>
-            <a:endParaRPr lang="en-US" sz="1350" dirty="0"/>
+            <a:endParaRPr lang="en-US" sz="1300" dirty="0"/>
           </a:p>
           <a:p>
             <a:pPr indent="0" marL="0">
@@ -7308,30 +8518,50 @@
               <a:buNone/>
             </a:pPr>
             <a:r>
-              <a:rPr lang="en-US" sz="1350" b="1" spc="40" kern="0" dirty="0">
-                <a:solidFill>
-                  <a:srgbClr val="7A1524"/>
+              <a:rPr lang="en-US" sz="1300" b="1" spc="40" kern="0" dirty="0">
+                <a:solidFill>
+                  <a:srgbClr val="A42647"/>
                 </a:solidFill>
                 <a:latin typeface="Yu Gothic" pitchFamily="34" charset="0"/>
                 <a:ea typeface="Yu Gothic" pitchFamily="34" charset="-122"/>
                 <a:cs typeface="Yu Gothic" pitchFamily="34" charset="-120"/>
               </a:rPr>
-              <a:t>「自分に戻る方法」をひとつ持ち帰ります</a:t>
-            </a:r>
-            <a:endParaRPr lang="en-US" sz="1350" dirty="0"/>
-          </a:p>
-        </p:txBody>
-      </p:sp>
-      <p:sp>
-        <p:nvSpPr>
-          <p:cNvPr id="14" name="Text 12"/>
-          <p:cNvSpPr/>
-          <p:nvPr/>
-        </p:nvSpPr>
-        <p:spPr>
-          <a:xfrm>
-            <a:off x="566928" y="4681728"/>
-            <a:ext cx="4114800" cy="237744"/>
+              <a:t>　　　「自分に戻る方法」をひとつ持ち帰ります</a:t>
+            </a:r>
+            <a:endParaRPr lang="en-US" sz="1300" dirty="0"/>
+          </a:p>
+        </p:txBody>
+      </p:sp>
+      <p:sp>
+        <p:nvSpPr>
+          <p:cNvPr id="14" name="Shape 12"/>
+          <p:cNvSpPr/>
+          <p:nvPr/>
+        </p:nvSpPr>
+        <p:spPr>
+          <a:xfrm>
+            <a:off x="640080" y="4590288"/>
+            <a:ext cx="7863840" cy="10973"/>
+          </a:xfrm>
+          <a:prstGeom prst="rect">
+            <a:avLst/>
+          </a:prstGeom>
+          <a:solidFill>
+            <a:srgbClr val="E8D8BC"/>
+          </a:solidFill>
+          <a:ln/>
+        </p:spPr>
+      </p:sp>
+      <p:sp>
+        <p:nvSpPr>
+          <p:cNvPr id="15" name="Text 13"/>
+          <p:cNvSpPr/>
+          <p:nvPr/>
+        </p:nvSpPr>
+        <p:spPr>
+          <a:xfrm>
+            <a:off x="640080" y="4681728"/>
+            <a:ext cx="4572000" cy="237744"/>
           </a:xfrm>
           <a:prstGeom prst="rect">
             <a:avLst/>
@@ -7349,7 +8579,7 @@
             <a:r>
               <a:rPr lang="en-US" sz="850" spc="40" kern="0" dirty="0">
                 <a:solidFill>
-                  <a:srgbClr val="7A6E6B"/>
+                  <a:srgbClr val="8C757C"/>
                 </a:solidFill>
                 <a:latin typeface="Yu Gothic" pitchFamily="34" charset="0"/>
                 <a:ea typeface="Yu Gothic" pitchFamily="34" charset="-122"/>
@@ -7363,13 +8593,13 @@
       </p:sp>
       <p:sp>
         <p:nvSpPr>
-          <p:cNvPr id="15" name="Text 13"/>
-          <p:cNvSpPr/>
-          <p:nvPr/>
-        </p:nvSpPr>
-        <p:spPr>
-          <a:xfrm>
-            <a:off x="8138160" y="4681728"/>
+          <p:cNvPr id="16" name="Text 14"/>
+          <p:cNvSpPr/>
+          <p:nvPr/>
+        </p:nvSpPr>
+        <p:spPr>
+          <a:xfrm>
+            <a:off x="8046720" y="4681728"/>
             <a:ext cx="457200" cy="237744"/>
           </a:xfrm>
           <a:prstGeom prst="rect">
@@ -7388,7 +8618,7 @@
             <a:r>
               <a:rPr lang="en-US" sz="850" spc="40" kern="0" dirty="0">
                 <a:solidFill>
-                  <a:srgbClr val="7A6E6B"/>
+                  <a:srgbClr val="8C757C"/>
                 </a:solidFill>
                 <a:latin typeface="Yu Gothic" pitchFamily="34" charset="0"/>
                 <a:ea typeface="Yu Gothic" pitchFamily="34" charset="-122"/>
@@ -7414,7 +8644,7 @@
     <p:bg>
       <p:bgPr>
         <a:solidFill>
-          <a:srgbClr val="7A1524"/>
+          <a:srgbClr val="FDF5F6"/>
         </a:solidFill>
       </p:bgPr>
     </p:bg>
@@ -7434,14 +8664,41 @@
       </p:grpSpPr>
       <p:sp>
         <p:nvSpPr>
-          <p:cNvPr id="2" name="Text 0"/>
-          <p:cNvSpPr/>
-          <p:nvPr/>
-        </p:nvSpPr>
-        <p:spPr>
-          <a:xfrm>
-            <a:off x="822960" y="1207008"/>
-            <a:ext cx="7498080" cy="256032"/>
+          <p:cNvPr id="2" name="Shape 0"/>
+          <p:cNvSpPr/>
+          <p:nvPr/>
+        </p:nvSpPr>
+        <p:spPr>
+          <a:xfrm>
+            <a:off x="182880" y="182880"/>
+            <a:ext cx="8778240" cy="4777740"/>
+          </a:xfrm>
+          <a:prstGeom prst="roundRect">
+            <a:avLst>
+              <a:gd name="adj" fmla="val 766"/>
+            </a:avLst>
+          </a:prstGeom>
+          <a:solidFill>
+            <a:srgbClr val="FDF5F6"/>
+          </a:solidFill>
+          <a:ln w="9525">
+            <a:solidFill>
+              <a:srgbClr val="E8D8BC"/>
+            </a:solidFill>
+            <a:prstDash val="solid"/>
+          </a:ln>
+        </p:spPr>
+      </p:sp>
+      <p:sp>
+        <p:nvSpPr>
+          <p:cNvPr id="3" name="Text 1"/>
+          <p:cNvSpPr/>
+          <p:nvPr/>
+        </p:nvSpPr>
+        <p:spPr>
+          <a:xfrm>
+            <a:off x="640080" y="1188720"/>
+            <a:ext cx="7863840" cy="256032"/>
           </a:xfrm>
           <a:prstGeom prst="rect">
             <a:avLst/>
@@ -7457,15 +8714,15 @@
               <a:buNone/>
             </a:pPr>
             <a:r>
-              <a:rPr lang="en-US" sz="1000" b="1" spc="220" kern="0" dirty="0">
-                <a:solidFill>
-                  <a:srgbClr val="E7C9A8"/>
+              <a:rPr lang="en-US" sz="1000" b="1" spc="240" kern="0" dirty="0">
+                <a:solidFill>
+                  <a:srgbClr val="C4A06A"/>
                 </a:solidFill>
                 <a:latin typeface="Yu Gothic" pitchFamily="34" charset="0"/>
                 <a:ea typeface="Yu Gothic" pitchFamily="34" charset="-122"/>
                 <a:cs typeface="Yu Gothic" pitchFamily="34" charset="-120"/>
               </a:rPr>
-              <a:t>THE QUESTION</a:t>
+              <a:t>THE  QUESTION</a:t>
             </a:r>
             <a:endParaRPr lang="en-US" sz="1000" dirty="0"/>
           </a:p>
@@ -7473,14 +8730,41 @@
       </p:sp>
       <p:sp>
         <p:nvSpPr>
-          <p:cNvPr id="3" name="Text 1"/>
-          <p:cNvSpPr/>
-          <p:nvPr/>
-        </p:nvSpPr>
-        <p:spPr>
-          <a:xfrm>
-            <a:off x="640080" y="1700784"/>
-            <a:ext cx="7863840" cy="822960"/>
+          <p:cNvPr id="4" name="Shape 2"/>
+          <p:cNvSpPr/>
+          <p:nvPr/>
+        </p:nvSpPr>
+        <p:spPr>
+          <a:xfrm>
+            <a:off x="1755648" y="1682496"/>
+            <a:ext cx="5632704" cy="841248"/>
+          </a:xfrm>
+          <a:prstGeom prst="roundRect">
+            <a:avLst>
+              <a:gd name="adj" fmla="val 54348"/>
+            </a:avLst>
+          </a:prstGeom>
+          <a:solidFill>
+            <a:srgbClr val="F7DCE3"/>
+          </a:solidFill>
+          <a:ln w="12700">
+            <a:solidFill>
+              <a:srgbClr val="F7DCE3"/>
+            </a:solidFill>
+            <a:prstDash val="solid"/>
+          </a:ln>
+        </p:spPr>
+      </p:sp>
+      <p:sp>
+        <p:nvSpPr>
+          <p:cNvPr id="5" name="Text 3"/>
+          <p:cNvSpPr/>
+          <p:nvPr/>
+        </p:nvSpPr>
+        <p:spPr>
+          <a:xfrm>
+            <a:off x="640080" y="1664208"/>
+            <a:ext cx="7863840" cy="877824"/>
           </a:xfrm>
           <a:prstGeom prst="rect">
             <a:avLst/>
@@ -7496,9 +8780,9 @@
               <a:buNone/>
             </a:pPr>
             <a:r>
-              <a:rPr lang="en-US" sz="3600" b="1" spc="60" kern="0" dirty="0">
-                <a:solidFill>
-                  <a:srgbClr val="FFFFFF"/>
+              <a:rPr lang="en-US" sz="3400" b="1" spc="80" kern="0" dirty="0">
+                <a:solidFill>
+                  <a:srgbClr val="A42647"/>
                 </a:solidFill>
                 <a:latin typeface="Yu Mincho" pitchFamily="34" charset="0"/>
                 <a:ea typeface="Yu Mincho" pitchFamily="34" charset="-122"/>
@@ -7506,40 +8790,40 @@
               </a:rPr>
               <a:t>「今日の私、どうしたい？」</a:t>
             </a:r>
-            <a:endParaRPr lang="en-US" sz="3600" dirty="0"/>
-          </a:p>
-        </p:txBody>
-      </p:sp>
-      <p:sp>
-        <p:nvSpPr>
-          <p:cNvPr id="4" name="Shape 2"/>
-          <p:cNvSpPr/>
-          <p:nvPr/>
-        </p:nvSpPr>
-        <p:spPr>
-          <a:xfrm>
-            <a:off x="3977640" y="2743200"/>
-            <a:ext cx="1188720" cy="22860"/>
+            <a:endParaRPr lang="en-US" sz="3400" dirty="0"/>
+          </a:p>
+        </p:txBody>
+      </p:sp>
+      <p:sp>
+        <p:nvSpPr>
+          <p:cNvPr id="6" name="Shape 4"/>
+          <p:cNvSpPr/>
+          <p:nvPr/>
+        </p:nvSpPr>
+        <p:spPr>
+          <a:xfrm>
+            <a:off x="3977640" y="2798064"/>
+            <a:ext cx="1188720" cy="10973"/>
           </a:xfrm>
           <a:prstGeom prst="rect">
             <a:avLst/>
           </a:prstGeom>
           <a:solidFill>
-            <a:srgbClr val="E7C9A8"/>
+            <a:srgbClr val="E8D8BC"/>
           </a:solidFill>
           <a:ln/>
         </p:spPr>
       </p:sp>
       <p:sp>
         <p:nvSpPr>
-          <p:cNvPr id="5" name="Text 3"/>
-          <p:cNvSpPr/>
-          <p:nvPr/>
-        </p:nvSpPr>
-        <p:spPr>
-          <a:xfrm>
-            <a:off x="822960" y="2980944"/>
-            <a:ext cx="7498080" cy="292608"/>
+          <p:cNvPr id="7" name="Text 5"/>
+          <p:cNvSpPr/>
+          <p:nvPr/>
+        </p:nvSpPr>
+        <p:spPr>
+          <a:xfrm>
+            <a:off x="640080" y="3017520"/>
+            <a:ext cx="7863840" cy="292608"/>
           </a:xfrm>
           <a:prstGeom prst="rect">
             <a:avLst/>
@@ -7555,9 +8839,9 @@
               <a:buNone/>
             </a:pPr>
             <a:r>
-              <a:rPr lang="en-US" sz="1500" spc="40" kern="0" dirty="0">
-                <a:solidFill>
-                  <a:srgbClr val="F0DEDE"/>
+              <a:rPr lang="en-US" sz="1450" spc="40" kern="0" dirty="0">
+                <a:solidFill>
+                  <a:srgbClr val="8C757C"/>
                 </a:solidFill>
                 <a:latin typeface="Yu Gothic" pitchFamily="34" charset="0"/>
                 <a:ea typeface="Yu Gothic" pitchFamily="34" charset="-122"/>
@@ -7565,20 +8849,20 @@
               </a:rPr>
               <a:t>この5日間の、共通の問いです。</a:t>
             </a:r>
-            <a:endParaRPr lang="en-US" sz="1500" dirty="0"/>
-          </a:p>
-        </p:txBody>
-      </p:sp>
-      <p:sp>
-        <p:nvSpPr>
-          <p:cNvPr id="6" name="Text 4"/>
-          <p:cNvSpPr/>
-          <p:nvPr/>
-        </p:nvSpPr>
-        <p:spPr>
-          <a:xfrm>
-            <a:off x="822960" y="3401568"/>
-            <a:ext cx="7498080" cy="292608"/>
+            <a:endParaRPr lang="en-US" sz="1450" dirty="0"/>
+          </a:p>
+        </p:txBody>
+      </p:sp>
+      <p:sp>
+        <p:nvSpPr>
+          <p:cNvPr id="8" name="Text 6"/>
+          <p:cNvSpPr/>
+          <p:nvPr/>
+        </p:nvSpPr>
+        <p:spPr>
+          <a:xfrm>
+            <a:off x="640080" y="3419856"/>
+            <a:ext cx="7863840" cy="329184"/>
           </a:xfrm>
           <a:prstGeom prst="rect">
             <a:avLst/>
@@ -7594,56 +8878,56 @@
               <a:buNone/>
             </a:pPr>
             <a:r>
-              <a:rPr lang="en-US" sz="1500" b="1" spc="40" kern="0" dirty="0">
-                <a:solidFill>
-                  <a:srgbClr val="FFFFFF"/>
+              <a:rPr lang="en-US" sz="1700" b="1" spc="80" kern="0" dirty="0">
+                <a:solidFill>
+                  <a:srgbClr val="A42647"/>
+                </a:solidFill>
+                <a:latin typeface="Yu Mincho" pitchFamily="34" charset="0"/>
+                <a:ea typeface="Yu Mincho" pitchFamily="34" charset="-122"/>
+                <a:cs typeface="Yu Mincho" pitchFamily="34" charset="-120"/>
+              </a:rPr>
+              <a:t>正解を出すためではなく、自分の声を聞くために。</a:t>
+            </a:r>
+            <a:endParaRPr lang="en-US" sz="1700" dirty="0"/>
+          </a:p>
+        </p:txBody>
+      </p:sp>
+      <p:sp>
+        <p:nvSpPr>
+          <p:cNvPr id="9" name="Text 7"/>
+          <p:cNvSpPr/>
+          <p:nvPr/>
+        </p:nvSpPr>
+        <p:spPr>
+          <a:xfrm>
+            <a:off x="640080" y="3968496"/>
+            <a:ext cx="7863840" cy="256032"/>
+          </a:xfrm>
+          <a:prstGeom prst="rect">
+            <a:avLst/>
+          </a:prstGeom>
+          <a:noFill/>
+          <a:ln/>
+        </p:spPr>
+        <p:txBody>
+          <a:bodyPr wrap="square" rtlCol="0" anchor="ctr"/>
+          <a:lstStyle/>
+          <a:p>
+            <a:pPr algn="ctr" indent="0" marL="0">
+              <a:buNone/>
+            </a:pPr>
+            <a:r>
+              <a:rPr lang="en-US" sz="1100" spc="40" kern="0" dirty="0">
+                <a:solidFill>
+                  <a:srgbClr val="8C757C"/>
                 </a:solidFill>
                 <a:latin typeface="Yu Gothic" pitchFamily="34" charset="0"/>
                 <a:ea typeface="Yu Gothic" pitchFamily="34" charset="-122"/>
                 <a:cs typeface="Yu Gothic" pitchFamily="34" charset="-120"/>
               </a:rPr>
-              <a:t>正解を出すためではなく、自分の声を聞くために。</a:t>
-            </a:r>
-            <a:endParaRPr lang="en-US" sz="1500" dirty="0"/>
-          </a:p>
-        </p:txBody>
-      </p:sp>
-      <p:sp>
-        <p:nvSpPr>
-          <p:cNvPr id="7" name="Text 5"/>
-          <p:cNvSpPr/>
-          <p:nvPr/>
-        </p:nvSpPr>
-        <p:spPr>
-          <a:xfrm>
-            <a:off x="822960" y="3931920"/>
-            <a:ext cx="7498080" cy="274320"/>
-          </a:xfrm>
-          <a:prstGeom prst="rect">
-            <a:avLst/>
-          </a:prstGeom>
-          <a:noFill/>
-          <a:ln/>
-        </p:spPr>
-        <p:txBody>
-          <a:bodyPr wrap="square" rtlCol="0" anchor="ctr"/>
-          <a:lstStyle/>
-          <a:p>
-            <a:pPr algn="ctr" indent="0" marL="0">
-              <a:buNone/>
-            </a:pPr>
-            <a:r>
-              <a:rPr lang="en-US" sz="1150" spc="40" kern="0" dirty="0">
-                <a:solidFill>
-                  <a:srgbClr val="E7C9A8"/>
-                </a:solidFill>
-                <a:latin typeface="Yu Gothic" pitchFamily="34" charset="0"/>
-                <a:ea typeface="Yu Gothic" pitchFamily="34" charset="-122"/>
-                <a:cs typeface="Yu Gothic" pitchFamily="34" charset="-120"/>
-              </a:rPr>
               <a:t>身体を整えたあとも、所作を整えたあとも、最後にここへ戻ります。</a:t>
             </a:r>
-            <a:endParaRPr lang="en-US" sz="1150" dirty="0"/>
+            <a:endParaRPr lang="en-US" sz="1100" dirty="0"/>
           </a:p>
         </p:txBody>
       </p:sp>
